--- a/figures/fig_controller_interaction.pptx
+++ b/figures/fig_controller_interaction.pptx
@@ -10,8 +10,8 @@
   <p:notesMasterIdLst>
     <p:notesMasterId r:id="rId3"/>
   </p:notesMasterIdLst>
-  <p:sldSz cx="10972800" cy="3657600"/>
-  <p:notesSz cx="3657600" cy="10972800"/>
+  <p:sldSz cx="10972800" cy="4718304"/>
+  <p:notesSz cx="4718304" cy="10972800"/>
   <p:defaultTextStyle>
     <a:lvl1pPr marL="0" algn="l" defTabSz="914400" rtl="0" eaLnBrk="1" latinLnBrk="0" hangingPunct="1">
       <a:defRPr sz="1800" kern="1200">
@@ -883,143 +883,99 @@
         </p:nvSpPr>
         <p:spPr>
           <a:xfrm>
-            <a:off x="320040" y="2633472"/>
-            <a:ext cx="10332720" cy="914400"/>
+            <a:off x="274320" y="164592"/>
+            <a:ext cx="2395728" cy="1883664"/>
           </a:xfrm>
           <a:prstGeom prst="roundRect">
             <a:avLst>
-              <a:gd name="adj" fmla="val 8000"/>
+              <a:gd name="adj" fmla="val 2427"/>
             </a:avLst>
           </a:prstGeom>
           <a:solidFill>
-            <a:srgbClr val="F8FAFD"/>
+            <a:srgbClr val="F7F9FC"/>
+          </a:solidFill>
+          <a:ln w="9525">
+            <a:solidFill>
+              <a:srgbClr val="D4DCE8"/>
+            </a:solidFill>
+            <a:prstDash val="solid"/>
+          </a:ln>
+        </p:spPr>
+      </p:sp>
+      <p:sp>
+        <p:nvSpPr>
+          <p:cNvPr id="3" name="Shape 1"/>
+          <p:cNvSpPr/>
+          <p:nvPr/>
+        </p:nvSpPr>
+        <p:spPr>
+          <a:xfrm>
+            <a:off x="274320" y="164592"/>
+            <a:ext cx="2395728" cy="310896"/>
+          </a:xfrm>
+          <a:prstGeom prst="roundRect">
+            <a:avLst>
+              <a:gd name="adj" fmla="val 14706"/>
+            </a:avLst>
+          </a:prstGeom>
+          <a:solidFill>
+            <a:srgbClr val="E7EDF6"/>
           </a:solidFill>
           <a:ln w="12700">
             <a:solidFill>
-              <a:srgbClr val="14233E"/>
-            </a:solidFill>
-            <a:prstDash val="solid"/>
-          </a:ln>
-        </p:spPr>
-      </p:sp>
-      <p:sp>
-        <p:nvSpPr>
-          <p:cNvPr id="3" name="Shape 1"/>
-          <p:cNvSpPr/>
-          <p:nvPr/>
-        </p:nvSpPr>
-        <p:spPr>
-          <a:xfrm>
-            <a:off x="2971800" y="1234440"/>
-            <a:ext cx="411480" cy="0"/>
+              <a:srgbClr val="E7EDF6">
+                <a:alpha val="0"/>
+              </a:srgbClr>
+            </a:solidFill>
+            <a:prstDash val="solid"/>
+          </a:ln>
+        </p:spPr>
+      </p:sp>
+      <p:sp>
+        <p:nvSpPr>
+          <p:cNvPr id="4" name="Shape 2"/>
+          <p:cNvSpPr/>
+          <p:nvPr/>
+        </p:nvSpPr>
+        <p:spPr>
+          <a:xfrm>
+            <a:off x="274320" y="320040"/>
+            <a:ext cx="2395728" cy="155448"/>
+          </a:xfrm>
+          <a:prstGeom prst="rect">
+            <a:avLst/>
+          </a:prstGeom>
+          <a:solidFill>
+            <a:srgbClr val="E7EDF6"/>
+          </a:solidFill>
+          <a:ln w="12700">
+            <a:solidFill>
+              <a:srgbClr val="E7EDF6">
+                <a:alpha val="0"/>
+              </a:srgbClr>
+            </a:solidFill>
+            <a:prstDash val="solid"/>
+          </a:ln>
+        </p:spPr>
+      </p:sp>
+      <p:sp>
+        <p:nvSpPr>
+          <p:cNvPr id="5" name="Shape 3"/>
+          <p:cNvSpPr/>
+          <p:nvPr/>
+        </p:nvSpPr>
+        <p:spPr>
+          <a:xfrm>
+            <a:off x="274320" y="475488"/>
+            <a:ext cx="2395728" cy="0"/>
           </a:xfrm>
           <a:prstGeom prst="line">
             <a:avLst/>
           </a:prstGeom>
           <a:noFill/>
-          <a:ln w="17145">
-            <a:solidFill>
-              <a:srgbClr val="14233E"/>
-            </a:solidFill>
-            <a:prstDash val="solid"/>
-            <a:headEnd type="none"/>
-            <a:tailEnd type="triangle"/>
-          </a:ln>
-        </p:spPr>
-      </p:sp>
-      <p:sp>
-        <p:nvSpPr>
-          <p:cNvPr id="4" name="Shape 2"/>
-          <p:cNvSpPr/>
-          <p:nvPr/>
-        </p:nvSpPr>
-        <p:spPr>
-          <a:xfrm>
-            <a:off x="4617720" y="1234440"/>
-            <a:ext cx="749808" cy="0"/>
-          </a:xfrm>
-          <a:prstGeom prst="line">
-            <a:avLst/>
-          </a:prstGeom>
-          <a:noFill/>
-          <a:ln w="17145">
-            <a:solidFill>
-              <a:srgbClr val="14233E"/>
-            </a:solidFill>
-            <a:prstDash val="solid"/>
-            <a:headEnd type="none"/>
-            <a:tailEnd type="triangle"/>
-          </a:ln>
-        </p:spPr>
-      </p:sp>
-      <p:sp>
-        <p:nvSpPr>
-          <p:cNvPr id="5" name="Shape 3"/>
-          <p:cNvSpPr/>
-          <p:nvPr/>
-        </p:nvSpPr>
-        <p:spPr>
-          <a:xfrm>
-            <a:off x="6135624" y="1234440"/>
-            <a:ext cx="475488" cy="0"/>
-          </a:xfrm>
-          <a:prstGeom prst="line">
-            <a:avLst/>
-          </a:prstGeom>
-          <a:noFill/>
-          <a:ln w="17145">
-            <a:solidFill>
-              <a:srgbClr val="14233E"/>
-            </a:solidFill>
-            <a:prstDash val="solid"/>
-            <a:headEnd type="none"/>
-            <a:tailEnd type="triangle"/>
-          </a:ln>
-        </p:spPr>
-      </p:sp>
-      <p:sp>
-        <p:nvSpPr>
-          <p:cNvPr id="6" name="Shape 4"/>
-          <p:cNvSpPr/>
-          <p:nvPr/>
-        </p:nvSpPr>
-        <p:spPr>
-          <a:xfrm>
-            <a:off x="7379208" y="1234440"/>
-            <a:ext cx="795528" cy="0"/>
-          </a:xfrm>
-          <a:prstGeom prst="line">
-            <a:avLst/>
-          </a:prstGeom>
-          <a:noFill/>
-          <a:ln w="17145">
-            <a:solidFill>
-              <a:srgbClr val="14233E"/>
-            </a:solidFill>
-            <a:prstDash val="solid"/>
-            <a:headEnd type="none"/>
-            <a:tailEnd type="triangle"/>
-          </a:ln>
-        </p:spPr>
-      </p:sp>
-      <p:sp>
-        <p:nvSpPr>
-          <p:cNvPr id="7" name="Shape 5"/>
-          <p:cNvSpPr/>
-          <p:nvPr/>
-        </p:nvSpPr>
-        <p:spPr>
-          <a:xfrm>
-            <a:off x="8833104" y="1234440"/>
-            <a:ext cx="557784" cy="0"/>
-          </a:xfrm>
-          <a:prstGeom prst="line">
-            <a:avLst/>
-          </a:prstGeom>
-          <a:noFill/>
-          <a:ln w="17145">
-            <a:solidFill>
-              <a:srgbClr val="14233E"/>
+          <a:ln w="9525">
+            <a:solidFill>
+              <a:srgbClr val="D4DCE8"/>
             </a:solidFill>
             <a:prstDash val="solid"/>
             <a:headEnd type="none"/>
@@ -1029,389 +985,14 @@
       </p:sp>
       <p:sp>
         <p:nvSpPr>
-          <p:cNvPr id="8" name="Shape 6"/>
-          <p:cNvSpPr/>
-          <p:nvPr/>
-        </p:nvSpPr>
-        <p:spPr>
-          <a:xfrm>
-            <a:off x="9537192" y="1234440"/>
-            <a:ext cx="109728" cy="0"/>
-          </a:xfrm>
-          <a:prstGeom prst="line">
-            <a:avLst/>
-          </a:prstGeom>
-          <a:noFill/>
-          <a:ln w="17145">
-            <a:solidFill>
-              <a:srgbClr val="14233E"/>
-            </a:solidFill>
-            <a:prstDash val="solid"/>
-            <a:headEnd type="none"/>
-            <a:tailEnd type="triangle"/>
-          </a:ln>
-        </p:spPr>
-      </p:sp>
-      <p:sp>
-        <p:nvSpPr>
-          <p:cNvPr id="9" name="Shape 7"/>
-          <p:cNvSpPr/>
-          <p:nvPr/>
-        </p:nvSpPr>
-        <p:spPr>
-          <a:xfrm>
-            <a:off x="868680" y="1092708"/>
-            <a:ext cx="0" cy="626364"/>
-          </a:xfrm>
-          <a:prstGeom prst="line">
-            <a:avLst/>
-          </a:prstGeom>
-          <a:noFill/>
-          <a:ln w="17145">
-            <a:solidFill>
-              <a:srgbClr val="526477"/>
-            </a:solidFill>
-            <a:prstDash val="solid"/>
-            <a:headEnd type="none"/>
-            <a:tailEnd type="none"/>
-          </a:ln>
-        </p:spPr>
-      </p:sp>
-      <p:sp>
-        <p:nvSpPr>
-          <p:cNvPr id="10" name="Shape 8"/>
-          <p:cNvSpPr/>
-          <p:nvPr/>
-        </p:nvSpPr>
-        <p:spPr>
-          <a:xfrm>
-            <a:off x="868680" y="1719072"/>
-            <a:ext cx="457200" cy="0"/>
-          </a:xfrm>
-          <a:prstGeom prst="line">
-            <a:avLst/>
-          </a:prstGeom>
-          <a:noFill/>
-          <a:ln w="17145">
-            <a:solidFill>
-              <a:srgbClr val="526477"/>
-            </a:solidFill>
-            <a:prstDash val="solid"/>
-            <a:headEnd type="none"/>
-            <a:tailEnd type="none"/>
-          </a:ln>
-        </p:spPr>
-      </p:sp>
-      <p:sp>
-        <p:nvSpPr>
-          <p:cNvPr id="11" name="Shape 9"/>
-          <p:cNvSpPr/>
-          <p:nvPr/>
-        </p:nvSpPr>
-        <p:spPr>
-          <a:xfrm>
-            <a:off x="1325880" y="1719072"/>
-            <a:ext cx="0" cy="1133856"/>
-          </a:xfrm>
-          <a:prstGeom prst="line">
-            <a:avLst/>
-          </a:prstGeom>
-          <a:noFill/>
-          <a:ln w="17145">
-            <a:solidFill>
-              <a:srgbClr val="526477"/>
-            </a:solidFill>
-            <a:prstDash val="solid"/>
-            <a:headEnd type="none"/>
-            <a:tailEnd type="triangle"/>
-          </a:ln>
-        </p:spPr>
-      </p:sp>
-      <p:sp>
-        <p:nvSpPr>
-          <p:cNvPr id="12" name="Shape 10"/>
-          <p:cNvSpPr/>
-          <p:nvPr/>
-        </p:nvSpPr>
-        <p:spPr>
-          <a:xfrm>
-            <a:off x="1874520" y="2852928"/>
-            <a:ext cx="0" cy="-1188720"/>
-          </a:xfrm>
-          <a:prstGeom prst="line">
-            <a:avLst/>
-          </a:prstGeom>
-          <a:noFill/>
-          <a:ln w="17145">
-            <a:solidFill>
-              <a:srgbClr val="E56E2E"/>
-            </a:solidFill>
-            <a:prstDash val="solid"/>
-            <a:headEnd type="none"/>
-            <a:tailEnd type="none"/>
-          </a:ln>
-        </p:spPr>
-      </p:sp>
-      <p:sp>
-        <p:nvSpPr>
-          <p:cNvPr id="13" name="Shape 11"/>
-          <p:cNvSpPr/>
-          <p:nvPr/>
-        </p:nvSpPr>
-        <p:spPr>
-          <a:xfrm>
-            <a:off x="1874520" y="1664208"/>
-            <a:ext cx="-777240" cy="0"/>
-          </a:xfrm>
-          <a:prstGeom prst="line">
-            <a:avLst/>
-          </a:prstGeom>
-          <a:noFill/>
-          <a:ln w="17145">
-            <a:solidFill>
-              <a:srgbClr val="E56E2E"/>
-            </a:solidFill>
-            <a:prstDash val="solid"/>
-            <a:headEnd type="none"/>
-            <a:tailEnd type="none"/>
-          </a:ln>
-        </p:spPr>
-      </p:sp>
-      <p:sp>
-        <p:nvSpPr>
-          <p:cNvPr id="14" name="Shape 12"/>
-          <p:cNvSpPr/>
-          <p:nvPr/>
-        </p:nvSpPr>
-        <p:spPr>
-          <a:xfrm>
-            <a:off x="1097280" y="1664208"/>
-            <a:ext cx="0" cy="-356616"/>
-          </a:xfrm>
-          <a:prstGeom prst="line">
-            <a:avLst/>
-          </a:prstGeom>
-          <a:noFill/>
-          <a:ln w="17145">
-            <a:solidFill>
-              <a:srgbClr val="E56E2E"/>
-            </a:solidFill>
-            <a:prstDash val="solid"/>
-            <a:headEnd type="none"/>
-            <a:tailEnd type="triangle"/>
-          </a:ln>
-        </p:spPr>
-      </p:sp>
-      <p:sp>
-        <p:nvSpPr>
-          <p:cNvPr id="15" name="Shape 13"/>
-          <p:cNvSpPr/>
-          <p:nvPr/>
-        </p:nvSpPr>
-        <p:spPr>
-          <a:xfrm>
-            <a:off x="8823960" y="2852928"/>
-            <a:ext cx="0" cy="-640080"/>
-          </a:xfrm>
-          <a:prstGeom prst="line">
-            <a:avLst/>
-          </a:prstGeom>
-          <a:noFill/>
-          <a:ln w="17145">
-            <a:solidFill>
-              <a:srgbClr val="2476D2"/>
-            </a:solidFill>
-            <a:prstDash val="solid"/>
-            <a:headEnd type="none"/>
-            <a:tailEnd type="none"/>
-          </a:ln>
-        </p:spPr>
-      </p:sp>
-      <p:sp>
-        <p:nvSpPr>
-          <p:cNvPr id="16" name="Shape 14"/>
-          <p:cNvSpPr/>
-          <p:nvPr/>
-        </p:nvSpPr>
-        <p:spPr>
-          <a:xfrm>
-            <a:off x="8823960" y="2212848"/>
-            <a:ext cx="-2423160" cy="0"/>
-          </a:xfrm>
-          <a:prstGeom prst="line">
-            <a:avLst/>
-          </a:prstGeom>
-          <a:noFill/>
-          <a:ln w="17145">
-            <a:solidFill>
-              <a:srgbClr val="2476D2"/>
-            </a:solidFill>
-            <a:prstDash val="solid"/>
-            <a:headEnd type="none"/>
-            <a:tailEnd type="none"/>
-          </a:ln>
-        </p:spPr>
-      </p:sp>
-      <p:sp>
-        <p:nvSpPr>
-          <p:cNvPr id="17" name="Shape 15"/>
-          <p:cNvSpPr/>
-          <p:nvPr/>
-        </p:nvSpPr>
-        <p:spPr>
-          <a:xfrm>
-            <a:off x="6400800" y="2212848"/>
-            <a:ext cx="0" cy="-457200"/>
-          </a:xfrm>
-          <a:prstGeom prst="line">
-            <a:avLst/>
-          </a:prstGeom>
-          <a:noFill/>
-          <a:ln w="17145">
-            <a:solidFill>
-              <a:srgbClr val="2476D2"/>
-            </a:solidFill>
-            <a:prstDash val="solid"/>
-            <a:headEnd type="none"/>
-            <a:tailEnd type="triangle"/>
-          </a:ln>
-        </p:spPr>
-      </p:sp>
-      <p:sp>
-        <p:nvSpPr>
-          <p:cNvPr id="18" name="Shape 16"/>
-          <p:cNvSpPr/>
-          <p:nvPr/>
-        </p:nvSpPr>
-        <p:spPr>
-          <a:xfrm>
-            <a:off x="9464040" y="1307592"/>
-            <a:ext cx="0" cy="594360"/>
-          </a:xfrm>
-          <a:prstGeom prst="line">
-            <a:avLst/>
-          </a:prstGeom>
-          <a:noFill/>
-          <a:ln w="17145">
-            <a:solidFill>
-              <a:srgbClr val="526477"/>
-            </a:solidFill>
-            <a:prstDash val="solid"/>
-            <a:headEnd type="none"/>
-            <a:tailEnd type="none"/>
-          </a:ln>
-        </p:spPr>
-      </p:sp>
-      <p:sp>
-        <p:nvSpPr>
-          <p:cNvPr id="19" name="Shape 17"/>
-          <p:cNvSpPr/>
-          <p:nvPr/>
-        </p:nvSpPr>
-        <p:spPr>
-          <a:xfrm>
-            <a:off x="9464040" y="1901952"/>
-            <a:ext cx="1143000" cy="0"/>
-          </a:xfrm>
-          <a:prstGeom prst="line">
-            <a:avLst/>
-          </a:prstGeom>
-          <a:noFill/>
-          <a:ln w="17145">
-            <a:solidFill>
-              <a:srgbClr val="526477"/>
-            </a:solidFill>
-            <a:prstDash val="solid"/>
-            <a:headEnd type="none"/>
-            <a:tailEnd type="none"/>
-          </a:ln>
-        </p:spPr>
-      </p:sp>
-      <p:sp>
-        <p:nvSpPr>
-          <p:cNvPr id="20" name="Shape 18"/>
-          <p:cNvSpPr/>
-          <p:nvPr/>
-        </p:nvSpPr>
-        <p:spPr>
-          <a:xfrm>
-            <a:off x="10607040" y="1901952"/>
-            <a:ext cx="0" cy="658368"/>
-          </a:xfrm>
-          <a:prstGeom prst="line">
-            <a:avLst/>
-          </a:prstGeom>
-          <a:noFill/>
-          <a:ln w="17145">
-            <a:solidFill>
-              <a:srgbClr val="526477"/>
-            </a:solidFill>
-            <a:prstDash val="solid"/>
-            <a:headEnd type="none"/>
-            <a:tailEnd type="triangle"/>
-          </a:ln>
-        </p:spPr>
-      </p:sp>
-      <p:sp>
-        <p:nvSpPr>
-          <p:cNvPr id="21" name="Shape 19"/>
-          <p:cNvSpPr/>
-          <p:nvPr/>
-        </p:nvSpPr>
-        <p:spPr>
-          <a:xfrm>
-            <a:off x="4343400" y="3127248"/>
-            <a:ext cx="-1051560" cy="0"/>
-          </a:xfrm>
-          <a:prstGeom prst="line">
-            <a:avLst/>
-          </a:prstGeom>
-          <a:noFill/>
-          <a:ln w="17145">
-            <a:solidFill>
-              <a:srgbClr val="E56E2E"/>
-            </a:solidFill>
-            <a:prstDash val="solid"/>
-            <a:headEnd type="none"/>
-            <a:tailEnd type="triangle"/>
-          </a:ln>
-        </p:spPr>
-      </p:sp>
-      <p:sp>
-        <p:nvSpPr>
-          <p:cNvPr id="22" name="Shape 20"/>
-          <p:cNvSpPr/>
-          <p:nvPr/>
-        </p:nvSpPr>
-        <p:spPr>
-          <a:xfrm>
-            <a:off x="6629400" y="3127248"/>
-            <a:ext cx="1051560" cy="0"/>
-          </a:xfrm>
-          <a:prstGeom prst="line">
-            <a:avLst/>
-          </a:prstGeom>
-          <a:noFill/>
-          <a:ln w="17145">
-            <a:solidFill>
-              <a:srgbClr val="2476D2"/>
-            </a:solidFill>
-            <a:prstDash val="solid"/>
-            <a:headEnd type="none"/>
-            <a:tailEnd type="triangle"/>
-          </a:ln>
-        </p:spPr>
-      </p:sp>
-      <p:sp>
-        <p:nvSpPr>
-          <p:cNvPr id="23" name="Text 21"/>
-          <p:cNvSpPr/>
-          <p:nvPr/>
-        </p:nvSpPr>
-        <p:spPr>
-          <a:xfrm>
-            <a:off x="457200" y="91440"/>
-            <a:ext cx="2514600" cy="256032"/>
+          <p:cNvPr id="6" name="Text 4"/>
+          <p:cNvSpPr txBox="1"/>
+          <p:nvPr/>
+        </p:nvSpPr>
+        <p:spPr>
+          <a:xfrm>
+            <a:off x="274320" y="164592"/>
+            <a:ext cx="2395728" cy="310896"/>
           </a:xfrm>
           <a:prstGeom prst="rect">
             <a:avLst/>
@@ -1420,16 +1001,14 @@
           <a:ln/>
         </p:spPr>
         <p:txBody>
-          <a:bodyPr wrap="square" lIns="0" tIns="0" rIns="0" bIns="0" rtlCol="0" anchor="ctr">
-            <a:normAutofit/>
-          </a:bodyPr>
+          <a:bodyPr wrap="none" lIns="0" tIns="0" rIns="0" bIns="0" rtlCol="0" anchor="ctr"/>
           <a:lstStyle/>
           <a:p>
             <a:pPr algn="ctr" indent="0" marL="0">
               <a:buNone/>
             </a:pPr>
             <a:r>
-              <a:rPr lang="en-US" sz="1500" b="1" dirty="0">
+              <a:rPr lang="en-US" sz="1450" b="1" dirty="0">
                 <a:solidFill>
                   <a:srgbClr val="14233E"/>
                 </a:solidFill>
@@ -1439,20 +1018,128 @@
               </a:rPr>
               <a:t>Parallel captures</a:t>
             </a:r>
-            <a:endParaRPr lang="en-US" sz="1500" dirty="0"/>
+            <a:endParaRPr lang="en-US" sz="1450" dirty="0"/>
           </a:p>
         </p:txBody>
       </p:sp>
       <p:sp>
         <p:nvSpPr>
-          <p:cNvPr id="24" name="Text 22"/>
-          <p:cNvSpPr/>
-          <p:nvPr/>
-        </p:nvSpPr>
-        <p:spPr>
-          <a:xfrm>
-            <a:off x="2926080" y="91440"/>
-            <a:ext cx="2286000" cy="256032"/>
+          <p:cNvPr id="7" name="Shape 5"/>
+          <p:cNvSpPr/>
+          <p:nvPr/>
+        </p:nvSpPr>
+        <p:spPr>
+          <a:xfrm>
+            <a:off x="2944368" y="164592"/>
+            <a:ext cx="2633472" cy="1883664"/>
+          </a:xfrm>
+          <a:prstGeom prst="roundRect">
+            <a:avLst>
+              <a:gd name="adj" fmla="val 2427"/>
+            </a:avLst>
+          </a:prstGeom>
+          <a:solidFill>
+            <a:srgbClr val="F7F9FC"/>
+          </a:solidFill>
+          <a:ln w="9525">
+            <a:solidFill>
+              <a:srgbClr val="D4DCE8"/>
+            </a:solidFill>
+            <a:prstDash val="solid"/>
+          </a:ln>
+        </p:spPr>
+      </p:sp>
+      <p:sp>
+        <p:nvSpPr>
+          <p:cNvPr id="8" name="Shape 6"/>
+          <p:cNvSpPr/>
+          <p:nvPr/>
+        </p:nvSpPr>
+        <p:spPr>
+          <a:xfrm>
+            <a:off x="2944368" y="164592"/>
+            <a:ext cx="2633472" cy="310896"/>
+          </a:xfrm>
+          <a:prstGeom prst="roundRect">
+            <a:avLst>
+              <a:gd name="adj" fmla="val 14706"/>
+            </a:avLst>
+          </a:prstGeom>
+          <a:solidFill>
+            <a:srgbClr val="E7EDF6"/>
+          </a:solidFill>
+          <a:ln w="12700">
+            <a:solidFill>
+              <a:srgbClr val="E7EDF6">
+                <a:alpha val="0"/>
+              </a:srgbClr>
+            </a:solidFill>
+            <a:prstDash val="solid"/>
+          </a:ln>
+        </p:spPr>
+      </p:sp>
+      <p:sp>
+        <p:nvSpPr>
+          <p:cNvPr id="9" name="Shape 7"/>
+          <p:cNvSpPr/>
+          <p:nvPr/>
+        </p:nvSpPr>
+        <p:spPr>
+          <a:xfrm>
+            <a:off x="2944368" y="320040"/>
+            <a:ext cx="2633472" cy="155448"/>
+          </a:xfrm>
+          <a:prstGeom prst="rect">
+            <a:avLst/>
+          </a:prstGeom>
+          <a:solidFill>
+            <a:srgbClr val="E7EDF6"/>
+          </a:solidFill>
+          <a:ln w="12700">
+            <a:solidFill>
+              <a:srgbClr val="E7EDF6">
+                <a:alpha val="0"/>
+              </a:srgbClr>
+            </a:solidFill>
+            <a:prstDash val="solid"/>
+          </a:ln>
+        </p:spPr>
+      </p:sp>
+      <p:sp>
+        <p:nvSpPr>
+          <p:cNvPr id="10" name="Shape 8"/>
+          <p:cNvSpPr/>
+          <p:nvPr/>
+        </p:nvSpPr>
+        <p:spPr>
+          <a:xfrm>
+            <a:off x="2944368" y="475488"/>
+            <a:ext cx="2633472" cy="0"/>
+          </a:xfrm>
+          <a:prstGeom prst="line">
+            <a:avLst/>
+          </a:prstGeom>
+          <a:noFill/>
+          <a:ln w="9525">
+            <a:solidFill>
+              <a:srgbClr val="D4DCE8"/>
+            </a:solidFill>
+            <a:prstDash val="solid"/>
+            <a:headEnd type="none"/>
+            <a:tailEnd type="none"/>
+          </a:ln>
+        </p:spPr>
+      </p:sp>
+      <p:sp>
+        <p:nvSpPr>
+          <p:cNvPr id="11" name="Text 9"/>
+          <p:cNvSpPr txBox="1"/>
+          <p:nvPr/>
+        </p:nvSpPr>
+        <p:spPr>
+          <a:xfrm>
+            <a:off x="2944368" y="164592"/>
+            <a:ext cx="2633472" cy="310896"/>
           </a:xfrm>
           <a:prstGeom prst="rect">
             <a:avLst/>
@@ -1461,16 +1148,14 @@
           <a:ln/>
         </p:spPr>
         <p:txBody>
-          <a:bodyPr wrap="square" lIns="0" tIns="0" rIns="0" bIns="0" rtlCol="0" anchor="ctr">
-            <a:normAutofit/>
-          </a:bodyPr>
+          <a:bodyPr wrap="none" lIns="0" tIns="0" rIns="0" bIns="0" rtlCol="0" anchor="ctr"/>
           <a:lstStyle/>
           <a:p>
             <a:pPr algn="ctr" indent="0" marL="0">
               <a:buNone/>
             </a:pPr>
             <a:r>
-              <a:rPr lang="en-US" sz="1500" b="1" dirty="0">
+              <a:rPr lang="en-US" sz="1450" b="1" dirty="0">
                 <a:solidFill>
                   <a:srgbClr val="14233E"/>
                 </a:solidFill>
@@ -1480,20 +1165,128 @@
               </a:rPr>
               <a:t>Pending Draft Sequences</a:t>
             </a:r>
-            <a:endParaRPr lang="en-US" sz="1500" dirty="0"/>
+            <a:endParaRPr lang="en-US" sz="1450" dirty="0"/>
           </a:p>
         </p:txBody>
       </p:sp>
       <p:sp>
         <p:nvSpPr>
-          <p:cNvPr id="25" name="Text 23"/>
-          <p:cNvSpPr/>
-          <p:nvPr/>
-        </p:nvSpPr>
-        <p:spPr>
-          <a:xfrm>
-            <a:off x="5166360" y="91440"/>
-            <a:ext cx="5349240" cy="256032"/>
+          <p:cNvPr id="12" name="Shape 10"/>
+          <p:cNvSpPr/>
+          <p:nvPr/>
+        </p:nvSpPr>
+        <p:spPr>
+          <a:xfrm>
+            <a:off x="5852160" y="164592"/>
+            <a:ext cx="4846320" cy="1883664"/>
+          </a:xfrm>
+          <a:prstGeom prst="roundRect">
+            <a:avLst>
+              <a:gd name="adj" fmla="val 2427"/>
+            </a:avLst>
+          </a:prstGeom>
+          <a:solidFill>
+            <a:srgbClr val="F7F9FC"/>
+          </a:solidFill>
+          <a:ln w="9525">
+            <a:solidFill>
+              <a:srgbClr val="D4DCE8"/>
+            </a:solidFill>
+            <a:prstDash val="solid"/>
+          </a:ln>
+        </p:spPr>
+      </p:sp>
+      <p:sp>
+        <p:nvSpPr>
+          <p:cNvPr id="13" name="Shape 11"/>
+          <p:cNvSpPr/>
+          <p:nvPr/>
+        </p:nvSpPr>
+        <p:spPr>
+          <a:xfrm>
+            <a:off x="5852160" y="164592"/>
+            <a:ext cx="4846320" cy="310896"/>
+          </a:xfrm>
+          <a:prstGeom prst="roundRect">
+            <a:avLst>
+              <a:gd name="adj" fmla="val 14706"/>
+            </a:avLst>
+          </a:prstGeom>
+          <a:solidFill>
+            <a:srgbClr val="E7EDF6"/>
+          </a:solidFill>
+          <a:ln w="12700">
+            <a:solidFill>
+              <a:srgbClr val="E7EDF6">
+                <a:alpha val="0"/>
+              </a:srgbClr>
+            </a:solidFill>
+            <a:prstDash val="solid"/>
+          </a:ln>
+        </p:spPr>
+      </p:sp>
+      <p:sp>
+        <p:nvSpPr>
+          <p:cNvPr id="14" name="Shape 12"/>
+          <p:cNvSpPr/>
+          <p:nvPr/>
+        </p:nvSpPr>
+        <p:spPr>
+          <a:xfrm>
+            <a:off x="5852160" y="320040"/>
+            <a:ext cx="4846320" cy="155448"/>
+          </a:xfrm>
+          <a:prstGeom prst="rect">
+            <a:avLst/>
+          </a:prstGeom>
+          <a:solidFill>
+            <a:srgbClr val="E7EDF6"/>
+          </a:solidFill>
+          <a:ln w="12700">
+            <a:solidFill>
+              <a:srgbClr val="E7EDF6">
+                <a:alpha val="0"/>
+              </a:srgbClr>
+            </a:solidFill>
+            <a:prstDash val="solid"/>
+          </a:ln>
+        </p:spPr>
+      </p:sp>
+      <p:sp>
+        <p:nvSpPr>
+          <p:cNvPr id="15" name="Shape 13"/>
+          <p:cNvSpPr/>
+          <p:nvPr/>
+        </p:nvSpPr>
+        <p:spPr>
+          <a:xfrm>
+            <a:off x="5852160" y="475488"/>
+            <a:ext cx="4846320" cy="0"/>
+          </a:xfrm>
+          <a:prstGeom prst="line">
+            <a:avLst/>
+          </a:prstGeom>
+          <a:noFill/>
+          <a:ln w="9525">
+            <a:solidFill>
+              <a:srgbClr val="D4DCE8"/>
+            </a:solidFill>
+            <a:prstDash val="solid"/>
+            <a:headEnd type="none"/>
+            <a:tailEnd type="none"/>
+          </a:ln>
+        </p:spPr>
+      </p:sp>
+      <p:sp>
+        <p:nvSpPr>
+          <p:cNvPr id="16" name="Text 14"/>
+          <p:cNvSpPr txBox="1"/>
+          <p:nvPr/>
+        </p:nvSpPr>
+        <p:spPr>
+          <a:xfrm>
+            <a:off x="5504688" y="164592"/>
+            <a:ext cx="4846320" cy="310896"/>
           </a:xfrm>
           <a:prstGeom prst="rect">
             <a:avLst/>
@@ -1502,16 +1295,14 @@
           <a:ln/>
         </p:spPr>
         <p:txBody>
-          <a:bodyPr wrap="square" lIns="0" tIns="0" rIns="0" bIns="0" rtlCol="0" anchor="ctr">
-            <a:normAutofit/>
-          </a:bodyPr>
+          <a:bodyPr wrap="none" lIns="0" tIns="0" rIns="0" bIns="0" rtlCol="0" anchor="ctr"/>
           <a:lstStyle/>
           <a:p>
             <a:pPr algn="ctr" indent="0" marL="0">
               <a:buNone/>
             </a:pPr>
             <a:r>
-              <a:rPr lang="en-US" sz="1500" b="1" dirty="0">
+              <a:rPr lang="en-US" sz="1450" b="1" dirty="0">
                 <a:solidFill>
                   <a:srgbClr val="14233E"/>
                 </a:solidFill>
@@ -1521,28 +1312,28 @@
               </a:rPr>
               <a:t>One active Draft Sequence</a:t>
             </a:r>
-            <a:endParaRPr lang="en-US" sz="1500" dirty="0"/>
+            <a:endParaRPr lang="en-US" sz="1450" dirty="0"/>
           </a:p>
         </p:txBody>
       </p:sp>
       <p:sp>
         <p:nvSpPr>
-          <p:cNvPr id="26" name="Shape 24"/>
-          <p:cNvSpPr/>
-          <p:nvPr/>
-        </p:nvSpPr>
-        <p:spPr>
-          <a:xfrm>
-            <a:off x="457200" y="457200"/>
-            <a:ext cx="1874520" cy="329184"/>
+          <p:cNvPr id="17" name="Shape 15"/>
+          <p:cNvSpPr/>
+          <p:nvPr/>
+        </p:nvSpPr>
+        <p:spPr>
+          <a:xfrm>
+            <a:off x="274320" y="2798064"/>
+            <a:ext cx="10424160" cy="1755648"/>
           </a:xfrm>
           <a:prstGeom prst="roundRect">
             <a:avLst>
-              <a:gd name="adj" fmla="val 12500"/>
+              <a:gd name="adj" fmla="val 2604"/>
             </a:avLst>
           </a:prstGeom>
           <a:solidFill>
-            <a:srgbClr val="FFFFFF"/>
+            <a:srgbClr val="F2F5FA"/>
           </a:solidFill>
           <a:ln w="12700">
             <a:solidFill>
@@ -1554,14 +1345,95 @@
       </p:sp>
       <p:sp>
         <p:nvSpPr>
-          <p:cNvPr id="27" name="Text 25"/>
-          <p:cNvSpPr/>
-          <p:nvPr/>
-        </p:nvSpPr>
-        <p:spPr>
-          <a:xfrm>
-            <a:off x="457200" y="457200"/>
-            <a:ext cx="1874520" cy="329184"/>
+          <p:cNvPr id="18" name="Shape 16"/>
+          <p:cNvSpPr/>
+          <p:nvPr/>
+        </p:nvSpPr>
+        <p:spPr>
+          <a:xfrm>
+            <a:off x="274320" y="2798064"/>
+            <a:ext cx="10424160" cy="310896"/>
+          </a:xfrm>
+          <a:prstGeom prst="roundRect">
+            <a:avLst>
+              <a:gd name="adj" fmla="val 14706"/>
+            </a:avLst>
+          </a:prstGeom>
+          <a:solidFill>
+            <a:srgbClr val="DFE7F3"/>
+          </a:solidFill>
+          <a:ln w="12700">
+            <a:solidFill>
+              <a:srgbClr val="DFE7F3">
+                <a:alpha val="0"/>
+              </a:srgbClr>
+            </a:solidFill>
+            <a:prstDash val="solid"/>
+          </a:ln>
+        </p:spPr>
+      </p:sp>
+      <p:sp>
+        <p:nvSpPr>
+          <p:cNvPr id="19" name="Shape 17"/>
+          <p:cNvSpPr/>
+          <p:nvPr/>
+        </p:nvSpPr>
+        <p:spPr>
+          <a:xfrm>
+            <a:off x="274320" y="2953512"/>
+            <a:ext cx="10424160" cy="155448"/>
+          </a:xfrm>
+          <a:prstGeom prst="rect">
+            <a:avLst/>
+          </a:prstGeom>
+          <a:solidFill>
+            <a:srgbClr val="DFE7F3"/>
+          </a:solidFill>
+          <a:ln w="12700">
+            <a:solidFill>
+              <a:srgbClr val="DFE7F3">
+                <a:alpha val="0"/>
+              </a:srgbClr>
+            </a:solidFill>
+            <a:prstDash val="solid"/>
+          </a:ln>
+        </p:spPr>
+      </p:sp>
+      <p:sp>
+        <p:nvSpPr>
+          <p:cNvPr id="20" name="Shape 18"/>
+          <p:cNvSpPr/>
+          <p:nvPr/>
+        </p:nvSpPr>
+        <p:spPr>
+          <a:xfrm>
+            <a:off x="274320" y="3108960"/>
+            <a:ext cx="10424160" cy="0"/>
+          </a:xfrm>
+          <a:prstGeom prst="line">
+            <a:avLst/>
+          </a:prstGeom>
+          <a:noFill/>
+          <a:ln w="12700">
+            <a:solidFill>
+              <a:srgbClr val="14233E"/>
+            </a:solidFill>
+            <a:prstDash val="solid"/>
+            <a:headEnd type="none"/>
+            <a:tailEnd type="none"/>
+          </a:ln>
+        </p:spPr>
+      </p:sp>
+      <p:sp>
+        <p:nvSpPr>
+          <p:cNvPr id="21" name="Text 19"/>
+          <p:cNvSpPr txBox="1"/>
+          <p:nvPr/>
+        </p:nvSpPr>
+        <p:spPr>
+          <a:xfrm>
+            <a:off x="274320" y="2798064"/>
+            <a:ext cx="10424160" cy="310896"/>
           </a:xfrm>
           <a:prstGeom prst="rect">
             <a:avLst/>
@@ -1570,16 +1442,160 @@
           <a:ln/>
         </p:spPr>
         <p:txBody>
-          <a:bodyPr wrap="square" lIns="0" tIns="0" rIns="0" bIns="0" rtlCol="0" anchor="ctr">
-            <a:normAutofit/>
-          </a:bodyPr>
+          <a:bodyPr wrap="none" lIns="0" tIns="0" rIns="0" bIns="0" rtlCol="0" anchor="ctr"/>
           <a:lstStyle/>
           <a:p>
             <a:pPr algn="ctr" indent="0" marL="0">
               <a:buNone/>
             </a:pPr>
             <a:r>
-              <a:rPr lang="en-US" sz="1180" dirty="0">
+              <a:rPr lang="en-US" sz="1450" b="1" dirty="0">
+                <a:solidFill>
+                  <a:srgbClr val="14233E"/>
+                </a:solidFill>
+                <a:latin typeface="Arial" pitchFamily="34" charset="0"/>
+                <a:ea typeface="Arial" pitchFamily="34" charset="-122"/>
+                <a:cs typeface="Arial" pitchFamily="34" charset="-120"/>
+              </a:rPr>
+              <a:t>Budget-Aware Draft Controller</a:t>
+            </a:r>
+            <a:endParaRPr lang="en-US" sz="1450" dirty="0"/>
+          </a:p>
+        </p:txBody>
+      </p:sp>
+      <p:sp>
+        <p:nvSpPr>
+          <p:cNvPr id="22" name="Shape 20"/>
+          <p:cNvSpPr/>
+          <p:nvPr/>
+        </p:nvSpPr>
+        <p:spPr>
+          <a:xfrm>
+            <a:off x="9238698" y="219456"/>
+            <a:ext cx="566928" cy="201168"/>
+          </a:xfrm>
+          <a:prstGeom prst="roundRect">
+            <a:avLst>
+              <a:gd name="adj" fmla="val 13636"/>
+            </a:avLst>
+          </a:prstGeom>
+          <a:solidFill>
+            <a:srgbClr val="FFFFFF"/>
+          </a:solidFill>
+          <a:ln w="10795">
+            <a:solidFill>
+              <a:srgbClr val="2476D2"/>
+            </a:solidFill>
+            <a:prstDash val="solid"/>
+          </a:ln>
+        </p:spPr>
+      </p:sp>
+      <p:sp>
+        <p:nvSpPr>
+          <p:cNvPr id="23" name="Text 21"/>
+          <p:cNvSpPr txBox="1"/>
+          <p:nvPr/>
+        </p:nvSpPr>
+        <p:spPr>
+          <a:xfrm>
+            <a:off x="9238698" y="219456"/>
+            <a:ext cx="566928" cy="201168"/>
+          </a:xfrm>
+          <a:prstGeom prst="rect">
+            <a:avLst/>
+          </a:prstGeom>
+          <a:noFill/>
+          <a:ln/>
+        </p:spPr>
+        <p:txBody>
+          <a:bodyPr wrap="none" lIns="0" tIns="0" rIns="0" bIns="0" rtlCol="0" anchor="ctr"/>
+          <a:lstStyle/>
+          <a:p>
+            <a:pPr algn="ctr" indent="0" marL="0">
+              <a:buNone/>
+            </a:pPr>
+            <a:r>
+              <a:rPr lang="en-US" sz="1050" b="1" dirty="0">
+                <a:solidFill>
+                  <a:srgbClr val="2476D2"/>
+                </a:solidFill>
+                <a:latin typeface="Arial" pitchFamily="34" charset="0"/>
+                <a:ea typeface="Arial" pitchFamily="34" charset="-122"/>
+                <a:cs typeface="Arial" pitchFamily="34" charset="-120"/>
+              </a:rPr>
+              <a:t>Draft </a:t>
+            </a:r>
+            <a:pPr algn="ctr" indent="0" marL="0">
+              <a:buNone/>
+            </a:pPr>
+            <a:r>
+              <a:rPr lang="en-US" sz="1050" b="1" i="1" dirty="0">
+                <a:solidFill>
+                  <a:srgbClr val="2476D2"/>
+                </a:solidFill>
+                <a:latin typeface="Arial" pitchFamily="34" charset="0"/>
+                <a:ea typeface="Arial" pitchFamily="34" charset="-122"/>
+                <a:cs typeface="Arial" pitchFamily="34" charset="-120"/>
+              </a:rPr>
+              <a:t>i</a:t>
+            </a:r>
+            <a:endParaRPr lang="en-US" sz="1050" dirty="0"/>
+          </a:p>
+        </p:txBody>
+      </p:sp>
+      <p:sp>
+        <p:nvSpPr>
+          <p:cNvPr id="24" name="Shape 22"/>
+          <p:cNvSpPr/>
+          <p:nvPr/>
+        </p:nvSpPr>
+        <p:spPr>
+          <a:xfrm>
+            <a:off x="457200" y="758952"/>
+            <a:ext cx="1298448" cy="347472"/>
+          </a:xfrm>
+          <a:prstGeom prst="roundRect">
+            <a:avLst>
+              <a:gd name="adj" fmla="val 11842"/>
+            </a:avLst>
+          </a:prstGeom>
+          <a:solidFill>
+            <a:srgbClr val="FFFFFF"/>
+          </a:solidFill>
+          <a:ln w="13335">
+            <a:solidFill>
+              <a:srgbClr val="14233E"/>
+            </a:solidFill>
+            <a:prstDash val="solid"/>
+          </a:ln>
+        </p:spPr>
+      </p:sp>
+      <p:sp>
+        <p:nvSpPr>
+          <p:cNvPr id="25" name="Text 23"/>
+          <p:cNvSpPr txBox="1"/>
+          <p:nvPr/>
+        </p:nvSpPr>
+        <p:spPr>
+          <a:xfrm>
+            <a:off x="457200" y="758952"/>
+            <a:ext cx="1298448" cy="347472"/>
+          </a:xfrm>
+          <a:prstGeom prst="rect">
+            <a:avLst/>
+          </a:prstGeom>
+          <a:noFill/>
+          <a:ln/>
+        </p:spPr>
+        <p:txBody>
+          <a:bodyPr wrap="none" lIns="0" tIns="0" rIns="0" bIns="0" rtlCol="0" anchor="ctr"/>
+          <a:lstStyle/>
+          <a:p>
+            <a:pPr algn="ctr" indent="0" marL="0">
+              <a:buNone/>
+            </a:pPr>
+            <a:r>
+              <a:rPr lang="en-US" sz="1250" dirty="0">
                 <a:solidFill>
                   <a:srgbClr val="14233E"/>
                 </a:solidFill>
@@ -1593,7 +1609,7 @@
               <a:buNone/>
             </a:pPr>
             <a:r>
-              <a:rPr lang="en-US" sz="1180" i="1" dirty="0">
+              <a:rPr lang="en-US" sz="1250" i="1" dirty="0">
                 <a:solidFill>
                   <a:srgbClr val="14233E"/>
                 </a:solidFill>
@@ -1603,30 +1619,30 @@
               </a:rPr>
               <a:t>i</a:t>
             </a:r>
-            <a:endParaRPr lang="en-US" sz="1180" dirty="0"/>
+            <a:endParaRPr lang="en-US" sz="1250" dirty="0"/>
           </a:p>
         </p:txBody>
       </p:sp>
       <p:sp>
         <p:nvSpPr>
-          <p:cNvPr id="28" name="Shape 26"/>
-          <p:cNvSpPr/>
-          <p:nvPr/>
-        </p:nvSpPr>
-        <p:spPr>
-          <a:xfrm>
-            <a:off x="640080" y="763524"/>
-            <a:ext cx="1874520" cy="329184"/>
+          <p:cNvPr id="26" name="Shape 24"/>
+          <p:cNvSpPr/>
+          <p:nvPr/>
+        </p:nvSpPr>
+        <p:spPr>
+          <a:xfrm>
+            <a:off x="713232" y="1106424"/>
+            <a:ext cx="1298448" cy="347472"/>
           </a:xfrm>
           <a:prstGeom prst="roundRect">
             <a:avLst>
-              <a:gd name="adj" fmla="val 12500"/>
+              <a:gd name="adj" fmla="val 11842"/>
             </a:avLst>
           </a:prstGeom>
           <a:solidFill>
             <a:srgbClr val="FFFFFF"/>
           </a:solidFill>
-          <a:ln w="12700">
+          <a:ln w="13335">
             <a:solidFill>
               <a:srgbClr val="14233E"/>
             </a:solidFill>
@@ -1636,14 +1652,14 @@
       </p:sp>
       <p:sp>
         <p:nvSpPr>
-          <p:cNvPr id="29" name="Text 27"/>
-          <p:cNvSpPr/>
-          <p:nvPr/>
-        </p:nvSpPr>
-        <p:spPr>
-          <a:xfrm>
-            <a:off x="640080" y="763524"/>
-            <a:ext cx="1874520" cy="329184"/>
+          <p:cNvPr id="27" name="Text 25"/>
+          <p:cNvSpPr txBox="1"/>
+          <p:nvPr/>
+        </p:nvSpPr>
+        <p:spPr>
+          <a:xfrm>
+            <a:off x="713232" y="1106424"/>
+            <a:ext cx="1298448" cy="347472"/>
           </a:xfrm>
           <a:prstGeom prst="rect">
             <a:avLst/>
@@ -1652,16 +1668,14 @@
           <a:ln/>
         </p:spPr>
         <p:txBody>
-          <a:bodyPr wrap="square" lIns="0" tIns="0" rIns="0" bIns="0" rtlCol="0" anchor="ctr">
-            <a:normAutofit/>
-          </a:bodyPr>
+          <a:bodyPr wrap="none" lIns="0" tIns="0" rIns="0" bIns="0" rtlCol="0" anchor="ctr"/>
           <a:lstStyle/>
           <a:p>
             <a:pPr algn="ctr" indent="0" marL="0">
               <a:buNone/>
             </a:pPr>
             <a:r>
-              <a:rPr lang="en-US" sz="1180" dirty="0">
+              <a:rPr lang="en-US" sz="1250" dirty="0">
                 <a:solidFill>
                   <a:srgbClr val="14233E"/>
                 </a:solidFill>
@@ -1675,7 +1689,7 @@
               <a:buNone/>
             </a:pPr>
             <a:r>
-              <a:rPr lang="en-US" sz="1180" i="1" dirty="0">
+              <a:rPr lang="en-US" sz="1250" i="1" dirty="0">
                 <a:solidFill>
                   <a:srgbClr val="14233E"/>
                 </a:solidFill>
@@ -1689,7 +1703,7 @@
               <a:buNone/>
             </a:pPr>
             <a:r>
-              <a:rPr lang="en-US" sz="1180" dirty="0">
+              <a:rPr lang="en-US" sz="1250" dirty="0">
                 <a:solidFill>
                   <a:srgbClr val="14233E"/>
                 </a:solidFill>
@@ -1699,30 +1713,30 @@
               </a:rPr>
               <a:t>+1</a:t>
             </a:r>
-            <a:endParaRPr lang="en-US" sz="1180" dirty="0"/>
+            <a:endParaRPr lang="en-US" sz="1250" dirty="0"/>
           </a:p>
         </p:txBody>
       </p:sp>
       <p:sp>
         <p:nvSpPr>
-          <p:cNvPr id="30" name="Shape 28"/>
-          <p:cNvSpPr/>
-          <p:nvPr/>
-        </p:nvSpPr>
-        <p:spPr>
-          <a:xfrm>
-            <a:off x="1097280" y="1069848"/>
-            <a:ext cx="1874520" cy="329184"/>
+          <p:cNvPr id="28" name="Shape 26"/>
+          <p:cNvSpPr/>
+          <p:nvPr/>
+        </p:nvSpPr>
+        <p:spPr>
+          <a:xfrm>
+            <a:off x="1097280" y="1453896"/>
+            <a:ext cx="1298448" cy="347472"/>
           </a:xfrm>
           <a:prstGeom prst="roundRect">
             <a:avLst>
-              <a:gd name="adj" fmla="val 12500"/>
+              <a:gd name="adj" fmla="val 11842"/>
             </a:avLst>
           </a:prstGeom>
           <a:solidFill>
             <a:srgbClr val="FFFFFF"/>
           </a:solidFill>
-          <a:ln w="12700">
+          <a:ln w="13335">
             <a:solidFill>
               <a:srgbClr val="14233E"/>
             </a:solidFill>
@@ -1732,14 +1746,14 @@
       </p:sp>
       <p:sp>
         <p:nvSpPr>
-          <p:cNvPr id="31" name="Text 29"/>
-          <p:cNvSpPr/>
-          <p:nvPr/>
-        </p:nvSpPr>
-        <p:spPr>
-          <a:xfrm>
-            <a:off x="1097280" y="1069848"/>
-            <a:ext cx="1874520" cy="329184"/>
+          <p:cNvPr id="29" name="Text 27"/>
+          <p:cNvSpPr txBox="1"/>
+          <p:nvPr/>
+        </p:nvSpPr>
+        <p:spPr>
+          <a:xfrm>
+            <a:off x="1097280" y="1453896"/>
+            <a:ext cx="1298448" cy="347472"/>
           </a:xfrm>
           <a:prstGeom prst="rect">
             <a:avLst/>
@@ -1748,16 +1762,14 @@
           <a:ln/>
         </p:spPr>
         <p:txBody>
-          <a:bodyPr wrap="square" lIns="0" tIns="0" rIns="0" bIns="0" rtlCol="0" anchor="ctr">
-            <a:normAutofit/>
-          </a:bodyPr>
+          <a:bodyPr wrap="none" lIns="0" tIns="0" rIns="0" bIns="0" rtlCol="0" anchor="ctr"/>
           <a:lstStyle/>
           <a:p>
             <a:pPr algn="ctr" indent="0" marL="0">
               <a:buNone/>
             </a:pPr>
             <a:r>
-              <a:rPr lang="en-US" sz="1180" dirty="0">
+              <a:rPr lang="en-US" sz="1250" dirty="0">
                 <a:solidFill>
                   <a:srgbClr val="14233E"/>
                 </a:solidFill>
@@ -1771,7 +1783,7 @@
               <a:buNone/>
             </a:pPr>
             <a:r>
-              <a:rPr lang="en-US" sz="1180" i="1" dirty="0">
+              <a:rPr lang="en-US" sz="1250" i="1" dirty="0">
                 <a:solidFill>
                   <a:srgbClr val="14233E"/>
                 </a:solidFill>
@@ -1785,7 +1797,7 @@
               <a:buNone/>
             </a:pPr>
             <a:r>
-              <a:rPr lang="en-US" sz="1180" dirty="0">
+              <a:rPr lang="en-US" sz="1250" dirty="0">
                 <a:solidFill>
                   <a:srgbClr val="14233E"/>
                 </a:solidFill>
@@ -1795,20 +1807,145 @@
               </a:rPr>
               <a:t>+2</a:t>
             </a:r>
-            <a:endParaRPr lang="en-US" sz="1180" dirty="0"/>
+            <a:endParaRPr lang="en-US" sz="1250" dirty="0"/>
           </a:p>
         </p:txBody>
       </p:sp>
       <p:sp>
         <p:nvSpPr>
-          <p:cNvPr id="32" name="Text 30"/>
-          <p:cNvSpPr/>
-          <p:nvPr/>
-        </p:nvSpPr>
-        <p:spPr>
-          <a:xfrm>
-            <a:off x="1234440" y="1444752"/>
-            <a:ext cx="1417320" cy="201168"/>
+          <p:cNvPr id="30" name="Shape 28"/>
+          <p:cNvSpPr/>
+          <p:nvPr/>
+        </p:nvSpPr>
+        <p:spPr>
+          <a:xfrm>
+            <a:off x="1755648" y="932688"/>
+            <a:ext cx="804672" cy="0"/>
+          </a:xfrm>
+          <a:prstGeom prst="line">
+            <a:avLst/>
+          </a:prstGeom>
+          <a:noFill/>
+          <a:ln w="13335">
+            <a:solidFill>
+              <a:srgbClr val="14233E"/>
+            </a:solidFill>
+            <a:prstDash val="solid"/>
+            <a:headEnd type="none"/>
+            <a:tailEnd type="none"/>
+          </a:ln>
+        </p:spPr>
+      </p:sp>
+      <p:sp>
+        <p:nvSpPr>
+          <p:cNvPr id="31" name="Shape 29"/>
+          <p:cNvSpPr/>
+          <p:nvPr/>
+        </p:nvSpPr>
+        <p:spPr>
+          <a:xfrm>
+            <a:off x="2395728" y="1627632"/>
+            <a:ext cx="164592" cy="0"/>
+          </a:xfrm>
+          <a:prstGeom prst="line">
+            <a:avLst/>
+          </a:prstGeom>
+          <a:noFill/>
+          <a:ln w="13335">
+            <a:solidFill>
+              <a:srgbClr val="14233E"/>
+            </a:solidFill>
+            <a:prstDash val="solid"/>
+            <a:headEnd type="none"/>
+            <a:tailEnd type="none"/>
+          </a:ln>
+        </p:spPr>
+      </p:sp>
+      <p:sp>
+        <p:nvSpPr>
+          <p:cNvPr id="32" name="Shape 30"/>
+          <p:cNvSpPr/>
+          <p:nvPr/>
+        </p:nvSpPr>
+        <p:spPr>
+          <a:xfrm>
+            <a:off x="2560320" y="932688"/>
+            <a:ext cx="0" cy="694944"/>
+          </a:xfrm>
+          <a:prstGeom prst="line">
+            <a:avLst/>
+          </a:prstGeom>
+          <a:noFill/>
+          <a:ln w="13335">
+            <a:solidFill>
+              <a:srgbClr val="14233E"/>
+            </a:solidFill>
+            <a:prstDash val="solid"/>
+            <a:headEnd type="none"/>
+            <a:tailEnd type="none"/>
+          </a:ln>
+        </p:spPr>
+      </p:sp>
+      <p:sp>
+        <p:nvSpPr>
+          <p:cNvPr id="33" name="Shape 31"/>
+          <p:cNvSpPr/>
+          <p:nvPr/>
+        </p:nvSpPr>
+        <p:spPr>
+          <a:xfrm>
+            <a:off x="2011680" y="1280160"/>
+            <a:ext cx="1078992" cy="0"/>
+          </a:xfrm>
+          <a:prstGeom prst="line">
+            <a:avLst/>
+          </a:prstGeom>
+          <a:noFill/>
+          <a:ln w="17780">
+            <a:solidFill>
+              <a:srgbClr val="14233E"/>
+            </a:solidFill>
+            <a:prstDash val="solid"/>
+            <a:headEnd type="none"/>
+            <a:tailEnd type="triangle"/>
+          </a:ln>
+        </p:spPr>
+      </p:sp>
+      <p:sp>
+        <p:nvSpPr>
+          <p:cNvPr id="34" name="Shape 32"/>
+          <p:cNvSpPr/>
+          <p:nvPr/>
+        </p:nvSpPr>
+        <p:spPr>
+          <a:xfrm>
+            <a:off x="2514600" y="1234440"/>
+            <a:ext cx="91440" cy="91440"/>
+          </a:xfrm>
+          <a:prstGeom prst="ellipse">
+            <a:avLst/>
+          </a:prstGeom>
+          <a:solidFill>
+            <a:srgbClr val="14233E"/>
+          </a:solidFill>
+          <a:ln w="6350">
+            <a:solidFill>
+              <a:srgbClr val="14233E"/>
+            </a:solidFill>
+            <a:prstDash val="solid"/>
+          </a:ln>
+        </p:spPr>
+      </p:sp>
+      <p:sp>
+        <p:nvSpPr>
+          <p:cNvPr id="35" name="Text 33"/>
+          <p:cNvSpPr txBox="1"/>
+          <p:nvPr/>
+        </p:nvSpPr>
+        <p:spPr>
+          <a:xfrm>
+            <a:off x="2944368" y="530352"/>
+            <a:ext cx="2633472" cy="201168"/>
           </a:xfrm>
           <a:prstGeom prst="rect">
             <a:avLst/>
@@ -1817,74 +1954,101 @@
           <a:ln/>
         </p:spPr>
         <p:txBody>
-          <a:bodyPr wrap="square" lIns="0" tIns="0" rIns="0" bIns="0" rtlCol="0" anchor="ctr">
-            <a:normAutofit/>
-          </a:bodyPr>
+          <a:bodyPr wrap="none" lIns="0" tIns="0" rIns="0" bIns="0" rtlCol="0" anchor="ctr"/>
           <a:lstStyle/>
           <a:p>
-            <a:pPr algn="l" indent="0" marL="0">
+            <a:pPr algn="ctr" indent="0" marL="0">
               <a:buNone/>
             </a:pPr>
             <a:r>
-              <a:rPr lang="en-US" sz="980" b="1" dirty="0">
+              <a:rPr lang="en-US" sz="1200" dirty="0">
                 <a:solidFill>
-                  <a:srgbClr val="E56E2E"/>
+                  <a:srgbClr val="63738A"/>
                 </a:solidFill>
                 <a:latin typeface="Arial" pitchFamily="34" charset="0"/>
                 <a:ea typeface="Arial" pitchFamily="34" charset="-122"/>
                 <a:cs typeface="Arial" pitchFamily="34" charset="-120"/>
               </a:rPr>
-              <a:t>captureAvailable release</a:t>
-            </a:r>
-            <a:endParaRPr lang="en-US" sz="980" dirty="0"/>
+              <a:t>served in capture order</a:t>
+            </a:r>
+            <a:endParaRPr lang="en-US" sz="1200" dirty="0"/>
           </a:p>
         </p:txBody>
       </p:sp>
       <p:sp>
         <p:nvSpPr>
-          <p:cNvPr id="33" name="Shape 31"/>
-          <p:cNvSpPr/>
-          <p:nvPr/>
-        </p:nvSpPr>
-        <p:spPr>
-          <a:xfrm>
-            <a:off x="1033272" y="1170432"/>
-            <a:ext cx="128016" cy="128016"/>
-          </a:xfrm>
-          <a:prstGeom prst="rect">
-            <a:avLst/>
-          </a:prstGeom>
-          <a:solidFill>
-            <a:srgbClr val="E56E2E"/>
-          </a:solidFill>
-          <a:ln w="12700">
-            <a:solidFill>
-              <a:srgbClr val="14233E"/>
-            </a:solidFill>
-            <a:prstDash val="solid"/>
-          </a:ln>
-        </p:spPr>
-      </p:sp>
-      <p:sp>
-        <p:nvSpPr>
-          <p:cNvPr id="34" name="Shape 32"/>
-          <p:cNvSpPr/>
-          <p:nvPr/>
-        </p:nvSpPr>
-        <p:spPr>
-          <a:xfrm>
-            <a:off x="3383280" y="763524"/>
-            <a:ext cx="1097280" cy="329184"/>
+          <p:cNvPr id="36" name="Shape 34"/>
+          <p:cNvSpPr/>
+          <p:nvPr/>
+        </p:nvSpPr>
+        <p:spPr>
+          <a:xfrm>
+            <a:off x="3090672" y="914400"/>
+            <a:ext cx="2340864" cy="731520"/>
           </a:xfrm>
           <a:prstGeom prst="roundRect">
             <a:avLst>
-              <a:gd name="adj" fmla="val 11111"/>
+              <a:gd name="adj" fmla="val 6250"/>
             </a:avLst>
           </a:prstGeom>
           <a:solidFill>
+            <a:srgbClr val="ECF1F8"/>
+          </a:solidFill>
+          <a:ln w="13970">
+            <a:solidFill>
+              <a:srgbClr val="14233E"/>
+            </a:solidFill>
+            <a:prstDash val="solid"/>
+          </a:ln>
+        </p:spPr>
+      </p:sp>
+      <p:sp>
+        <p:nvSpPr>
+          <p:cNvPr id="37" name="Shape 35"/>
+          <p:cNvSpPr/>
+          <p:nvPr/>
+        </p:nvSpPr>
+        <p:spPr>
+          <a:xfrm>
+            <a:off x="3172968" y="1069848"/>
+            <a:ext cx="384048" cy="420624"/>
+          </a:xfrm>
+          <a:prstGeom prst="roundRect">
+            <a:avLst>
+              <a:gd name="adj" fmla="val 8333"/>
+            </a:avLst>
+          </a:prstGeom>
+          <a:solidFill>
             <a:srgbClr val="FFFFFF"/>
           </a:solidFill>
-          <a:ln w="12065">
+          <a:ln w="11430">
+            <a:solidFill>
+              <a:srgbClr val="526477"/>
+            </a:solidFill>
+            <a:prstDash val="dash"/>
+          </a:ln>
+        </p:spPr>
+      </p:sp>
+      <p:sp>
+        <p:nvSpPr>
+          <p:cNvPr id="38" name="Shape 36"/>
+          <p:cNvSpPr/>
+          <p:nvPr/>
+        </p:nvSpPr>
+        <p:spPr>
+          <a:xfrm>
+            <a:off x="3639312" y="1069848"/>
+            <a:ext cx="813816" cy="420624"/>
+          </a:xfrm>
+          <a:prstGeom prst="roundRect">
+            <a:avLst>
+              <a:gd name="adj" fmla="val 7609"/>
+            </a:avLst>
+          </a:prstGeom>
+          <a:solidFill>
+            <a:srgbClr val="FFFFFF"/>
+          </a:solidFill>
+          <a:ln w="12700">
             <a:solidFill>
               <a:srgbClr val="14233E"/>
             </a:solidFill>
@@ -1894,14 +2058,14 @@
       </p:sp>
       <p:sp>
         <p:nvSpPr>
-          <p:cNvPr id="35" name="Text 33"/>
-          <p:cNvSpPr/>
-          <p:nvPr/>
-        </p:nvSpPr>
-        <p:spPr>
-          <a:xfrm>
-            <a:off x="3383280" y="763524"/>
-            <a:ext cx="1097280" cy="329184"/>
+          <p:cNvPr id="39" name="Text 37"/>
+          <p:cNvSpPr txBox="1"/>
+          <p:nvPr/>
+        </p:nvSpPr>
+        <p:spPr>
+          <a:xfrm>
+            <a:off x="3639312" y="1069848"/>
+            <a:ext cx="813816" cy="420624"/>
           </a:xfrm>
           <a:prstGeom prst="rect">
             <a:avLst/>
@@ -1910,16 +2074,14 @@
           <a:ln/>
         </p:spPr>
         <p:txBody>
-          <a:bodyPr wrap="square" lIns="0" tIns="0" rIns="0" bIns="0" rtlCol="0" anchor="ctr">
-            <a:normAutofit/>
-          </a:bodyPr>
+          <a:bodyPr wrap="none" lIns="0" tIns="0" rIns="0" bIns="0" rtlCol="0" anchor="ctr"/>
           <a:lstStyle/>
           <a:p>
             <a:pPr algn="ctr" indent="0" marL="0">
               <a:buNone/>
             </a:pPr>
             <a:r>
-              <a:rPr lang="en-US" sz="1120" dirty="0">
+              <a:rPr lang="en-US" sz="1200" dirty="0">
                 <a:solidFill>
                   <a:srgbClr val="14233E"/>
                 </a:solidFill>
@@ -1933,7 +2095,7 @@
               <a:buNone/>
             </a:pPr>
             <a:r>
-              <a:rPr lang="en-US" sz="1120" i="1" dirty="0">
+              <a:rPr lang="en-US" sz="1200" i="1" dirty="0">
                 <a:solidFill>
                   <a:srgbClr val="14233E"/>
                 </a:solidFill>
@@ -1947,7 +2109,7 @@
               <a:buNone/>
             </a:pPr>
             <a:r>
-              <a:rPr lang="en-US" sz="1120" dirty="0">
+              <a:rPr lang="en-US" sz="1200" dirty="0">
                 <a:solidFill>
                   <a:srgbClr val="14233E"/>
                 </a:solidFill>
@@ -1957,30 +2119,30 @@
               </a:rPr>
               <a:t>+2</a:t>
             </a:r>
-            <a:endParaRPr lang="en-US" sz="1120" dirty="0"/>
+            <a:endParaRPr lang="en-US" sz="1200" dirty="0"/>
           </a:p>
         </p:txBody>
       </p:sp>
       <p:sp>
         <p:nvSpPr>
-          <p:cNvPr id="36" name="Shape 34"/>
-          <p:cNvSpPr/>
-          <p:nvPr/>
-        </p:nvSpPr>
-        <p:spPr>
-          <a:xfrm>
-            <a:off x="3520440" y="1069848"/>
-            <a:ext cx="1097280" cy="329184"/>
+          <p:cNvPr id="40" name="Shape 38"/>
+          <p:cNvSpPr/>
+          <p:nvPr/>
+        </p:nvSpPr>
+        <p:spPr>
+          <a:xfrm>
+            <a:off x="4535424" y="1069848"/>
+            <a:ext cx="813816" cy="420624"/>
           </a:xfrm>
           <a:prstGeom prst="roundRect">
             <a:avLst>
-              <a:gd name="adj" fmla="val 11111"/>
+              <a:gd name="adj" fmla="val 7609"/>
             </a:avLst>
           </a:prstGeom>
           <a:solidFill>
             <a:srgbClr val="FFFFFF"/>
           </a:solidFill>
-          <a:ln w="12065">
+          <a:ln w="12700">
             <a:solidFill>
               <a:srgbClr val="14233E"/>
             </a:solidFill>
@@ -1990,14 +2152,14 @@
       </p:sp>
       <p:sp>
         <p:nvSpPr>
-          <p:cNvPr id="37" name="Text 35"/>
-          <p:cNvSpPr/>
-          <p:nvPr/>
-        </p:nvSpPr>
-        <p:spPr>
-          <a:xfrm>
-            <a:off x="3520440" y="1069848"/>
-            <a:ext cx="1097280" cy="329184"/>
+          <p:cNvPr id="41" name="Text 39"/>
+          <p:cNvSpPr txBox="1"/>
+          <p:nvPr/>
+        </p:nvSpPr>
+        <p:spPr>
+          <a:xfrm>
+            <a:off x="4535424" y="1069848"/>
+            <a:ext cx="813816" cy="420624"/>
           </a:xfrm>
           <a:prstGeom prst="rect">
             <a:avLst/>
@@ -2006,16 +2168,14 @@
           <a:ln/>
         </p:spPr>
         <p:txBody>
-          <a:bodyPr wrap="square" lIns="0" tIns="0" rIns="0" bIns="0" rtlCol="0" anchor="ctr">
-            <a:normAutofit/>
-          </a:bodyPr>
+          <a:bodyPr wrap="none" lIns="0" tIns="0" rIns="0" bIns="0" rtlCol="0" anchor="ctr"/>
           <a:lstStyle/>
           <a:p>
             <a:pPr algn="ctr" indent="0" marL="0">
               <a:buNone/>
             </a:pPr>
             <a:r>
-              <a:rPr lang="en-US" sz="1120" dirty="0">
+              <a:rPr lang="en-US" sz="1200" dirty="0">
                 <a:solidFill>
                   <a:srgbClr val="14233E"/>
                 </a:solidFill>
@@ -2029,7 +2189,7 @@
               <a:buNone/>
             </a:pPr>
             <a:r>
-              <a:rPr lang="en-US" sz="1120" i="1" dirty="0">
+              <a:rPr lang="en-US" sz="1200" i="1" dirty="0">
                 <a:solidFill>
                   <a:srgbClr val="14233E"/>
                 </a:solidFill>
@@ -2043,7 +2203,7 @@
               <a:buNone/>
             </a:pPr>
             <a:r>
-              <a:rPr lang="en-US" sz="1120" dirty="0">
+              <a:rPr lang="en-US" sz="1200" dirty="0">
                 <a:solidFill>
                   <a:srgbClr val="14233E"/>
                 </a:solidFill>
@@ -2053,47 +2213,45 @@
               </a:rPr>
               <a:t>+1</a:t>
             </a:r>
-            <a:endParaRPr lang="en-US" sz="1120" dirty="0"/>
+            <a:endParaRPr lang="en-US" sz="1200" dirty="0"/>
           </a:p>
         </p:txBody>
       </p:sp>
       <p:sp>
         <p:nvSpPr>
-          <p:cNvPr id="38" name="Shape 36"/>
-          <p:cNvSpPr/>
-          <p:nvPr/>
-        </p:nvSpPr>
-        <p:spPr>
-          <a:xfrm>
-            <a:off x="5184648" y="438912"/>
-            <a:ext cx="502920" cy="210312"/>
-          </a:xfrm>
-          <a:prstGeom prst="roundRect">
-            <a:avLst>
-              <a:gd name="adj" fmla="val 15217"/>
-            </a:avLst>
-          </a:prstGeom>
-          <a:solidFill>
-            <a:srgbClr val="EAF3FF"/>
-          </a:solidFill>
-          <a:ln w="10160">
-            <a:solidFill>
-              <a:srgbClr val="2476D2"/>
-            </a:solidFill>
-            <a:prstDash val="solid"/>
-          </a:ln>
-        </p:spPr>
-      </p:sp>
-      <p:sp>
-        <p:nvSpPr>
-          <p:cNvPr id="39" name="Text 37"/>
-          <p:cNvSpPr/>
-          <p:nvPr/>
-        </p:nvSpPr>
-        <p:spPr>
-          <a:xfrm>
-            <a:off x="5184648" y="438912"/>
-            <a:ext cx="502920" cy="210312"/>
+          <p:cNvPr id="42" name="Shape 40"/>
+          <p:cNvSpPr/>
+          <p:nvPr/>
+        </p:nvSpPr>
+        <p:spPr>
+          <a:xfrm>
+            <a:off x="5431536" y="1280160"/>
+            <a:ext cx="676656" cy="0"/>
+          </a:xfrm>
+          <a:prstGeom prst="line">
+            <a:avLst/>
+          </a:prstGeom>
+          <a:noFill/>
+          <a:ln w="17780">
+            <a:solidFill>
+              <a:srgbClr val="14233E"/>
+            </a:solidFill>
+            <a:prstDash val="solid"/>
+            <a:headEnd type="none"/>
+            <a:tailEnd type="triangle"/>
+          </a:ln>
+        </p:spPr>
+      </p:sp>
+      <p:sp>
+        <p:nvSpPr>
+          <p:cNvPr id="43" name="Text 41"/>
+          <p:cNvSpPr txBox="1"/>
+          <p:nvPr/>
+        </p:nvSpPr>
+        <p:spPr>
+          <a:xfrm>
+            <a:off x="6108192" y="530352"/>
+            <a:ext cx="2029968" cy="201168"/>
           </a:xfrm>
           <a:prstGeom prst="rect">
             <a:avLst/>
@@ -2102,71 +2260,14 @@
           <a:ln/>
         </p:spPr>
         <p:txBody>
-          <a:bodyPr wrap="square" lIns="0" tIns="0" rIns="0" bIns="0" rtlCol="0" anchor="ctr">
-            <a:normAutofit/>
-          </a:bodyPr>
+          <a:bodyPr wrap="none" lIns="0" tIns="0" rIns="0" bIns="0" rtlCol="0" anchor="ctr"/>
           <a:lstStyle/>
           <a:p>
             <a:pPr algn="ctr" indent="0" marL="0">
               <a:buNone/>
             </a:pPr>
             <a:r>
-              <a:rPr lang="en-US" sz="900" b="1" dirty="0">
-                <a:solidFill>
-                  <a:srgbClr val="2476D2"/>
-                </a:solidFill>
-                <a:latin typeface="Arial" pitchFamily="34" charset="0"/>
-                <a:ea typeface="Arial" pitchFamily="34" charset="-122"/>
-                <a:cs typeface="Arial" pitchFamily="34" charset="-120"/>
-              </a:rPr>
-              <a:t>Draft </a:t>
-            </a:r>
-            <a:pPr algn="ctr" indent="0" marL="0">
-              <a:buNone/>
-            </a:pPr>
-            <a:r>
-              <a:rPr lang="en-US" sz="900" b="1" i="1" dirty="0">
-                <a:solidFill>
-                  <a:srgbClr val="2476D2"/>
-                </a:solidFill>
-                <a:latin typeface="Arial" pitchFamily="34" charset="0"/>
-                <a:ea typeface="Arial" pitchFamily="34" charset="-122"/>
-                <a:cs typeface="Arial" pitchFamily="34" charset="-120"/>
-              </a:rPr>
-              <a:t>i</a:t>
-            </a:r>
-            <a:endParaRPr lang="en-US" sz="900" dirty="0"/>
-          </a:p>
-        </p:txBody>
-      </p:sp>
-      <p:sp>
-        <p:nvSpPr>
-          <p:cNvPr id="40" name="Text 38"/>
-          <p:cNvSpPr/>
-          <p:nvPr/>
-        </p:nvSpPr>
-        <p:spPr>
-          <a:xfrm>
-            <a:off x="5724144" y="438912"/>
-            <a:ext cx="1911096" cy="210312"/>
-          </a:xfrm>
-          <a:prstGeom prst="rect">
-            <a:avLst/>
-          </a:prstGeom>
-          <a:noFill/>
-          <a:ln/>
-        </p:spPr>
-        <p:txBody>
-          <a:bodyPr wrap="square" lIns="0" tIns="0" rIns="0" bIns="0" rtlCol="0" anchor="ctr">
-            <a:normAutofit/>
-          </a:bodyPr>
-          <a:lstStyle/>
-          <a:p>
-            <a:pPr algn="ctr" indent="0" marL="0">
-              <a:buNone/>
-            </a:pPr>
-            <a:r>
-              <a:rPr lang="en-US" sz="1120" b="1" dirty="0">
+              <a:rPr lang="en-US" sz="1200" b="1" dirty="0">
                 <a:solidFill>
                   <a:srgbClr val="2476D2"/>
                 </a:solidFill>
@@ -2176,32 +2277,30 @@
               </a:rPr>
               <a:t>Optional image processing</a:t>
             </a:r>
-            <a:endParaRPr lang="en-US" sz="1120" dirty="0"/>
+            <a:endParaRPr lang="en-US" sz="1200" dirty="0"/>
           </a:p>
         </p:txBody>
       </p:sp>
       <p:sp>
         <p:nvSpPr>
-          <p:cNvPr id="41" name="Shape 39"/>
-          <p:cNvSpPr/>
-          <p:nvPr/>
-        </p:nvSpPr>
-        <p:spPr>
-          <a:xfrm>
-            <a:off x="5166360" y="685800"/>
-            <a:ext cx="2468880" cy="1005840"/>
+          <p:cNvPr id="44" name="Shape 42"/>
+          <p:cNvSpPr/>
+          <p:nvPr/>
+        </p:nvSpPr>
+        <p:spPr>
+          <a:xfrm>
+            <a:off x="6108192" y="786384"/>
+            <a:ext cx="2029968" cy="987552"/>
           </a:xfrm>
           <a:prstGeom prst="roundRect">
             <a:avLst>
-              <a:gd name="adj" fmla="val 4545"/>
+              <a:gd name="adj" fmla="val 4630"/>
             </a:avLst>
           </a:prstGeom>
           <a:solidFill>
-            <a:srgbClr val="FFFFFF">
-              <a:alpha val="0"/>
-            </a:srgbClr>
-          </a:solidFill>
-          <a:ln w="12700">
+            <a:srgbClr val="EFF5FE"/>
+          </a:solidFill>
+          <a:ln w="13335">
             <a:solidFill>
               <a:srgbClr val="2476D2"/>
             </a:solidFill>
@@ -2211,7 +2310,7 @@
       </p:sp>
       <p:pic>
         <p:nvPicPr>
-          <p:cNvPr id="42" name="Image 0" descr="optional multiframe icon">    </p:cNvPr>
+          <p:cNvPr id="45" name="Image 0" descr="optional multiframe icon">    </p:cNvPr>
           <p:cNvPicPr>
             <a:picLocks noChangeAspect="1"/>
           </p:cNvPicPr>
@@ -2225,8 +2324,8 @@
         </p:blipFill>
         <p:spPr>
           <a:xfrm>
-            <a:off x="5285232" y="768096"/>
-            <a:ext cx="932688" cy="932688"/>
+            <a:off x="6236208" y="914400"/>
+            <a:ext cx="731520" cy="731520"/>
           </a:xfrm>
           <a:prstGeom prst="rect">
             <a:avLst/>
@@ -2235,24 +2334,49 @@
       </p:pic>
       <p:sp>
         <p:nvSpPr>
-          <p:cNvPr id="43" name="Shape 40"/>
-          <p:cNvSpPr/>
-          <p:nvPr/>
-        </p:nvSpPr>
-        <p:spPr>
-          <a:xfrm>
-            <a:off x="6611112" y="850392"/>
-            <a:ext cx="768096" cy="768096"/>
+          <p:cNvPr id="46" name="Shape 43"/>
+          <p:cNvSpPr/>
+          <p:nvPr/>
+        </p:nvSpPr>
+        <p:spPr>
+          <a:xfrm>
+            <a:off x="6967728" y="1280160"/>
+            <a:ext cx="310896" cy="0"/>
+          </a:xfrm>
+          <a:prstGeom prst="line">
+            <a:avLst/>
+          </a:prstGeom>
+          <a:noFill/>
+          <a:ln w="13335">
+            <a:solidFill>
+              <a:srgbClr val="14233E"/>
+            </a:solidFill>
+            <a:prstDash val="solid"/>
+            <a:headEnd type="none"/>
+            <a:tailEnd type="triangle"/>
+          </a:ln>
+        </p:spPr>
+      </p:sp>
+      <p:sp>
+        <p:nvSpPr>
+          <p:cNvPr id="47" name="Shape 44"/>
+          <p:cNvSpPr/>
+          <p:nvPr/>
+        </p:nvSpPr>
+        <p:spPr>
+          <a:xfrm>
+            <a:off x="7278624" y="914400"/>
+            <a:ext cx="731520" cy="731520"/>
           </a:xfrm>
           <a:prstGeom prst="roundRect">
             <a:avLst>
-              <a:gd name="adj" fmla="val 5952"/>
+              <a:gd name="adj" fmla="val 6250"/>
             </a:avLst>
           </a:prstGeom>
           <a:solidFill>
             <a:srgbClr val="FFFFFF"/>
           </a:solidFill>
-          <a:ln w="12700">
+          <a:ln w="13335">
             <a:solidFill>
               <a:srgbClr val="14233E"/>
             </a:solidFill>
@@ -2262,14 +2386,14 @@
       </p:sp>
       <p:sp>
         <p:nvSpPr>
-          <p:cNvPr id="44" name="Shape 41"/>
-          <p:cNvSpPr/>
-          <p:nvPr/>
-        </p:nvSpPr>
-        <p:spPr>
-          <a:xfrm>
-            <a:off x="6695603" y="1065459"/>
-            <a:ext cx="230429" cy="368686"/>
+          <p:cNvPr id="48" name="Shape 45"/>
+          <p:cNvSpPr/>
+          <p:nvPr/>
+        </p:nvSpPr>
+        <p:spPr>
+          <a:xfrm>
+            <a:off x="7359091" y="1119226"/>
+            <a:ext cx="219456" cy="351130"/>
           </a:xfrm>
           <a:prstGeom prst="rect">
             <a:avLst/>
@@ -2289,24 +2413,24 @@
       </p:sp>
       <p:sp>
         <p:nvSpPr>
-          <p:cNvPr id="45" name="Shape 42"/>
-          <p:cNvSpPr/>
-          <p:nvPr/>
-        </p:nvSpPr>
-        <p:spPr>
-          <a:xfrm>
-            <a:off x="6926031" y="1065459"/>
-            <a:ext cx="230429" cy="368686"/>
-          </a:xfrm>
-          <a:prstGeom prst="rect">
-            <a:avLst/>
-          </a:prstGeom>
-          <a:solidFill>
-            <a:srgbClr val="EAF3FF"/>
+          <p:cNvPr id="49" name="Shape 46"/>
+          <p:cNvSpPr/>
+          <p:nvPr/>
+        </p:nvSpPr>
+        <p:spPr>
+          <a:xfrm>
+            <a:off x="7578547" y="1119226"/>
+            <a:ext cx="219456" cy="351130"/>
+          </a:xfrm>
+          <a:prstGeom prst="rect">
+            <a:avLst/>
+          </a:prstGeom>
+          <a:solidFill>
+            <a:srgbClr val="EFF5FE"/>
           </a:solidFill>
           <a:ln w="12700">
             <a:solidFill>
-              <a:srgbClr val="EAF3FF">
+              <a:srgbClr val="EFF5FE">
                 <a:alpha val="0"/>
               </a:srgbClr>
             </a:solidFill>
@@ -2316,14 +2440,14 @@
       </p:sp>
       <p:sp>
         <p:nvSpPr>
-          <p:cNvPr id="46" name="Shape 43"/>
-          <p:cNvSpPr/>
-          <p:nvPr/>
-        </p:nvSpPr>
-        <p:spPr>
-          <a:xfrm>
-            <a:off x="6749369" y="1119226"/>
-            <a:ext cx="61448" cy="61448"/>
+          <p:cNvPr id="50" name="Shape 47"/>
+          <p:cNvSpPr/>
+          <p:nvPr/>
+        </p:nvSpPr>
+        <p:spPr>
+          <a:xfrm>
+            <a:off x="7410298" y="1170432"/>
+            <a:ext cx="58522" cy="58522"/>
           </a:xfrm>
           <a:prstGeom prst="ellipse">
             <a:avLst/>
@@ -2341,14 +2465,14 @@
       </p:sp>
       <p:sp>
         <p:nvSpPr>
-          <p:cNvPr id="47" name="Shape 44"/>
-          <p:cNvSpPr/>
-          <p:nvPr/>
-        </p:nvSpPr>
-        <p:spPr>
-          <a:xfrm>
-            <a:off x="6726326" y="1272845"/>
-            <a:ext cx="199705" cy="115214"/>
+          <p:cNvPr id="51" name="Shape 48"/>
+          <p:cNvSpPr/>
+          <p:nvPr/>
+        </p:nvSpPr>
+        <p:spPr>
+          <a:xfrm>
+            <a:off x="7388352" y="1316736"/>
+            <a:ext cx="190195" cy="109728"/>
           </a:xfrm>
           <a:prstGeom prst="triangle">
             <a:avLst/>
@@ -2366,14 +2490,14 @@
       </p:sp>
       <p:sp>
         <p:nvSpPr>
-          <p:cNvPr id="48" name="Shape 45"/>
-          <p:cNvSpPr/>
-          <p:nvPr/>
-        </p:nvSpPr>
-        <p:spPr>
-          <a:xfrm>
-            <a:off x="6895308" y="1203716"/>
-            <a:ext cx="215067" cy="184343"/>
+          <p:cNvPr id="52" name="Shape 49"/>
+          <p:cNvSpPr/>
+          <p:nvPr/>
+        </p:nvSpPr>
+        <p:spPr>
+          <a:xfrm>
+            <a:off x="7549286" y="1250899"/>
+            <a:ext cx="204826" cy="175565"/>
           </a:xfrm>
           <a:prstGeom prst="triangle">
             <a:avLst/>
@@ -2391,14 +2515,14 @@
       </p:sp>
       <p:sp>
         <p:nvSpPr>
-          <p:cNvPr id="49" name="Shape 46"/>
-          <p:cNvSpPr/>
-          <p:nvPr/>
-        </p:nvSpPr>
-        <p:spPr>
-          <a:xfrm>
-            <a:off x="6926031" y="1065459"/>
-            <a:ext cx="0" cy="368686"/>
+          <p:cNvPr id="53" name="Shape 50"/>
+          <p:cNvSpPr/>
+          <p:nvPr/>
+        </p:nvSpPr>
+        <p:spPr>
+          <a:xfrm>
+            <a:off x="7578547" y="1119226"/>
+            <a:ext cx="0" cy="351130"/>
           </a:xfrm>
           <a:prstGeom prst="line">
             <a:avLst/>
@@ -2416,18 +2540,18 @@
       </p:sp>
       <p:sp>
         <p:nvSpPr>
-          <p:cNvPr id="50" name="Shape 47"/>
-          <p:cNvSpPr/>
-          <p:nvPr/>
-        </p:nvSpPr>
-        <p:spPr>
-          <a:xfrm>
-            <a:off x="6695603" y="1065459"/>
-            <a:ext cx="460858" cy="368686"/>
+          <p:cNvPr id="54" name="Shape 51"/>
+          <p:cNvSpPr/>
+          <p:nvPr/>
+        </p:nvSpPr>
+        <p:spPr>
+          <a:xfrm>
+            <a:off x="7359091" y="1119226"/>
+            <a:ext cx="438912" cy="351130"/>
           </a:xfrm>
           <a:prstGeom prst="roundRect">
             <a:avLst>
-              <a:gd name="adj" fmla="val 4960"/>
+              <a:gd name="adj" fmla="val 5208"/>
             </a:avLst>
           </a:prstGeom>
           <a:solidFill>
@@ -2445,14 +2569,14 @@
       </p:sp>
       <p:sp>
         <p:nvSpPr>
-          <p:cNvPr id="51" name="Shape 48"/>
-          <p:cNvSpPr/>
-          <p:nvPr/>
-        </p:nvSpPr>
-        <p:spPr>
-          <a:xfrm>
-            <a:off x="7141098" y="919521"/>
-            <a:ext cx="138257" cy="138257"/>
+          <p:cNvPr id="55" name="Shape 52"/>
+          <p:cNvSpPr/>
+          <p:nvPr/>
+        </p:nvSpPr>
+        <p:spPr>
+          <a:xfrm>
+            <a:off x="7783373" y="980237"/>
+            <a:ext cx="131674" cy="131674"/>
           </a:xfrm>
           <a:prstGeom prst="star4">
             <a:avLst/>
@@ -2470,48 +2594,73 @@
       </p:sp>
       <p:sp>
         <p:nvSpPr>
-          <p:cNvPr id="52" name="Shape 49"/>
-          <p:cNvSpPr/>
-          <p:nvPr/>
-        </p:nvSpPr>
-        <p:spPr>
-          <a:xfrm>
-            <a:off x="6336792" y="1627632"/>
-            <a:ext cx="128016" cy="128016"/>
-          </a:xfrm>
-          <a:prstGeom prst="rect">
-            <a:avLst/>
-          </a:prstGeom>
-          <a:solidFill>
-            <a:srgbClr val="2476D2"/>
-          </a:solidFill>
-          <a:ln w="12700">
+          <p:cNvPr id="56" name="Shape 53"/>
+          <p:cNvSpPr/>
+          <p:nvPr/>
+        </p:nvSpPr>
+        <p:spPr>
+          <a:xfrm>
+            <a:off x="8138160" y="1280160"/>
+            <a:ext cx="310896" cy="0"/>
+          </a:xfrm>
+          <a:prstGeom prst="line">
+            <a:avLst/>
+          </a:prstGeom>
+          <a:noFill/>
+          <a:ln w="17780">
             <a:solidFill>
               <a:srgbClr val="14233E"/>
             </a:solidFill>
             <a:prstDash val="solid"/>
-          </a:ln>
-        </p:spPr>
-      </p:sp>
-      <p:sp>
-        <p:nvSpPr>
-          <p:cNvPr id="53" name="Shape 50"/>
-          <p:cNvSpPr/>
-          <p:nvPr/>
-        </p:nvSpPr>
-        <p:spPr>
-          <a:xfrm>
-            <a:off x="8174736" y="905256"/>
-            <a:ext cx="658368" cy="658368"/>
+            <a:headEnd type="none"/>
+            <a:tailEnd type="triangle"/>
+          </a:ln>
+        </p:spPr>
+      </p:sp>
+      <p:sp>
+        <p:nvSpPr>
+          <p:cNvPr id="57" name="Shape 54"/>
+          <p:cNvSpPr/>
+          <p:nvPr/>
+        </p:nvSpPr>
+        <p:spPr>
+          <a:xfrm>
+            <a:off x="8449056" y="914400"/>
+            <a:ext cx="731520" cy="731520"/>
           </a:xfrm>
           <a:prstGeom prst="roundRect">
             <a:avLst>
-              <a:gd name="adj" fmla="val 6944"/>
+              <a:gd name="adj" fmla="val 6250"/>
             </a:avLst>
           </a:prstGeom>
           <a:solidFill>
             <a:srgbClr val="FFFFFF"/>
           </a:solidFill>
+          <a:ln w="13335">
+            <a:solidFill>
+              <a:srgbClr val="14233E"/>
+            </a:solidFill>
+            <a:prstDash val="solid"/>
+          </a:ln>
+        </p:spPr>
+      </p:sp>
+      <p:sp>
+        <p:nvSpPr>
+          <p:cNvPr id="58" name="Shape 55"/>
+          <p:cNvSpPr/>
+          <p:nvPr/>
+        </p:nvSpPr>
+        <p:spPr>
+          <a:xfrm>
+            <a:off x="8609990" y="1046074"/>
+            <a:ext cx="409651" cy="409651"/>
+          </a:xfrm>
+          <a:prstGeom prst="can">
+            <a:avLst/>
+          </a:prstGeom>
+          <a:solidFill>
+            <a:srgbClr val="14233E"/>
+          </a:solidFill>
           <a:ln w="12700">
             <a:solidFill>
               <a:srgbClr val="14233E"/>
@@ -2522,39 +2671,14 @@
       </p:sp>
       <p:sp>
         <p:nvSpPr>
-          <p:cNvPr id="54" name="Shape 51"/>
-          <p:cNvSpPr/>
-          <p:nvPr/>
-        </p:nvSpPr>
-        <p:spPr>
-          <a:xfrm>
-            <a:off x="8319577" y="1023762"/>
-            <a:ext cx="368686" cy="368686"/>
-          </a:xfrm>
-          <a:prstGeom prst="can">
-            <a:avLst/>
-          </a:prstGeom>
-          <a:solidFill>
-            <a:srgbClr val="14233E"/>
-          </a:solidFill>
-          <a:ln w="12700">
-            <a:solidFill>
-              <a:srgbClr val="14233E"/>
-            </a:solidFill>
-            <a:prstDash val="solid"/>
-          </a:ln>
-        </p:spPr>
-      </p:sp>
-      <p:sp>
-        <p:nvSpPr>
-          <p:cNvPr id="55" name="Shape 52"/>
-          <p:cNvSpPr/>
-          <p:nvPr/>
-        </p:nvSpPr>
-        <p:spPr>
-          <a:xfrm>
-            <a:off x="8378830" y="1181771"/>
-            <a:ext cx="59253" cy="59253"/>
+          <p:cNvPr id="59" name="Shape 56"/>
+          <p:cNvSpPr/>
+          <p:nvPr/>
+        </p:nvSpPr>
+        <p:spPr>
+          <a:xfrm>
+            <a:off x="8675827" y="1221638"/>
+            <a:ext cx="65837" cy="65837"/>
           </a:xfrm>
           <a:prstGeom prst="rect">
             <a:avLst/>
@@ -2574,14 +2698,14 @@
       </p:sp>
       <p:sp>
         <p:nvSpPr>
-          <p:cNvPr id="56" name="Shape 53"/>
-          <p:cNvSpPr/>
-          <p:nvPr/>
-        </p:nvSpPr>
-        <p:spPr>
-          <a:xfrm>
-            <a:off x="8467710" y="1181771"/>
-            <a:ext cx="59253" cy="59253"/>
+          <p:cNvPr id="60" name="Shape 57"/>
+          <p:cNvSpPr/>
+          <p:nvPr/>
+        </p:nvSpPr>
+        <p:spPr>
+          <a:xfrm>
+            <a:off x="8774582" y="1221638"/>
+            <a:ext cx="65837" cy="65837"/>
           </a:xfrm>
           <a:prstGeom prst="rect">
             <a:avLst/>
@@ -2601,14 +2725,14 @@
       </p:sp>
       <p:sp>
         <p:nvSpPr>
-          <p:cNvPr id="57" name="Shape 54"/>
-          <p:cNvSpPr/>
-          <p:nvPr/>
-        </p:nvSpPr>
-        <p:spPr>
-          <a:xfrm>
-            <a:off x="8556589" y="1181771"/>
-            <a:ext cx="59253" cy="59253"/>
+          <p:cNvPr id="61" name="Shape 58"/>
+          <p:cNvSpPr/>
+          <p:nvPr/>
+        </p:nvSpPr>
+        <p:spPr>
+          <a:xfrm>
+            <a:off x="8873338" y="1221638"/>
+            <a:ext cx="65837" cy="65837"/>
           </a:xfrm>
           <a:prstGeom prst="rect">
             <a:avLst/>
@@ -2628,14 +2752,14 @@
       </p:sp>
       <p:sp>
         <p:nvSpPr>
-          <p:cNvPr id="58" name="Text 55"/>
-          <p:cNvSpPr/>
-          <p:nvPr/>
-        </p:nvSpPr>
-        <p:spPr>
-          <a:xfrm>
-            <a:off x="7818120" y="1664208"/>
-            <a:ext cx="1371600" cy="201168"/>
+          <p:cNvPr id="62" name="Text 59"/>
+          <p:cNvSpPr txBox="1"/>
+          <p:nvPr/>
+        </p:nvSpPr>
+        <p:spPr>
+          <a:xfrm>
+            <a:off x="8101584" y="1810512"/>
+            <a:ext cx="1426464" cy="182880"/>
           </a:xfrm>
           <a:prstGeom prst="rect">
             <a:avLst/>
@@ -2644,16 +2768,14 @@
           <a:ln/>
         </p:spPr>
         <p:txBody>
-          <a:bodyPr wrap="square" lIns="0" tIns="0" rIns="0" bIns="0" rtlCol="0" anchor="ctr">
-            <a:normAutofit/>
-          </a:bodyPr>
+          <a:bodyPr wrap="none" lIns="0" tIns="0" rIns="0" bIns="0" rtlCol="0" anchor="ctr"/>
           <a:lstStyle/>
           <a:p>
             <a:pPr algn="ctr" indent="0" marL="0">
               <a:buNone/>
             </a:pPr>
             <a:r>
-              <a:rPr lang="en-US" sz="1080" dirty="0">
+              <a:rPr lang="en-US" sz="1200" dirty="0">
                 <a:solidFill>
                   <a:srgbClr val="14233E"/>
                 </a:solidFill>
@@ -2663,38 +2785,38 @@
               </a:rPr>
               <a:t>Encoding &amp; saving</a:t>
             </a:r>
-            <a:endParaRPr lang="en-US" sz="1080" dirty="0"/>
+            <a:endParaRPr lang="en-US" sz="1200" dirty="0"/>
           </a:p>
         </p:txBody>
       </p:sp>
       <p:sp>
         <p:nvSpPr>
-          <p:cNvPr id="59" name="Shape 56"/>
-          <p:cNvSpPr/>
-          <p:nvPr/>
-        </p:nvSpPr>
-        <p:spPr>
-          <a:xfrm>
-            <a:off x="9390888" y="1161288"/>
-            <a:ext cx="146304" cy="146304"/>
-          </a:xfrm>
-          <a:prstGeom prst="ellipse">
-            <a:avLst/>
-          </a:prstGeom>
-          <a:solidFill>
-            <a:srgbClr val="526477"/>
-          </a:solidFill>
-          <a:ln w="9525">
+          <p:cNvPr id="63" name="Shape 60"/>
+          <p:cNvSpPr/>
+          <p:nvPr/>
+        </p:nvSpPr>
+        <p:spPr>
+          <a:xfrm>
+            <a:off x="9180576" y="1280160"/>
+            <a:ext cx="493776" cy="0"/>
+          </a:xfrm>
+          <a:prstGeom prst="line">
+            <a:avLst/>
+          </a:prstGeom>
+          <a:noFill/>
+          <a:ln w="17780">
             <a:solidFill>
               <a:srgbClr val="14233E"/>
             </a:solidFill>
             <a:prstDash val="solid"/>
+            <a:headEnd type="none"/>
+            <a:tailEnd type="triangle"/>
           </a:ln>
         </p:spPr>
       </p:sp>
       <p:pic>
         <p:nvPicPr>
-          <p:cNvPr id="60" name="Image 1" descr="draft image icon">    </p:cNvPr>
+          <p:cNvPr id="64" name="Image 1" descr="draft image icon">    </p:cNvPr>
           <p:cNvPicPr>
             <a:picLocks noChangeAspect="1"/>
           </p:cNvPicPr>
@@ -2708,8 +2830,8 @@
         </p:blipFill>
         <p:spPr>
           <a:xfrm>
-            <a:off x="9706356" y="850392"/>
-            <a:ext cx="749808" cy="749808"/>
+            <a:off x="9674352" y="914400"/>
+            <a:ext cx="731520" cy="731520"/>
           </a:xfrm>
           <a:prstGeom prst="rect">
             <a:avLst/>
@@ -2718,14 +2840,14 @@
       </p:pic>
       <p:sp>
         <p:nvSpPr>
-          <p:cNvPr id="61" name="Text 57"/>
-          <p:cNvSpPr/>
-          <p:nvPr/>
-        </p:nvSpPr>
-        <p:spPr>
-          <a:xfrm>
-            <a:off x="9582912" y="1636776"/>
-            <a:ext cx="1005840" cy="201168"/>
+          <p:cNvPr id="65" name="Text 61"/>
+          <p:cNvSpPr txBox="1"/>
+          <p:nvPr/>
+        </p:nvSpPr>
+        <p:spPr>
+          <a:xfrm>
+            <a:off x="9601200" y="1810512"/>
+            <a:ext cx="877824" cy="182880"/>
           </a:xfrm>
           <a:prstGeom prst="rect">
             <a:avLst/>
@@ -2734,16 +2856,14 @@
           <a:ln/>
         </p:spPr>
         <p:txBody>
-          <a:bodyPr wrap="square" lIns="0" tIns="0" rIns="0" bIns="0" rtlCol="0" anchor="ctr">
-            <a:normAutofit/>
-          </a:bodyPr>
+          <a:bodyPr wrap="none" lIns="0" tIns="0" rIns="0" bIns="0" rtlCol="0" anchor="ctr"/>
           <a:lstStyle/>
           <a:p>
             <a:pPr algn="ctr" indent="0" marL="0">
               <a:buNone/>
             </a:pPr>
             <a:r>
-              <a:rPr lang="en-US" sz="1080" dirty="0">
+              <a:rPr lang="en-US" sz="1200" dirty="0">
                 <a:solidFill>
                   <a:srgbClr val="14233E"/>
                 </a:solidFill>
@@ -2753,61 +2873,20 @@
               </a:rPr>
               <a:t>Draft image</a:t>
             </a:r>
-            <a:endParaRPr lang="en-US" sz="1080" dirty="0"/>
+            <a:endParaRPr lang="en-US" sz="1200" dirty="0"/>
           </a:p>
         </p:txBody>
       </p:sp>
       <p:sp>
         <p:nvSpPr>
-          <p:cNvPr id="62" name="Text 58"/>
-          <p:cNvSpPr/>
-          <p:nvPr/>
-        </p:nvSpPr>
-        <p:spPr>
-          <a:xfrm>
-            <a:off x="3703320" y="2386584"/>
-            <a:ext cx="3566160" cy="201168"/>
-          </a:xfrm>
-          <a:prstGeom prst="rect">
-            <a:avLst/>
-          </a:prstGeom>
-          <a:noFill/>
-          <a:ln/>
-        </p:spPr>
-        <p:txBody>
-          <a:bodyPr wrap="square" lIns="0" tIns="0" rIns="0" bIns="0" rtlCol="0" anchor="ctr">
-            <a:normAutofit/>
-          </a:bodyPr>
-          <a:lstStyle/>
-          <a:p>
-            <a:pPr algn="ctr" indent="0" marL="0">
-              <a:buNone/>
-            </a:pPr>
-            <a:r>
-              <a:rPr lang="en-US" sz="1440" b="1" dirty="0">
-                <a:solidFill>
-                  <a:srgbClr val="14233E"/>
-                </a:solidFill>
-                <a:latin typeface="Arial" pitchFamily="34" charset="0"/>
-                <a:ea typeface="Arial" pitchFamily="34" charset="-122"/>
-                <a:cs typeface="Arial" pitchFamily="34" charset="-120"/>
-              </a:rPr>
-              <a:t>Budget-Aware Draft Controller</a:t>
-            </a:r>
-            <a:endParaRPr lang="en-US" sz="1440" dirty="0"/>
-          </a:p>
-        </p:txBody>
-      </p:sp>
-      <p:sp>
-        <p:nvSpPr>
-          <p:cNvPr id="63" name="Shape 59"/>
-          <p:cNvSpPr/>
-          <p:nvPr/>
-        </p:nvSpPr>
-        <p:spPr>
-          <a:xfrm>
-            <a:off x="1005840" y="2852928"/>
-            <a:ext cx="2286000" cy="548640"/>
+          <p:cNvPr id="66" name="Shape 62"/>
+          <p:cNvSpPr/>
+          <p:nvPr/>
+        </p:nvSpPr>
+        <p:spPr>
+          <a:xfrm>
+            <a:off x="685800" y="3200400"/>
+            <a:ext cx="2880360" cy="548640"/>
           </a:xfrm>
           <a:prstGeom prst="roundRect">
             <a:avLst>
@@ -2817,7 +2896,7 @@
           <a:solidFill>
             <a:srgbClr val="FFFFFF"/>
           </a:solidFill>
-          <a:ln w="12700">
+          <a:ln w="14605">
             <a:solidFill>
               <a:srgbClr val="E56E2E"/>
             </a:solidFill>
@@ -2827,7 +2906,7 @@
       </p:sp>
       <p:pic>
         <p:nvPicPr>
-          <p:cNvPr id="64" name="Image 2" descr="pacing icon">    </p:cNvPr>
+          <p:cNvPr id="67" name="Image 2" descr="pacing icon">    </p:cNvPr>
           <p:cNvPicPr>
             <a:picLocks noChangeAspect="1"/>
           </p:cNvPicPr>
@@ -2841,8 +2920,8 @@
         </p:blipFill>
         <p:spPr>
           <a:xfrm>
-            <a:off x="1124712" y="2907792"/>
-            <a:ext cx="438912" cy="438912"/>
+            <a:off x="822960" y="3264408"/>
+            <a:ext cx="420624" cy="420624"/>
           </a:xfrm>
           <a:prstGeom prst="rect">
             <a:avLst/>
@@ -2851,14 +2930,14 @@
       </p:pic>
       <p:sp>
         <p:nvSpPr>
-          <p:cNvPr id="65" name="Text 60"/>
-          <p:cNvSpPr/>
-          <p:nvPr/>
-        </p:nvSpPr>
-        <p:spPr>
-          <a:xfrm>
-            <a:off x="1645920" y="2907792"/>
-            <a:ext cx="1499616" cy="201168"/>
+          <p:cNvPr id="68" name="Text 63"/>
+          <p:cNvSpPr txBox="1"/>
+          <p:nvPr/>
+        </p:nvSpPr>
+        <p:spPr>
+          <a:xfrm>
+            <a:off x="1389888" y="3282696"/>
+            <a:ext cx="2066544" cy="182880"/>
           </a:xfrm>
           <a:prstGeom prst="rect">
             <a:avLst/>
@@ -2867,16 +2946,14 @@
           <a:ln/>
         </p:spPr>
         <p:txBody>
-          <a:bodyPr wrap="square" lIns="0" tIns="0" rIns="0" bIns="0" rtlCol="0" anchor="ctr">
-            <a:normAutofit/>
-          </a:bodyPr>
+          <a:bodyPr wrap="none" lIns="0" tIns="0" rIns="0" bIns="0" rtlCol="0" anchor="ctr"/>
           <a:lstStyle/>
           <a:p>
             <a:pPr algn="l" indent="0" marL="0">
               <a:buNone/>
             </a:pPr>
             <a:r>
-              <a:rPr lang="en-US" sz="1020" b="1" dirty="0">
+              <a:rPr lang="en-US" sz="1200" b="1" dirty="0">
                 <a:solidFill>
                   <a:srgbClr val="14233E"/>
                 </a:solidFill>
@@ -2886,20 +2963,20 @@
               </a:rPr>
               <a:t>Capture-Availability</a:t>
             </a:r>
-            <a:endParaRPr lang="en-US" sz="1020" dirty="0"/>
+            <a:endParaRPr lang="en-US" sz="1200" dirty="0"/>
           </a:p>
         </p:txBody>
       </p:sp>
       <p:sp>
         <p:nvSpPr>
-          <p:cNvPr id="66" name="Text 61"/>
-          <p:cNvSpPr/>
-          <p:nvPr/>
-        </p:nvSpPr>
-        <p:spPr>
-          <a:xfrm>
-            <a:off x="1645920" y="3127248"/>
-            <a:ext cx="1499616" cy="201168"/>
+          <p:cNvPr id="69" name="Text 64"/>
+          <p:cNvSpPr txBox="1"/>
+          <p:nvPr/>
+        </p:nvSpPr>
+        <p:spPr>
+          <a:xfrm>
+            <a:off x="1389888" y="3483864"/>
+            <a:ext cx="2066544" cy="182880"/>
           </a:xfrm>
           <a:prstGeom prst="rect">
             <a:avLst/>
@@ -2908,16 +2985,14 @@
           <a:ln/>
         </p:spPr>
         <p:txBody>
-          <a:bodyPr wrap="square" lIns="0" tIns="0" rIns="0" bIns="0" rtlCol="0" anchor="ctr">
-            <a:normAutofit/>
-          </a:bodyPr>
+          <a:bodyPr wrap="none" lIns="0" tIns="0" rIns="0" bIns="0" rtlCol="0" anchor="ctr"/>
           <a:lstStyle/>
           <a:p>
             <a:pPr algn="l" indent="0" marL="0">
               <a:buNone/>
             </a:pPr>
             <a:r>
-              <a:rPr lang="en-US" sz="1020" b="1" dirty="0">
+              <a:rPr lang="en-US" sz="1200" b="1" dirty="0">
                 <a:solidFill>
                   <a:srgbClr val="14233E"/>
                 </a:solidFill>
@@ -2927,20 +3002,20 @@
               </a:rPr>
               <a:t>Pacing</a:t>
             </a:r>
-            <a:endParaRPr lang="en-US" sz="1020" dirty="0"/>
+            <a:endParaRPr lang="en-US" sz="1200" dirty="0"/>
           </a:p>
         </p:txBody>
       </p:sp>
       <p:sp>
         <p:nvSpPr>
-          <p:cNvPr id="67" name="Shape 62"/>
-          <p:cNvSpPr/>
-          <p:nvPr/>
-        </p:nvSpPr>
-        <p:spPr>
-          <a:xfrm>
-            <a:off x="4343400" y="2852928"/>
-            <a:ext cx="2286000" cy="548640"/>
+          <p:cNvPr id="70" name="Shape 65"/>
+          <p:cNvSpPr/>
+          <p:nvPr/>
+        </p:nvSpPr>
+        <p:spPr>
+          <a:xfrm>
+            <a:off x="7406640" y="3200400"/>
+            <a:ext cx="2880360" cy="548640"/>
           </a:xfrm>
           <a:prstGeom prst="roundRect">
             <a:avLst>
@@ -2950,272 +3025,7 @@
           <a:solidFill>
             <a:srgbClr val="FFFFFF"/>
           </a:solidFill>
-          <a:ln w="12700">
-            <a:solidFill>
-              <a:srgbClr val="526477"/>
-            </a:solidFill>
-            <a:prstDash val="solid"/>
-          </a:ln>
-        </p:spPr>
-      </p:sp>
-      <p:sp>
-        <p:nvSpPr>
-          <p:cNvPr id="68" name="Shape 63"/>
-          <p:cNvSpPr/>
-          <p:nvPr/>
-        </p:nvSpPr>
-        <p:spPr>
-          <a:xfrm>
-            <a:off x="4462272" y="2907792"/>
-            <a:ext cx="438912" cy="438912"/>
-          </a:xfrm>
-          <a:prstGeom prst="ellipse">
-            <a:avLst/>
-          </a:prstGeom>
-          <a:solidFill>
-            <a:srgbClr val="F1F4F8"/>
-          </a:solidFill>
-          <a:ln w="13335">
-            <a:solidFill>
-              <a:srgbClr val="14233E"/>
-            </a:solidFill>
-            <a:prstDash val="solid"/>
-          </a:ln>
-        </p:spPr>
-      </p:sp>
-      <p:sp>
-        <p:nvSpPr>
-          <p:cNvPr id="69" name="Shape 64"/>
-          <p:cNvSpPr/>
-          <p:nvPr/>
-        </p:nvSpPr>
-        <p:spPr>
-          <a:xfrm>
-            <a:off x="4545665" y="3175528"/>
-            <a:ext cx="43891" cy="65837"/>
-          </a:xfrm>
-          <a:prstGeom prst="rect">
-            <a:avLst/>
-          </a:prstGeom>
-          <a:solidFill>
-            <a:srgbClr val="526477"/>
-          </a:solidFill>
-          <a:ln w="12700">
-            <a:solidFill>
-              <a:srgbClr val="526477">
-                <a:alpha val="0"/>
-              </a:srgbClr>
-            </a:solidFill>
-            <a:prstDash val="solid"/>
-          </a:ln>
-        </p:spPr>
-      </p:sp>
-      <p:sp>
-        <p:nvSpPr>
-          <p:cNvPr id="70" name="Shape 65"/>
-          <p:cNvSpPr/>
-          <p:nvPr/>
-        </p:nvSpPr>
-        <p:spPr>
-          <a:xfrm>
-            <a:off x="4611502" y="3140415"/>
-            <a:ext cx="43891" cy="100950"/>
-          </a:xfrm>
-          <a:prstGeom prst="rect">
-            <a:avLst/>
-          </a:prstGeom>
-          <a:solidFill>
-            <a:srgbClr val="2476D2"/>
-          </a:solidFill>
-          <a:ln w="12700">
-            <a:solidFill>
-              <a:srgbClr val="2476D2">
-                <a:alpha val="0"/>
-              </a:srgbClr>
-            </a:solidFill>
-            <a:prstDash val="solid"/>
-          </a:ln>
-        </p:spPr>
-      </p:sp>
-      <p:sp>
-        <p:nvSpPr>
-          <p:cNvPr id="71" name="Shape 66"/>
-          <p:cNvSpPr/>
-          <p:nvPr/>
-        </p:nvSpPr>
-        <p:spPr>
-          <a:xfrm>
-            <a:off x="4677339" y="3105302"/>
-            <a:ext cx="43891" cy="136063"/>
-          </a:xfrm>
-          <a:prstGeom prst="rect">
-            <a:avLst/>
-          </a:prstGeom>
-          <a:solidFill>
-            <a:srgbClr val="14233E"/>
-          </a:solidFill>
-          <a:ln w="12700">
-            <a:solidFill>
-              <a:srgbClr val="14233E">
-                <a:alpha val="0"/>
-              </a:srgbClr>
-            </a:solidFill>
-            <a:prstDash val="solid"/>
-          </a:ln>
-        </p:spPr>
-      </p:sp>
-      <p:sp>
-        <p:nvSpPr>
-          <p:cNvPr id="72" name="Shape 67"/>
-          <p:cNvSpPr/>
-          <p:nvPr/>
-        </p:nvSpPr>
-        <p:spPr>
-          <a:xfrm>
-            <a:off x="4690506" y="3105302"/>
-            <a:ext cx="87782" cy="-92172"/>
-          </a:xfrm>
-          <a:prstGeom prst="line">
-            <a:avLst/>
-          </a:prstGeom>
-          <a:noFill/>
           <a:ln w="14605">
-            <a:solidFill>
-              <a:srgbClr val="E56E2E"/>
-            </a:solidFill>
-            <a:prstDash val="solid"/>
-            <a:headEnd type="none"/>
-            <a:tailEnd type="none"/>
-          </a:ln>
-        </p:spPr>
-      </p:sp>
-      <p:sp>
-        <p:nvSpPr>
-          <p:cNvPr id="73" name="Shape 68"/>
-          <p:cNvSpPr/>
-          <p:nvPr/>
-        </p:nvSpPr>
-        <p:spPr>
-          <a:xfrm>
-            <a:off x="4670755" y="3085551"/>
-            <a:ext cx="39502" cy="39502"/>
-          </a:xfrm>
-          <a:prstGeom prst="ellipse">
-            <a:avLst/>
-          </a:prstGeom>
-          <a:solidFill>
-            <a:srgbClr val="E56E2E"/>
-          </a:solidFill>
-          <a:ln w="6350">
-            <a:solidFill>
-              <a:srgbClr val="14233E"/>
-            </a:solidFill>
-            <a:prstDash val="solid"/>
-          </a:ln>
-        </p:spPr>
-      </p:sp>
-      <p:sp>
-        <p:nvSpPr>
-          <p:cNvPr id="74" name="Text 69"/>
-          <p:cNvSpPr/>
-          <p:nvPr/>
-        </p:nvSpPr>
-        <p:spPr>
-          <a:xfrm>
-            <a:off x="4946904" y="2907792"/>
-            <a:ext cx="1581912" cy="201168"/>
-          </a:xfrm>
-          <a:prstGeom prst="rect">
-            <a:avLst/>
-          </a:prstGeom>
-          <a:noFill/>
-          <a:ln/>
-        </p:spPr>
-        <p:txBody>
-          <a:bodyPr wrap="square" lIns="0" tIns="0" rIns="0" bIns="0" rtlCol="0" anchor="ctr">
-            <a:normAutofit/>
-          </a:bodyPr>
-          <a:lstStyle/>
-          <a:p>
-            <a:pPr algn="l" indent="0" marL="0">
-              <a:buNone/>
-            </a:pPr>
-            <a:r>
-              <a:rPr lang="en-US" sz="1020" b="1" dirty="0">
-                <a:solidFill>
-                  <a:srgbClr val="14233E"/>
-                </a:solidFill>
-                <a:latin typeface="Arial" pitchFamily="34" charset="0"/>
-                <a:ea typeface="Arial" pitchFamily="34" charset="-122"/>
-                <a:cs typeface="Arial" pitchFamily="34" charset="-120"/>
-              </a:rPr>
-              <a:t>Workload Model &amp;</a:t>
-            </a:r>
-            <a:endParaRPr lang="en-US" sz="1020" dirty="0"/>
-          </a:p>
-        </p:txBody>
-      </p:sp>
-      <p:sp>
-        <p:nvSpPr>
-          <p:cNvPr id="75" name="Text 70"/>
-          <p:cNvSpPr/>
-          <p:nvPr/>
-        </p:nvSpPr>
-        <p:spPr>
-          <a:xfrm>
-            <a:off x="4946904" y="3127248"/>
-            <a:ext cx="1581912" cy="201168"/>
-          </a:xfrm>
-          <a:prstGeom prst="rect">
-            <a:avLst/>
-          </a:prstGeom>
-          <a:noFill/>
-          <a:ln/>
-        </p:spPr>
-        <p:txBody>
-          <a:bodyPr wrap="square" lIns="0" tIns="0" rIns="0" bIns="0" rtlCol="0" anchor="ctr">
-            <a:normAutofit/>
-          </a:bodyPr>
-          <a:lstStyle/>
-          <a:p>
-            <a:pPr algn="l" indent="0" marL="0">
-              <a:buNone/>
-            </a:pPr>
-            <a:r>
-              <a:rPr lang="en-US" sz="1020" b="1" dirty="0">
-                <a:solidFill>
-                  <a:srgbClr val="14233E"/>
-                </a:solidFill>
-                <a:latin typeface="Arial" pitchFamily="34" charset="0"/>
-                <a:ea typeface="Arial" pitchFamily="34" charset="-122"/>
-                <a:cs typeface="Arial" pitchFamily="34" charset="-120"/>
-              </a:rPr>
-              <a:t>Online Duration Estimates</a:t>
-            </a:r>
-            <a:endParaRPr lang="en-US" sz="1020" dirty="0"/>
-          </a:p>
-        </p:txBody>
-      </p:sp>
-      <p:sp>
-        <p:nvSpPr>
-          <p:cNvPr id="76" name="Shape 71"/>
-          <p:cNvSpPr/>
-          <p:nvPr/>
-        </p:nvSpPr>
-        <p:spPr>
-          <a:xfrm>
-            <a:off x="7680960" y="2852928"/>
-            <a:ext cx="2286000" cy="548640"/>
-          </a:xfrm>
-          <a:prstGeom prst="roundRect">
-            <a:avLst>
-              <a:gd name="adj" fmla="val 9167"/>
-            </a:avLst>
-          </a:prstGeom>
-          <a:solidFill>
-            <a:srgbClr val="FFFFFF"/>
-          </a:solidFill>
-          <a:ln w="12700">
             <a:solidFill>
               <a:srgbClr val="2476D2"/>
             </a:solidFill>
@@ -3225,7 +3035,7 @@
       </p:sp>
       <p:pic>
         <p:nvPicPr>
-          <p:cNvPr id="77" name="Image 3" descr="admission icon">    </p:cNvPr>
+          <p:cNvPr id="71" name="Image 3" descr="admission icon">    </p:cNvPr>
           <p:cNvPicPr>
             <a:picLocks noChangeAspect="1"/>
           </p:cNvPicPr>
@@ -3239,8 +3049,8 @@
         </p:blipFill>
         <p:spPr>
           <a:xfrm>
-            <a:off x="7799832" y="2907792"/>
-            <a:ext cx="438912" cy="438912"/>
+            <a:off x="7543800" y="3264408"/>
+            <a:ext cx="420624" cy="420624"/>
           </a:xfrm>
           <a:prstGeom prst="rect">
             <a:avLst/>
@@ -3249,14 +3059,14 @@
       </p:pic>
       <p:sp>
         <p:nvSpPr>
-          <p:cNvPr id="78" name="Text 72"/>
-          <p:cNvSpPr/>
-          <p:nvPr/>
-        </p:nvSpPr>
-        <p:spPr>
-          <a:xfrm>
-            <a:off x="8321040" y="2907792"/>
-            <a:ext cx="1499616" cy="201168"/>
+          <p:cNvPr id="72" name="Text 66"/>
+          <p:cNvSpPr txBox="1"/>
+          <p:nvPr/>
+        </p:nvSpPr>
+        <p:spPr>
+          <a:xfrm>
+            <a:off x="8110728" y="3282696"/>
+            <a:ext cx="2066544" cy="182880"/>
           </a:xfrm>
           <a:prstGeom prst="rect">
             <a:avLst/>
@@ -3265,16 +3075,14 @@
           <a:ln/>
         </p:spPr>
         <p:txBody>
-          <a:bodyPr wrap="square" lIns="0" tIns="0" rIns="0" bIns="0" rtlCol="0" anchor="ctr">
-            <a:normAutofit/>
-          </a:bodyPr>
+          <a:bodyPr wrap="none" lIns="0" tIns="0" rIns="0" bIns="0" rtlCol="0" anchor="ctr"/>
           <a:lstStyle/>
           <a:p>
             <a:pPr algn="l" indent="0" marL="0">
               <a:buNone/>
             </a:pPr>
             <a:r>
-              <a:rPr lang="en-US" sz="1020" b="1" dirty="0">
+              <a:rPr lang="en-US" sz="1200" b="1" dirty="0">
                 <a:solidFill>
                   <a:srgbClr val="14233E"/>
                 </a:solidFill>
@@ -3284,20 +3092,20 @@
               </a:rPr>
               <a:t>Remaining-Sequence</a:t>
             </a:r>
-            <a:endParaRPr lang="en-US" sz="1020" dirty="0"/>
+            <a:endParaRPr lang="en-US" sz="1200" dirty="0"/>
           </a:p>
         </p:txBody>
       </p:sp>
       <p:sp>
         <p:nvSpPr>
-          <p:cNvPr id="79" name="Text 73"/>
-          <p:cNvSpPr/>
-          <p:nvPr/>
-        </p:nvSpPr>
-        <p:spPr>
-          <a:xfrm>
-            <a:off x="8321040" y="3127248"/>
-            <a:ext cx="1499616" cy="201168"/>
+          <p:cNvPr id="73" name="Text 67"/>
+          <p:cNvSpPr txBox="1"/>
+          <p:nvPr/>
+        </p:nvSpPr>
+        <p:spPr>
+          <a:xfrm>
+            <a:off x="8110728" y="3483864"/>
+            <a:ext cx="2066544" cy="182880"/>
           </a:xfrm>
           <a:prstGeom prst="rect">
             <a:avLst/>
@@ -3306,16 +3114,14 @@
           <a:ln/>
         </p:spPr>
         <p:txBody>
-          <a:bodyPr wrap="square" lIns="0" tIns="0" rIns="0" bIns="0" rtlCol="0" anchor="ctr">
-            <a:normAutofit/>
-          </a:bodyPr>
+          <a:bodyPr wrap="none" lIns="0" tIns="0" rIns="0" bIns="0" rtlCol="0" anchor="ctr"/>
           <a:lstStyle/>
           <a:p>
             <a:pPr algn="l" indent="0" marL="0">
               <a:buNone/>
             </a:pPr>
             <a:r>
-              <a:rPr lang="en-US" sz="1020" b="1" dirty="0">
+              <a:rPr lang="en-US" sz="1200" b="1" dirty="0">
                 <a:solidFill>
                   <a:srgbClr val="14233E"/>
                 </a:solidFill>
@@ -3325,149 +3131,197 @@
               </a:rPr>
               <a:t>Admission</a:t>
             </a:r>
-            <a:endParaRPr lang="en-US" sz="1020" dirty="0"/>
+            <a:endParaRPr lang="en-US" sz="1200" dirty="0"/>
           </a:p>
         </p:txBody>
       </p:sp>
       <p:sp>
         <p:nvSpPr>
-          <p:cNvPr id="80" name="Shape 74"/>
-          <p:cNvSpPr/>
-          <p:nvPr/>
-        </p:nvSpPr>
-        <p:spPr>
-          <a:xfrm>
-            <a:off x="1252728" y="2560320"/>
-            <a:ext cx="146304" cy="146304"/>
-          </a:xfrm>
-          <a:prstGeom prst="rect">
-            <a:avLst/>
-          </a:prstGeom>
-          <a:solidFill>
-            <a:srgbClr val="526477"/>
-          </a:solidFill>
-          <a:ln w="12700">
-            <a:solidFill>
-              <a:srgbClr val="14233E"/>
-            </a:solidFill>
-            <a:prstDash val="solid"/>
-          </a:ln>
-        </p:spPr>
-      </p:sp>
-      <p:sp>
-        <p:nvSpPr>
-          <p:cNvPr id="81" name="Shape 75"/>
-          <p:cNvSpPr/>
-          <p:nvPr/>
-        </p:nvSpPr>
-        <p:spPr>
-          <a:xfrm>
-            <a:off x="1801368" y="2560320"/>
-            <a:ext cx="146304" cy="146304"/>
-          </a:xfrm>
-          <a:prstGeom prst="rect">
-            <a:avLst/>
-          </a:prstGeom>
-          <a:solidFill>
-            <a:srgbClr val="E56E2E"/>
-          </a:solidFill>
-          <a:ln w="12700">
-            <a:solidFill>
-              <a:srgbClr val="14233E"/>
-            </a:solidFill>
-            <a:prstDash val="solid"/>
-          </a:ln>
-        </p:spPr>
-      </p:sp>
-      <p:sp>
-        <p:nvSpPr>
-          <p:cNvPr id="82" name="Shape 76"/>
-          <p:cNvSpPr/>
-          <p:nvPr/>
-        </p:nvSpPr>
-        <p:spPr>
-          <a:xfrm>
-            <a:off x="8750808" y="2560320"/>
-            <a:ext cx="146304" cy="146304"/>
-          </a:xfrm>
-          <a:prstGeom prst="rect">
-            <a:avLst/>
-          </a:prstGeom>
-          <a:solidFill>
-            <a:srgbClr val="2476D2"/>
-          </a:solidFill>
-          <a:ln w="12700">
-            <a:solidFill>
-              <a:srgbClr val="14233E"/>
-            </a:solidFill>
-            <a:prstDash val="solid"/>
-          </a:ln>
-        </p:spPr>
-      </p:sp>
-      <p:sp>
-        <p:nvSpPr>
-          <p:cNvPr id="83" name="Shape 77"/>
-          <p:cNvSpPr/>
-          <p:nvPr/>
-        </p:nvSpPr>
-        <p:spPr>
-          <a:xfrm>
-            <a:off x="10533888" y="2560320"/>
-            <a:ext cx="146304" cy="146304"/>
-          </a:xfrm>
-          <a:prstGeom prst="rect">
-            <a:avLst/>
-          </a:prstGeom>
-          <a:solidFill>
-            <a:srgbClr val="526477"/>
-          </a:solidFill>
-          <a:ln w="12700">
-            <a:solidFill>
-              <a:srgbClr val="14233E"/>
-            </a:solidFill>
-            <a:prstDash val="solid"/>
-          </a:ln>
-        </p:spPr>
-      </p:sp>
-      <p:sp>
-        <p:nvSpPr>
-          <p:cNvPr id="84" name="Shape 78"/>
-          <p:cNvSpPr/>
-          <p:nvPr/>
-        </p:nvSpPr>
-        <p:spPr>
-          <a:xfrm>
-            <a:off x="137160" y="1810512"/>
-            <a:ext cx="1051560" cy="420624"/>
+          <p:cNvPr id="74" name="Shape 68"/>
+          <p:cNvSpPr/>
+          <p:nvPr/>
+        </p:nvSpPr>
+        <p:spPr>
+          <a:xfrm>
+            <a:off x="2926080" y="3968496"/>
+            <a:ext cx="5120640" cy="457200"/>
           </a:xfrm>
           <a:prstGeom prst="roundRect">
             <a:avLst>
-              <a:gd name="adj" fmla="val 5435"/>
+              <a:gd name="adj" fmla="val 10000"/>
             </a:avLst>
           </a:prstGeom>
           <a:solidFill>
             <a:srgbClr val="FFFFFF"/>
           </a:solidFill>
-          <a:ln w="12700">
-            <a:solidFill>
-              <a:srgbClr val="FFFFFF">
-                <a:alpha val="0"/>
-              </a:srgbClr>
-            </a:solidFill>
-            <a:prstDash val="solid"/>
-          </a:ln>
-        </p:spPr>
-      </p:sp>
-      <p:sp>
-        <p:nvSpPr>
-          <p:cNvPr id="85" name="Text 79"/>
-          <p:cNvSpPr/>
-          <p:nvPr/>
-        </p:nvSpPr>
-        <p:spPr>
-          <a:xfrm>
-            <a:off x="137160" y="1810512"/>
-            <a:ext cx="1051560" cy="201168"/>
+          <a:ln w="14605">
+            <a:solidFill>
+              <a:srgbClr val="526477"/>
+            </a:solidFill>
+            <a:prstDash val="solid"/>
+          </a:ln>
+        </p:spPr>
+      </p:sp>
+      <p:sp>
+        <p:nvSpPr>
+          <p:cNvPr id="75" name="Shape 69"/>
+          <p:cNvSpPr/>
+          <p:nvPr/>
+        </p:nvSpPr>
+        <p:spPr>
+          <a:xfrm>
+            <a:off x="3633769" y="4058107"/>
+            <a:ext cx="305775" cy="305775"/>
+          </a:xfrm>
+          <a:prstGeom prst="ellipse">
+            <a:avLst/>
+          </a:prstGeom>
+          <a:solidFill>
+            <a:srgbClr val="FFFFFF"/>
+          </a:solidFill>
+          <a:ln w="15240">
+            <a:solidFill>
+              <a:srgbClr val="14233E"/>
+            </a:solidFill>
+            <a:prstDash val="solid"/>
+          </a:ln>
+        </p:spPr>
+      </p:sp>
+      <p:sp>
+        <p:nvSpPr>
+          <p:cNvPr id="76" name="Shape 70"/>
+          <p:cNvSpPr/>
+          <p:nvPr/>
+        </p:nvSpPr>
+        <p:spPr>
+          <a:xfrm flipH="1" flipV="1">
+            <a:off x="3667493" y="4142195"/>
+            <a:ext cx="31777" cy="18347"/>
+          </a:xfrm>
+          <a:prstGeom prst="line">
+            <a:avLst/>
+          </a:prstGeom>
+          <a:noFill/>
+          <a:ln w="14605">
+            <a:solidFill>
+              <a:srgbClr val="526477"/>
+            </a:solidFill>
+            <a:prstDash val="solid"/>
+            <a:headEnd type="none"/>
+            <a:tailEnd type="none"/>
+          </a:ln>
+        </p:spPr>
+      </p:sp>
+      <p:sp>
+        <p:nvSpPr>
+          <p:cNvPr id="77" name="Shape 71"/>
+          <p:cNvSpPr/>
+          <p:nvPr/>
+        </p:nvSpPr>
+        <p:spPr>
+          <a:xfrm flipV="1">
+            <a:off x="3786657" y="4073396"/>
+            <a:ext cx="0" cy="36693"/>
+          </a:xfrm>
+          <a:prstGeom prst="line">
+            <a:avLst/>
+          </a:prstGeom>
+          <a:noFill/>
+          <a:ln w="14605">
+            <a:solidFill>
+              <a:srgbClr val="526477"/>
+            </a:solidFill>
+            <a:prstDash val="solid"/>
+            <a:headEnd type="none"/>
+            <a:tailEnd type="none"/>
+          </a:ln>
+        </p:spPr>
+      </p:sp>
+      <p:sp>
+        <p:nvSpPr>
+          <p:cNvPr id="78" name="Shape 72"/>
+          <p:cNvSpPr/>
+          <p:nvPr/>
+        </p:nvSpPr>
+        <p:spPr>
+          <a:xfrm flipV="1">
+            <a:off x="3874044" y="4142195"/>
+            <a:ext cx="31777" cy="18347"/>
+          </a:xfrm>
+          <a:prstGeom prst="line">
+            <a:avLst/>
+          </a:prstGeom>
+          <a:noFill/>
+          <a:ln w="14605">
+            <a:solidFill>
+              <a:srgbClr val="526477"/>
+            </a:solidFill>
+            <a:prstDash val="solid"/>
+            <a:headEnd type="none"/>
+            <a:tailEnd type="none"/>
+          </a:ln>
+        </p:spPr>
+      </p:sp>
+      <p:sp>
+        <p:nvSpPr>
+          <p:cNvPr id="79" name="Shape 73"/>
+          <p:cNvSpPr/>
+          <p:nvPr/>
+        </p:nvSpPr>
+        <p:spPr>
+          <a:xfrm flipV="1">
+            <a:off x="3786657" y="4115049"/>
+            <a:ext cx="59953" cy="95946"/>
+          </a:xfrm>
+          <a:prstGeom prst="line">
+            <a:avLst/>
+          </a:prstGeom>
+          <a:noFill/>
+          <a:ln w="21590">
+            <a:solidFill>
+              <a:srgbClr val="E56E2E"/>
+            </a:solidFill>
+            <a:prstDash val="solid"/>
+            <a:headEnd type="none"/>
+            <a:tailEnd type="none"/>
+          </a:ln>
+        </p:spPr>
+      </p:sp>
+      <p:sp>
+        <p:nvSpPr>
+          <p:cNvPr id="80" name="Shape 74"/>
+          <p:cNvSpPr/>
+          <p:nvPr/>
+        </p:nvSpPr>
+        <p:spPr>
+          <a:xfrm>
+            <a:off x="3767546" y="4191884"/>
+            <a:ext cx="38222" cy="38222"/>
+          </a:xfrm>
+          <a:prstGeom prst="ellipse">
+            <a:avLst/>
+          </a:prstGeom>
+          <a:solidFill>
+            <a:srgbClr val="14233E"/>
+          </a:solidFill>
+          <a:ln w="6350">
+            <a:solidFill>
+              <a:srgbClr val="14233E"/>
+            </a:solidFill>
+            <a:prstDash val="solid"/>
+          </a:ln>
+        </p:spPr>
+      </p:sp>
+      <p:sp>
+        <p:nvSpPr>
+          <p:cNvPr id="81" name="Text 75"/>
+          <p:cNvSpPr txBox="1"/>
+          <p:nvPr/>
+        </p:nvSpPr>
+        <p:spPr>
+          <a:xfrm>
+            <a:off x="4088409" y="3968496"/>
+            <a:ext cx="3362910" cy="457200"/>
           </a:xfrm>
           <a:prstGeom prst="rect">
             <a:avLst/>
@@ -3476,16 +3330,14 @@
           <a:ln/>
         </p:spPr>
         <p:txBody>
-          <a:bodyPr wrap="square" lIns="0" tIns="0" rIns="0" bIns="0" rtlCol="0" anchor="ctr">
-            <a:normAutofit/>
-          </a:bodyPr>
+          <a:bodyPr wrap="none" lIns="0" tIns="0" rIns="0" bIns="0" rtlCol="0" anchor="ctr"/>
           <a:lstStyle/>
           <a:p>
-            <a:pPr algn="ctr" indent="0" marL="0">
+            <a:pPr algn="l" indent="0" marL="0">
               <a:buNone/>
             </a:pPr>
             <a:r>
-              <a:rPr lang="en-US" sz="1020" dirty="0">
+              <a:rPr lang="en-US" sz="1200" b="1" dirty="0">
                 <a:solidFill>
                   <a:srgbClr val="14233E"/>
                 </a:solidFill>
@@ -3493,22 +3345,97 @@
                 <a:ea typeface="Arial" pitchFamily="34" charset="-122"/>
                 <a:cs typeface="Arial" pitchFamily="34" charset="-120"/>
               </a:rPr>
-              <a:t>captureAvailable</a:t>
-            </a:r>
-            <a:endParaRPr lang="en-US" sz="1020" dirty="0"/>
+              <a:t>Workload Model &amp; Online Duration Estimates</a:t>
+            </a:r>
+            <a:endParaRPr lang="en-US" sz="1200" dirty="0"/>
           </a:p>
         </p:txBody>
       </p:sp>
       <p:sp>
         <p:nvSpPr>
-          <p:cNvPr id="86" name="Text 80"/>
-          <p:cNvSpPr/>
-          <p:nvPr/>
-        </p:nvSpPr>
-        <p:spPr>
-          <a:xfrm>
-            <a:off x="137160" y="2029968"/>
-            <a:ext cx="1051560" cy="201168"/>
+          <p:cNvPr id="82" name="Shape 76"/>
+          <p:cNvSpPr/>
+          <p:nvPr/>
+        </p:nvSpPr>
+        <p:spPr>
+          <a:xfrm flipV="1">
+            <a:off x="3200400" y="3749040"/>
+            <a:ext cx="0" cy="219456"/>
+          </a:xfrm>
+          <a:prstGeom prst="line">
+            <a:avLst/>
+          </a:prstGeom>
+          <a:noFill/>
+          <a:ln w="17780">
+            <a:solidFill>
+              <a:srgbClr val="E56E2E"/>
+            </a:solidFill>
+            <a:prstDash val="solid"/>
+            <a:headEnd type="none"/>
+            <a:tailEnd type="triangle"/>
+          </a:ln>
+        </p:spPr>
+      </p:sp>
+      <p:sp>
+        <p:nvSpPr>
+          <p:cNvPr id="83" name="Shape 77"/>
+          <p:cNvSpPr/>
+          <p:nvPr/>
+        </p:nvSpPr>
+        <p:spPr>
+          <a:xfrm flipV="1">
+            <a:off x="7772400" y="3749040"/>
+            <a:ext cx="0" cy="219456"/>
+          </a:xfrm>
+          <a:prstGeom prst="line">
+            <a:avLst/>
+          </a:prstGeom>
+          <a:noFill/>
+          <a:ln w="17780">
+            <a:solidFill>
+              <a:srgbClr val="2476D2"/>
+            </a:solidFill>
+            <a:prstDash val="solid"/>
+            <a:headEnd type="none"/>
+            <a:tailEnd type="triangle"/>
+          </a:ln>
+        </p:spPr>
+      </p:sp>
+      <p:sp>
+        <p:nvSpPr>
+          <p:cNvPr id="84" name="Shape 78"/>
+          <p:cNvSpPr/>
+          <p:nvPr/>
+        </p:nvSpPr>
+        <p:spPr>
+          <a:xfrm>
+            <a:off x="841248" y="1453896"/>
+            <a:ext cx="0" cy="1746504"/>
+          </a:xfrm>
+          <a:prstGeom prst="line">
+            <a:avLst/>
+          </a:prstGeom>
+          <a:noFill/>
+          <a:ln w="17780">
+            <a:solidFill>
+              <a:srgbClr val="526477"/>
+            </a:solidFill>
+            <a:prstDash val="solid"/>
+            <a:headEnd type="none"/>
+            <a:tailEnd type="triangle"/>
+          </a:ln>
+        </p:spPr>
+      </p:sp>
+      <p:sp>
+        <p:nvSpPr>
+          <p:cNvPr id="85" name="Text 79"/>
+          <p:cNvSpPr txBox="1"/>
+          <p:nvPr/>
+        </p:nvSpPr>
+        <p:spPr>
+          <a:xfrm>
+            <a:off x="932688" y="2212848"/>
+            <a:ext cx="1234440" cy="182880"/>
           </a:xfrm>
           <a:prstGeom prst="rect">
             <a:avLst/>
@@ -3517,18 +3444,55 @@
           <a:ln/>
         </p:spPr>
         <p:txBody>
-          <a:bodyPr wrap="square" lIns="0" tIns="0" rIns="0" bIns="0" rtlCol="0" anchor="ctr">
-            <a:normAutofit/>
-          </a:bodyPr>
+          <a:bodyPr wrap="none" lIns="0" tIns="0" rIns="0" bIns="0" rtlCol="0" anchor="ctr"/>
           <a:lstStyle/>
           <a:p>
-            <a:pPr algn="ctr" indent="0" marL="0">
+            <a:pPr algn="l" indent="0" marL="0">
               <a:buNone/>
             </a:pPr>
             <a:r>
-              <a:rPr lang="en-US" sz="1020" dirty="0">
+              <a:rPr lang="en-US" sz="1200" dirty="0">
                 <a:solidFill>
-                  <a:srgbClr val="14233E"/>
+                  <a:srgbClr val="526477"/>
+                </a:solidFill>
+                <a:latin typeface="Arial" pitchFamily="34" charset="0"/>
+                <a:ea typeface="Arial" pitchFamily="34" charset="-122"/>
+                <a:cs typeface="Arial" pitchFamily="34" charset="-120"/>
+              </a:rPr>
+              <a:t>captureAvailable</a:t>
+            </a:r>
+            <a:endParaRPr lang="en-US" sz="1200" dirty="0"/>
+          </a:p>
+        </p:txBody>
+      </p:sp>
+      <p:sp>
+        <p:nvSpPr>
+          <p:cNvPr id="86" name="Text 80"/>
+          <p:cNvSpPr txBox="1"/>
+          <p:nvPr/>
+        </p:nvSpPr>
+        <p:spPr>
+          <a:xfrm>
+            <a:off x="932688" y="2414016"/>
+            <a:ext cx="1234440" cy="182880"/>
+          </a:xfrm>
+          <a:prstGeom prst="rect">
+            <a:avLst/>
+          </a:prstGeom>
+          <a:noFill/>
+          <a:ln/>
+        </p:spPr>
+        <p:txBody>
+          <a:bodyPr wrap="none" lIns="0" tIns="0" rIns="0" bIns="0" rtlCol="0" anchor="ctr"/>
+          <a:lstStyle/>
+          <a:p>
+            <a:pPr algn="l" indent="0" marL="0">
+              <a:buNone/>
+            </a:pPr>
+            <a:r>
+              <a:rPr lang="en-US" sz="1200" dirty="0">
+                <a:solidFill>
+                  <a:srgbClr val="526477"/>
                 </a:solidFill>
                 <a:latin typeface="Arial" pitchFamily="34" charset="0"/>
                 <a:ea typeface="Arial" pitchFamily="34" charset="-122"/>
@@ -3536,7 +3500,7 @@
               </a:rPr>
               <a:t>callback</a:t>
             </a:r>
-            <a:endParaRPr lang="en-US" sz="1020" dirty="0"/>
+            <a:endParaRPr lang="en-US" sz="1200" dirty="0"/>
           </a:p>
         </p:txBody>
       </p:sp>
@@ -3547,38 +3511,34 @@
           <p:nvPr/>
         </p:nvSpPr>
         <p:spPr>
-          <a:xfrm>
-            <a:off x="2011680" y="1810512"/>
-            <a:ext cx="1143000" cy="420624"/>
-          </a:xfrm>
-          <a:prstGeom prst="roundRect">
-            <a:avLst>
-              <a:gd name="adj" fmla="val 5435"/>
-            </a:avLst>
-          </a:prstGeom>
-          <a:solidFill>
-            <a:srgbClr val="FFFFFF"/>
-          </a:solidFill>
-          <a:ln w="12700">
-            <a:solidFill>
-              <a:srgbClr val="FFFFFF">
-                <a:alpha val="0"/>
-              </a:srgbClr>
-            </a:solidFill>
-            <a:prstDash val="solid"/>
+          <a:xfrm flipV="1">
+            <a:off x="2258568" y="1801368"/>
+            <a:ext cx="0" cy="1399032"/>
+          </a:xfrm>
+          <a:prstGeom prst="line">
+            <a:avLst/>
+          </a:prstGeom>
+          <a:noFill/>
+          <a:ln w="17780">
+            <a:solidFill>
+              <a:srgbClr val="E56E2E"/>
+            </a:solidFill>
+            <a:prstDash val="solid"/>
+            <a:headEnd type="none"/>
+            <a:tailEnd type="triangle"/>
           </a:ln>
         </p:spPr>
       </p:sp>
       <p:sp>
         <p:nvSpPr>
           <p:cNvPr id="88" name="Text 82"/>
-          <p:cNvSpPr/>
-          <p:nvPr/>
-        </p:nvSpPr>
-        <p:spPr>
-          <a:xfrm>
-            <a:off x="2011680" y="1810512"/>
-            <a:ext cx="1143000" cy="201168"/>
+          <p:cNvSpPr txBox="1"/>
+          <p:nvPr/>
+        </p:nvSpPr>
+        <p:spPr>
+          <a:xfrm>
+            <a:off x="2350008" y="2212848"/>
+            <a:ext cx="1325880" cy="182880"/>
           </a:xfrm>
           <a:prstGeom prst="rect">
             <a:avLst/>
@@ -3587,16 +3547,14 @@
           <a:ln/>
         </p:spPr>
         <p:txBody>
-          <a:bodyPr wrap="square" lIns="0" tIns="0" rIns="0" bIns="0" rtlCol="0" anchor="ctr">
-            <a:normAutofit/>
-          </a:bodyPr>
+          <a:bodyPr wrap="none" lIns="0" tIns="0" rIns="0" bIns="0" rtlCol="0" anchor="ctr"/>
           <a:lstStyle/>
           <a:p>
-            <a:pPr algn="ctr" indent="0" marL="0">
+            <a:pPr algn="l" indent="0" marL="0">
               <a:buNone/>
             </a:pPr>
             <a:r>
-              <a:rPr lang="en-US" sz="1020" dirty="0">
+              <a:rPr lang="en-US" sz="1200" dirty="0">
                 <a:solidFill>
                   <a:srgbClr val="E56E2E"/>
                 </a:solidFill>
@@ -3604,22 +3562,22 @@
                 <a:ea typeface="Arial" pitchFamily="34" charset="-122"/>
                 <a:cs typeface="Arial" pitchFamily="34" charset="-120"/>
               </a:rPr>
-              <a:t>postpone delivery</a:t>
-            </a:r>
-            <a:endParaRPr lang="en-US" sz="1020" dirty="0"/>
+              <a:t>delayed release</a:t>
+            </a:r>
+            <a:endParaRPr lang="en-US" sz="1200" dirty="0"/>
           </a:p>
         </p:txBody>
       </p:sp>
       <p:sp>
         <p:nvSpPr>
           <p:cNvPr id="89" name="Text 83"/>
-          <p:cNvSpPr/>
-          <p:nvPr/>
-        </p:nvSpPr>
-        <p:spPr>
-          <a:xfrm>
-            <a:off x="2011680" y="2029968"/>
-            <a:ext cx="1143000" cy="201168"/>
+          <p:cNvSpPr txBox="1"/>
+          <p:nvPr/>
+        </p:nvSpPr>
+        <p:spPr>
+          <a:xfrm>
+            <a:off x="2350008" y="2414016"/>
+            <a:ext cx="1325880" cy="182880"/>
           </a:xfrm>
           <a:prstGeom prst="rect">
             <a:avLst/>
@@ -3628,16 +3586,14 @@
           <a:ln/>
         </p:spPr>
         <p:txBody>
-          <a:bodyPr wrap="square" lIns="0" tIns="0" rIns="0" bIns="0" rtlCol="0" anchor="ctr">
-            <a:normAutofit/>
-          </a:bodyPr>
+          <a:bodyPr wrap="none" lIns="0" tIns="0" rIns="0" bIns="0" rtlCol="0" anchor="ctr"/>
           <a:lstStyle/>
           <a:p>
-            <a:pPr algn="ctr" indent="0" marL="0">
+            <a:pPr algn="l" indent="0" marL="0">
               <a:buNone/>
             </a:pPr>
             <a:r>
-              <a:rPr lang="en-US" sz="1020" dirty="0">
+              <a:rPr lang="en-US" sz="1200" dirty="0">
                 <a:solidFill>
                   <a:srgbClr val="E56E2E"/>
                 </a:solidFill>
@@ -3645,9 +3601,9 @@
                 <a:ea typeface="Arial" pitchFamily="34" charset="-122"/>
                 <a:cs typeface="Arial" pitchFamily="34" charset="-120"/>
               </a:rPr>
-              <a:t>to application</a:t>
-            </a:r>
-            <a:endParaRPr lang="en-US" sz="1020" dirty="0"/>
+              <a:t>sets next capture</a:t>
+            </a:r>
+            <a:endParaRPr lang="en-US" sz="1200" dirty="0"/>
           </a:p>
         </p:txBody>
       </p:sp>
@@ -3659,37 +3615,33 @@
         </p:nvSpPr>
         <p:spPr>
           <a:xfrm>
-            <a:off x="6583680" y="2075688"/>
-            <a:ext cx="2011680" cy="265176"/>
-          </a:xfrm>
-          <a:prstGeom prst="roundRect">
-            <a:avLst>
-              <a:gd name="adj" fmla="val 8621"/>
-            </a:avLst>
-          </a:prstGeom>
-          <a:solidFill>
-            <a:srgbClr val="FFFFFF"/>
-          </a:solidFill>
-          <a:ln w="12700">
-            <a:solidFill>
-              <a:srgbClr val="FFFFFF">
-                <a:alpha val="0"/>
-              </a:srgbClr>
-            </a:solidFill>
-            <a:prstDash val="solid"/>
+            <a:off x="3840480" y="1645920"/>
+            <a:ext cx="0" cy="2322576"/>
+          </a:xfrm>
+          <a:prstGeom prst="line">
+            <a:avLst/>
+          </a:prstGeom>
+          <a:noFill/>
+          <a:ln w="17780">
+            <a:solidFill>
+              <a:srgbClr val="526477"/>
+            </a:solidFill>
+            <a:prstDash val="solid"/>
+            <a:headEnd type="none"/>
+            <a:tailEnd type="triangle"/>
           </a:ln>
         </p:spPr>
       </p:sp>
       <p:sp>
         <p:nvSpPr>
           <p:cNvPr id="91" name="Text 85"/>
-          <p:cNvSpPr/>
-          <p:nvPr/>
-        </p:nvSpPr>
-        <p:spPr>
-          <a:xfrm>
-            <a:off x="6583680" y="2075688"/>
-            <a:ext cx="2011680" cy="265176"/>
+          <p:cNvSpPr txBox="1"/>
+          <p:nvPr/>
+        </p:nvSpPr>
+        <p:spPr>
+          <a:xfrm>
+            <a:off x="3931920" y="2212848"/>
+            <a:ext cx="1737360" cy="182880"/>
           </a:xfrm>
           <a:prstGeom prst="rect">
             <a:avLst/>
@@ -3698,16 +3650,167 @@
           <a:ln/>
         </p:spPr>
         <p:txBody>
-          <a:bodyPr wrap="square" lIns="0" tIns="0" rIns="0" bIns="0" rtlCol="0" anchor="ctr">
-            <a:normAutofit/>
-          </a:bodyPr>
+          <a:bodyPr wrap="none" lIns="0" tIns="0" rIns="0" bIns="0" rtlCol="0" anchor="ctr"/>
           <a:lstStyle/>
           <a:p>
-            <a:pPr algn="ctr" indent="0" marL="0">
+            <a:pPr algn="l" indent="0" marL="0">
               <a:buNone/>
             </a:pPr>
             <a:r>
-              <a:rPr lang="en-US" sz="1100" dirty="0">
+              <a:rPr lang="en-US" sz="1200" dirty="0">
+                <a:solidFill>
+                  <a:srgbClr val="526477"/>
+                </a:solidFill>
+                <a:latin typeface="Arial" pitchFamily="34" charset="0"/>
+                <a:ea typeface="Arial" pitchFamily="34" charset="-122"/>
+                <a:cs typeface="Arial" pitchFamily="34" charset="-120"/>
+              </a:rPr>
+              <a:t>queued work observed</a:t>
+            </a:r>
+            <a:endParaRPr lang="en-US" sz="1200" dirty="0"/>
+          </a:p>
+        </p:txBody>
+      </p:sp>
+      <p:sp>
+        <p:nvSpPr>
+          <p:cNvPr id="92" name="Text 86"/>
+          <p:cNvSpPr txBox="1"/>
+          <p:nvPr/>
+        </p:nvSpPr>
+        <p:spPr>
+          <a:xfrm>
+            <a:off x="3931920" y="2414016"/>
+            <a:ext cx="1737360" cy="182880"/>
+          </a:xfrm>
+          <a:prstGeom prst="rect">
+            <a:avLst/>
+          </a:prstGeom>
+          <a:noFill/>
+          <a:ln/>
+        </p:spPr>
+        <p:txBody>
+          <a:bodyPr wrap="none" lIns="0" tIns="0" rIns="0" bIns="0" rtlCol="0" anchor="ctr"/>
+          <a:lstStyle/>
+          <a:p>
+            <a:pPr algn="l" indent="0" marL="0">
+              <a:buNone/>
+            </a:pPr>
+            <a:r>
+              <a:rPr lang="en-US" sz="1200" dirty="0">
+                <a:solidFill>
+                  <a:srgbClr val="526477"/>
+                </a:solidFill>
+                <a:latin typeface="Arial" pitchFamily="34" charset="0"/>
+                <a:ea typeface="Arial" pitchFamily="34" charset="-122"/>
+                <a:cs typeface="Arial" pitchFamily="34" charset="-120"/>
+              </a:rPr>
+              <a:t>at dispatch</a:t>
+            </a:r>
+            <a:endParaRPr lang="en-US" sz="1200" dirty="0"/>
+          </a:p>
+        </p:txBody>
+      </p:sp>
+      <p:sp>
+        <p:nvSpPr>
+          <p:cNvPr id="93" name="Shape 87"/>
+          <p:cNvSpPr/>
+          <p:nvPr/>
+        </p:nvSpPr>
+        <p:spPr>
+          <a:xfrm flipV="1">
+            <a:off x="8595360" y="2688336"/>
+            <a:ext cx="0" cy="512064"/>
+          </a:xfrm>
+          <a:prstGeom prst="line">
+            <a:avLst/>
+          </a:prstGeom>
+          <a:noFill/>
+          <a:ln w="17780">
+            <a:solidFill>
+              <a:srgbClr val="2476D2"/>
+            </a:solidFill>
+            <a:prstDash val="solid"/>
+            <a:headEnd type="none"/>
+            <a:tailEnd type="none"/>
+          </a:ln>
+        </p:spPr>
+      </p:sp>
+      <p:sp>
+        <p:nvSpPr>
+          <p:cNvPr id="94" name="Shape 88"/>
+          <p:cNvSpPr/>
+          <p:nvPr/>
+        </p:nvSpPr>
+        <p:spPr>
+          <a:xfrm flipH="1">
+            <a:off x="7123176" y="2688336"/>
+            <a:ext cx="1472184" cy="0"/>
+          </a:xfrm>
+          <a:prstGeom prst="line">
+            <a:avLst/>
+          </a:prstGeom>
+          <a:noFill/>
+          <a:ln w="17780">
+            <a:solidFill>
+              <a:srgbClr val="2476D2"/>
+            </a:solidFill>
+            <a:prstDash val="solid"/>
+            <a:headEnd type="none"/>
+            <a:tailEnd type="none"/>
+          </a:ln>
+        </p:spPr>
+      </p:sp>
+      <p:sp>
+        <p:nvSpPr>
+          <p:cNvPr id="95" name="Shape 89"/>
+          <p:cNvSpPr/>
+          <p:nvPr/>
+        </p:nvSpPr>
+        <p:spPr>
+          <a:xfrm flipV="1">
+            <a:off x="7123176" y="1773936"/>
+            <a:ext cx="0" cy="914400"/>
+          </a:xfrm>
+          <a:prstGeom prst="line">
+            <a:avLst/>
+          </a:prstGeom>
+          <a:noFill/>
+          <a:ln w="17780">
+            <a:solidFill>
+              <a:srgbClr val="2476D2"/>
+            </a:solidFill>
+            <a:prstDash val="solid"/>
+            <a:headEnd type="none"/>
+            <a:tailEnd type="triangle"/>
+          </a:ln>
+        </p:spPr>
+      </p:sp>
+      <p:sp>
+        <p:nvSpPr>
+          <p:cNvPr id="96" name="Text 90"/>
+          <p:cNvSpPr txBox="1"/>
+          <p:nvPr/>
+        </p:nvSpPr>
+        <p:spPr>
+          <a:xfrm>
+            <a:off x="7232904" y="2212848"/>
+            <a:ext cx="1280160" cy="182880"/>
+          </a:xfrm>
+          <a:prstGeom prst="rect">
+            <a:avLst/>
+          </a:prstGeom>
+          <a:noFill/>
+          <a:ln/>
+        </p:spPr>
+        <p:txBody>
+          <a:bodyPr wrap="none" lIns="0" tIns="0" rIns="0" bIns="0" rtlCol="0" anchor="ctr"/>
+          <a:lstStyle/>
+          <a:p>
+            <a:pPr algn="l" indent="0" marL="0">
+              <a:buNone/>
+            </a:pPr>
+            <a:r>
+              <a:rPr lang="en-US" sz="1200" dirty="0">
                 <a:solidFill>
                   <a:srgbClr val="2476D2"/>
                 </a:solidFill>
@@ -3715,51 +3818,22 @@
                 <a:ea typeface="Arial" pitchFamily="34" charset="-122"/>
                 <a:cs typeface="Arial" pitchFamily="34" charset="-120"/>
               </a:rPr>
-              <a:t>admit / skip optional stages</a:t>
-            </a:r>
-            <a:endParaRPr lang="en-US" sz="1100" dirty="0"/>
+              <a:t>admit or skip</a:t>
+            </a:r>
+            <a:endParaRPr lang="en-US" sz="1200" dirty="0"/>
           </a:p>
         </p:txBody>
       </p:sp>
       <p:sp>
         <p:nvSpPr>
-          <p:cNvPr id="92" name="Shape 86"/>
-          <p:cNvSpPr/>
-          <p:nvPr/>
-        </p:nvSpPr>
-        <p:spPr>
-          <a:xfrm>
-            <a:off x="8887968" y="1993392"/>
-            <a:ext cx="1536192" cy="420624"/>
-          </a:xfrm>
-          <a:prstGeom prst="roundRect">
-            <a:avLst>
-              <a:gd name="adj" fmla="val 5435"/>
-            </a:avLst>
-          </a:prstGeom>
-          <a:solidFill>
-            <a:srgbClr val="FFFFFF"/>
-          </a:solidFill>
-          <a:ln w="12700">
-            <a:solidFill>
-              <a:srgbClr val="FFFFFF">
-                <a:alpha val="0"/>
-              </a:srgbClr>
-            </a:solidFill>
-            <a:prstDash val="solid"/>
-          </a:ln>
-        </p:spPr>
-      </p:sp>
-      <p:sp>
-        <p:nvSpPr>
-          <p:cNvPr id="93" name="Text 87"/>
-          <p:cNvSpPr/>
-          <p:nvPr/>
-        </p:nvSpPr>
-        <p:spPr>
-          <a:xfrm>
-            <a:off x="8887968" y="1993392"/>
-            <a:ext cx="1536192" cy="201168"/>
+          <p:cNvPr id="97" name="Text 91"/>
+          <p:cNvSpPr txBox="1"/>
+          <p:nvPr/>
+        </p:nvSpPr>
+        <p:spPr>
+          <a:xfrm>
+            <a:off x="7232904" y="2414016"/>
+            <a:ext cx="1280160" cy="182880"/>
           </a:xfrm>
           <a:prstGeom prst="rect">
             <a:avLst/>
@@ -3768,16 +3842,128 @@
           <a:ln/>
         </p:spPr>
         <p:txBody>
-          <a:bodyPr wrap="square" lIns="0" tIns="0" rIns="0" bIns="0" rtlCol="0" anchor="ctr">
-            <a:normAutofit/>
-          </a:bodyPr>
+          <a:bodyPr wrap="none" lIns="0" tIns="0" rIns="0" bIns="0" rtlCol="0" anchor="ctr"/>
           <a:lstStyle/>
           <a:p>
-            <a:pPr algn="ctr" indent="0" marL="0">
+            <a:pPr algn="l" indent="0" marL="0">
               <a:buNone/>
             </a:pPr>
             <a:r>
-              <a:rPr lang="en-US" sz="1050" dirty="0">
+              <a:rPr lang="en-US" sz="1200" dirty="0">
+                <a:solidFill>
+                  <a:srgbClr val="2476D2"/>
+                </a:solidFill>
+                <a:latin typeface="Arial" pitchFamily="34" charset="0"/>
+                <a:ea typeface="Arial" pitchFamily="34" charset="-122"/>
+                <a:cs typeface="Arial" pitchFamily="34" charset="-120"/>
+              </a:rPr>
+              <a:t>optional stages</a:t>
+            </a:r>
+            <a:endParaRPr lang="en-US" sz="1200" dirty="0"/>
+          </a:p>
+        </p:txBody>
+      </p:sp>
+      <p:sp>
+        <p:nvSpPr>
+          <p:cNvPr id="98" name="Shape 92"/>
+          <p:cNvSpPr/>
+          <p:nvPr/>
+        </p:nvSpPr>
+        <p:spPr>
+          <a:xfrm>
+            <a:off x="10405872" y="1280160"/>
+            <a:ext cx="128016" cy="0"/>
+          </a:xfrm>
+          <a:prstGeom prst="line">
+            <a:avLst/>
+          </a:prstGeom>
+          <a:noFill/>
+          <a:ln w="17780">
+            <a:solidFill>
+              <a:srgbClr val="526477"/>
+            </a:solidFill>
+            <a:prstDash val="solid"/>
+            <a:headEnd type="none"/>
+            <a:tailEnd type="none"/>
+          </a:ln>
+        </p:spPr>
+      </p:sp>
+      <p:sp>
+        <p:nvSpPr>
+          <p:cNvPr id="99" name="Shape 93"/>
+          <p:cNvSpPr/>
+          <p:nvPr/>
+        </p:nvSpPr>
+        <p:spPr>
+          <a:xfrm>
+            <a:off x="10533888" y="1280160"/>
+            <a:ext cx="0" cy="2916936"/>
+          </a:xfrm>
+          <a:prstGeom prst="line">
+            <a:avLst/>
+          </a:prstGeom>
+          <a:noFill/>
+          <a:ln w="17780">
+            <a:solidFill>
+              <a:srgbClr val="526477"/>
+            </a:solidFill>
+            <a:prstDash val="solid"/>
+            <a:headEnd type="none"/>
+            <a:tailEnd type="none"/>
+          </a:ln>
+        </p:spPr>
+      </p:sp>
+      <p:sp>
+        <p:nvSpPr>
+          <p:cNvPr id="100" name="Shape 94"/>
+          <p:cNvSpPr/>
+          <p:nvPr/>
+        </p:nvSpPr>
+        <p:spPr>
+          <a:xfrm flipH="1">
+            <a:off x="8046720" y="4197096"/>
+            <a:ext cx="2487168" cy="0"/>
+          </a:xfrm>
+          <a:prstGeom prst="line">
+            <a:avLst/>
+          </a:prstGeom>
+          <a:noFill/>
+          <a:ln w="17780">
+            <a:solidFill>
+              <a:srgbClr val="526477"/>
+            </a:solidFill>
+            <a:prstDash val="solid"/>
+            <a:headEnd type="none"/>
+            <a:tailEnd type="triangle"/>
+          </a:ln>
+        </p:spPr>
+      </p:sp>
+      <p:sp>
+        <p:nvSpPr>
+          <p:cNvPr id="101" name="Text 95"/>
+          <p:cNvSpPr txBox="1"/>
+          <p:nvPr/>
+        </p:nvSpPr>
+        <p:spPr>
+          <a:xfrm>
+            <a:off x="9052560" y="2212848"/>
+            <a:ext cx="1389888" cy="182880"/>
+          </a:xfrm>
+          <a:prstGeom prst="rect">
+            <a:avLst/>
+          </a:prstGeom>
+          <a:noFill/>
+          <a:ln/>
+        </p:spPr>
+        <p:txBody>
+          <a:bodyPr wrap="none" lIns="0" tIns="0" rIns="0" bIns="0" rtlCol="0" anchor="ctr"/>
+          <a:lstStyle/>
+          <a:p>
+            <a:pPr algn="r" indent="0" marL="0">
+              <a:buNone/>
+            </a:pPr>
+            <a:r>
+              <a:rPr lang="en-US" sz="1200" dirty="0">
                 <a:solidFill>
                   <a:srgbClr val="526477"/>
                 </a:solidFill>
@@ -3785,22 +3971,22 @@
                 <a:ea typeface="Arial" pitchFamily="34" charset="-122"/>
                 <a:cs typeface="Arial" pitchFamily="34" charset="-120"/>
               </a:rPr>
-              <a:t>update with measured</a:t>
-            </a:r>
-            <a:endParaRPr lang="en-US" sz="1050" dirty="0"/>
+              <a:t>measured Draft</a:t>
+            </a:r>
+            <a:endParaRPr lang="en-US" sz="1200" dirty="0"/>
           </a:p>
         </p:txBody>
       </p:sp>
       <p:sp>
         <p:nvSpPr>
-          <p:cNvPr id="94" name="Text 88"/>
-          <p:cNvSpPr/>
-          <p:nvPr/>
-        </p:nvSpPr>
-        <p:spPr>
-          <a:xfrm>
-            <a:off x="8887968" y="2212848"/>
-            <a:ext cx="1536192" cy="201168"/>
+          <p:cNvPr id="102" name="Text 96"/>
+          <p:cNvSpPr txBox="1"/>
+          <p:nvPr/>
+        </p:nvSpPr>
+        <p:spPr>
+          <a:xfrm>
+            <a:off x="9052560" y="2414016"/>
+            <a:ext cx="1389888" cy="182880"/>
           </a:xfrm>
           <a:prstGeom prst="rect">
             <a:avLst/>
@@ -3809,16 +3995,14 @@
           <a:ln/>
         </p:spPr>
         <p:txBody>
-          <a:bodyPr wrap="square" lIns="0" tIns="0" rIns="0" bIns="0" rtlCol="0" anchor="ctr">
-            <a:normAutofit/>
-          </a:bodyPr>
+          <a:bodyPr wrap="none" lIns="0" tIns="0" rIns="0" bIns="0" rtlCol="0" anchor="ctr"/>
           <a:lstStyle/>
           <a:p>
-            <a:pPr algn="ctr" indent="0" marL="0">
+            <a:pPr algn="r" indent="0" marL="0">
               <a:buNone/>
             </a:pPr>
             <a:r>
-              <a:rPr lang="en-US" sz="1050" dirty="0">
+              <a:rPr lang="en-US" sz="1200" dirty="0">
                 <a:solidFill>
                   <a:srgbClr val="526477"/>
                 </a:solidFill>
@@ -3826,9 +4010,9 @@
                 <a:ea typeface="Arial" pitchFamily="34" charset="-122"/>
                 <a:cs typeface="Arial" pitchFamily="34" charset="-120"/>
               </a:rPr>
-              <a:t>Draft Sequence duration</a:t>
-            </a:r>
-            <a:endParaRPr lang="en-US" sz="1050" dirty="0"/>
+              <a:t>Sequence duration</a:t>
+            </a:r>
+            <a:endParaRPr lang="en-US" sz="1200" dirty="0"/>
           </a:p>
         </p:txBody>
       </p:sp>

--- a/figures/fig_controller_interaction.pptx
+++ b/figures/fig_controller_interaction.pptx
@@ -4,14 +4,14 @@
   <p:sldMasterIdLst>
     <p:sldMasterId id="2147483648" r:id="rId1"/>
   </p:sldMasterIdLst>
+  <p:notesMasterIdLst>
+    <p:notesMasterId r:id="rId3"/>
+  </p:notesMasterIdLst>
   <p:sldIdLst>
     <p:sldId id="256" r:id="rId2"/>
   </p:sldIdLst>
-  <p:notesMasterIdLst>
-    <p:notesMasterId r:id="rId3"/>
-  </p:notesMasterIdLst>
-  <p:sldSz cx="10972800" cy="4718304"/>
-  <p:notesSz cx="4718304" cy="10972800"/>
+  <p:sldSz cx="10972800" cy="4718050"/>
+  <p:notesSz cx="4718050" cy="10972800"/>
   <p:defaultTextStyle>
     <a:lvl1pPr marL="0" algn="l" defTabSz="914400" rtl="0" eaLnBrk="1" latinLnBrk="0" hangingPunct="1">
       <a:defRPr sz="1800" kern="1200">
@@ -104,6 +104,11 @@
       </a:defRPr>
     </a:lvl9pPr>
   </p:defaultTextStyle>
+  <p:extLst>
+    <p:ext uri="{EFAFB233-063F-42B5-8137-9DF3F51BA10A}">
+      <p15:sldGuideLst xmlns:p15="http://schemas.microsoft.com/office/powerpoint/2012/main"/>
+    </p:ext>
+  </p:extLst>
 </p:presentation>
 </file>
 
@@ -129,240 +134,16 @@
           <a:chExt cx="0" cy="0"/>
         </a:xfrm>
       </p:grpSpPr>
-      <p:sp>
-        <p:nvSpPr>
-          <p:cNvPr id="2" name="Header Placeholder 1"/>
-          <p:cNvSpPr>
-            <a:spLocks noGrp="1"/>
-          </p:cNvSpPr>
-          <p:nvPr>
-            <p:ph type="hdr" sz="quarter"/>
-          </p:nvPr>
-        </p:nvSpPr>
-        <p:spPr>
-          <a:xfrm>
-            <a:off x="0" y="0"/>
-            <a:ext cx="2971800" cy="458788"/>
-          </a:xfrm>
-          <a:prstGeom prst="rect">
-            <a:avLst/>
-          </a:prstGeom>
-        </p:spPr>
-        <p:txBody>
-          <a:bodyPr vert="horz" lIns="91440" tIns="45720" rIns="91440" bIns="45720" rtlCol="0"/>
-          <a:lstStyle>
-            <a:lvl1pPr algn="l">
-              <a:defRPr sz="1200"/>
-            </a:lvl1pPr>
-          </a:lstStyle>
-          <a:p>
-            <a:endParaRPr lang="en-US"/>
-          </a:p>
-        </p:txBody>
-      </p:sp>
-      <p:sp>
-        <p:nvSpPr>
-          <p:cNvPr id="3" name="Date Placeholder 2"/>
-          <p:cNvSpPr>
-            <a:spLocks noGrp="1"/>
-          </p:cNvSpPr>
-          <p:nvPr>
-            <p:ph type="dt" idx="1"/>
-          </p:nvPr>
-        </p:nvSpPr>
-        <p:spPr>
-          <a:xfrm>
-            <a:off x="3884613" y="0"/>
-            <a:ext cx="2971800" cy="458788"/>
-          </a:xfrm>
-          <a:prstGeom prst="rect">
-            <a:avLst/>
-          </a:prstGeom>
-        </p:spPr>
-        <p:txBody>
-          <a:bodyPr vert="horz" lIns="91440" tIns="45720" rIns="91440" bIns="45720" rtlCol="0"/>
-          <a:lstStyle>
-            <a:lvl1pPr algn="r">
-              <a:defRPr sz="1200"/>
-            </a:lvl1pPr>
-          </a:lstStyle>
-          <a:p>
-            <a:fld id="{5282F153-3F37-0F45-9E97-73ACFA13230C}" type="datetimeFigureOut">
-              <a:rPr lang="en-US"/>
-              <a:t>7/23/19</a:t>
-            </a:fld>
-            <a:endParaRPr lang="en-US"/>
-          </a:p>
-        </p:txBody>
-      </p:sp>
-      <p:sp>
-        <p:nvSpPr>
-          <p:cNvPr id="4" name="Slide Image Placeholder 3"/>
-          <p:cNvSpPr>
-            <a:spLocks noGrp="1" noRot="1" noChangeAspect="1"/>
-          </p:cNvSpPr>
-          <p:nvPr>
-            <p:ph type="sldImg" idx="2"/>
-          </p:nvPr>
-        </p:nvSpPr>
-        <p:spPr>
-          <a:xfrm>
-            <a:off x="685800" y="1143000"/>
-            <a:ext cx="5486400" cy="3086100"/>
-          </a:xfrm>
-          <a:prstGeom prst="rect">
-            <a:avLst/>
-          </a:prstGeom>
-          <a:noFill/>
-          <a:ln w="12700">
-            <a:solidFill>
-              <a:prstClr val="black"/>
-            </a:solidFill>
-          </a:ln>
-        </p:spPr>
-        <p:txBody>
-          <a:bodyPr vert="horz" lIns="91440" tIns="45720" rIns="91440" bIns="45720" rtlCol="0" anchor="ctr"/>
-          <a:lstStyle/>
-          <a:p>
-            <a:endParaRPr lang="en-US"/>
-          </a:p>
-        </p:txBody>
-      </p:sp>
-      <p:sp>
-        <p:nvSpPr>
-          <p:cNvPr id="5" name="Notes Placeholder 4"/>
-          <p:cNvSpPr>
-            <a:spLocks noGrp="1"/>
-          </p:cNvSpPr>
-          <p:nvPr>
-            <p:ph type="body" sz="quarter" idx="3"/>
-          </p:nvPr>
-        </p:nvSpPr>
-        <p:spPr>
-          <a:xfrm>
-            <a:off x="685800" y="4400550"/>
-            <a:ext cx="5486400" cy="3600450"/>
-          </a:xfrm>
-          <a:prstGeom prst="rect">
-            <a:avLst/>
-          </a:prstGeom>
-        </p:spPr>
-        <p:txBody>
-          <a:bodyPr vert="horz" lIns="91440" tIns="45720" rIns="91440" bIns="45720" rtlCol="0"/>
-          <a:lstStyle/>
-          <a:p>
-            <a:pPr lvl="0"/>
-            <a:r>
-              <a:rPr lang="en-US"/>
-              <a:t>Click to edit Master text styles</a:t>
-            </a:r>
-          </a:p>
-          <a:p>
-            <a:pPr lvl="1"/>
-            <a:r>
-              <a:rPr lang="en-US"/>
-              <a:t>Second level</a:t>
-            </a:r>
-          </a:p>
-          <a:p>
-            <a:pPr lvl="2"/>
-            <a:r>
-              <a:rPr lang="en-US"/>
-              <a:t>Third level</a:t>
-            </a:r>
-          </a:p>
-          <a:p>
-            <a:pPr lvl="3"/>
-            <a:r>
-              <a:rPr lang="en-US"/>
-              <a:t>Fourth level</a:t>
-            </a:r>
-          </a:p>
-          <a:p>
-            <a:pPr lvl="4"/>
-            <a:r>
-              <a:rPr lang="en-US"/>
-              <a:t>Fifth level</a:t>
-            </a:r>
-          </a:p>
-        </p:txBody>
-      </p:sp>
-      <p:sp>
-        <p:nvSpPr>
-          <p:cNvPr id="6" name="Footer Placeholder 5"/>
-          <p:cNvSpPr>
-            <a:spLocks noGrp="1"/>
-          </p:cNvSpPr>
-          <p:nvPr>
-            <p:ph type="ftr" sz="quarter" idx="4"/>
-          </p:nvPr>
-        </p:nvSpPr>
-        <p:spPr>
-          <a:xfrm>
-            <a:off x="0" y="8685213"/>
-            <a:ext cx="2971800" cy="458787"/>
-          </a:xfrm>
-          <a:prstGeom prst="rect">
-            <a:avLst/>
-          </a:prstGeom>
-        </p:spPr>
-        <p:txBody>
-          <a:bodyPr vert="horz" lIns="91440" tIns="45720" rIns="91440" bIns="45720" rtlCol="0" anchor="b"/>
-          <a:lstStyle>
-            <a:lvl1pPr algn="l">
-              <a:defRPr sz="1200"/>
-            </a:lvl1pPr>
-          </a:lstStyle>
-          <a:p>
-            <a:endParaRPr lang="en-US"/>
-          </a:p>
-        </p:txBody>
-      </p:sp>
-      <p:sp>
-        <p:nvSpPr>
-          <p:cNvPr id="7" name="Slide Number Placeholder 6"/>
-          <p:cNvSpPr>
-            <a:spLocks noGrp="1"/>
-          </p:cNvSpPr>
-          <p:nvPr>
-            <p:ph type="sldNum" sz="quarter" idx="5"/>
-          </p:nvPr>
-        </p:nvSpPr>
-        <p:spPr>
-          <a:xfrm>
-            <a:off x="3884613" y="8685213"/>
-            <a:ext cx="2971800" cy="458787"/>
-          </a:xfrm>
-          <a:prstGeom prst="rect">
-            <a:avLst/>
-          </a:prstGeom>
-        </p:spPr>
-        <p:txBody>
-          <a:bodyPr vert="horz" lIns="91440" tIns="45720" rIns="91440" bIns="45720" rtlCol="0" anchor="b"/>
-          <a:lstStyle>
-            <a:lvl1pPr algn="r">
-              <a:defRPr sz="1200"/>
-            </a:lvl1pPr>
-          </a:lstStyle>
-          <a:p>
-            <a:fld id="{CE5E9CC1-C706-0F49-92D6-E571CC5EEA8F}" type="slidenum">
-              <a:rPr lang="en-US"/>
-              <a:t>‹#›</a:t>
-            </a:fld>
-            <a:endParaRPr lang="en-US"/>
-          </a:p>
-        </p:txBody>
-      </p:sp>
     </p:spTree>
     <p:extLst>
       <p:ext uri="{BB962C8B-B14F-4D97-AF65-F5344CB8AC3E}">
-        <p14:creationId xmlns:p14="http://schemas.microsoft.com/office/powerpoint/2010/main" val="1024086991"/>
+        <p14:creationId xmlns:p14="http://schemas.microsoft.com/office/powerpoint/2010/main" val="3048250369"/>
       </p:ext>
     </p:extLst>
   </p:cSld>
   <p:clrMap bg1="lt1" tx1="dk1" bg2="lt2" tx2="dk2" accent1="accent1" accent2="accent2" accent3="accent3" accent4="accent4" accent5="accent5" accent6="accent6" hlink="hlink" folHlink="folHlink"/>
   <p:notesStyle>
-    <a:lvl1pPr marL="0" algn="l" defTabSz="914400" rtl="0" eaLnBrk="1" latinLnBrk="0" hangingPunct="1">
+    <a:lvl1pPr marL="0" algn="l" defTabSz="914400" rtl="0" eaLnBrk="1" latinLnBrk="1" hangingPunct="1">
       <a:defRPr sz="1200" kern="1200">
         <a:solidFill>
           <a:schemeClr val="tx1"/>
@@ -372,7 +153,7 @@
         <a:cs typeface="+mn-cs"/>
       </a:defRPr>
     </a:lvl1pPr>
-    <a:lvl2pPr marL="457200" algn="l" defTabSz="914400" rtl="0" eaLnBrk="1" latinLnBrk="0" hangingPunct="1">
+    <a:lvl2pPr marL="457200" algn="l" defTabSz="914400" rtl="0" eaLnBrk="1" latinLnBrk="1" hangingPunct="1">
       <a:defRPr sz="1200" kern="1200">
         <a:solidFill>
           <a:schemeClr val="tx1"/>
@@ -382,7 +163,7 @@
         <a:cs typeface="+mn-cs"/>
       </a:defRPr>
     </a:lvl2pPr>
-    <a:lvl3pPr marL="914400" algn="l" defTabSz="914400" rtl="0" eaLnBrk="1" latinLnBrk="0" hangingPunct="1">
+    <a:lvl3pPr marL="914400" algn="l" defTabSz="914400" rtl="0" eaLnBrk="1" latinLnBrk="1" hangingPunct="1">
       <a:defRPr sz="1200" kern="1200">
         <a:solidFill>
           <a:schemeClr val="tx1"/>
@@ -392,7 +173,7 @@
         <a:cs typeface="+mn-cs"/>
       </a:defRPr>
     </a:lvl3pPr>
-    <a:lvl4pPr marL="1371600" algn="l" defTabSz="914400" rtl="0" eaLnBrk="1" latinLnBrk="0" hangingPunct="1">
+    <a:lvl4pPr marL="1371600" algn="l" defTabSz="914400" rtl="0" eaLnBrk="1" latinLnBrk="1" hangingPunct="1">
       <a:defRPr sz="1200" kern="1200">
         <a:solidFill>
           <a:schemeClr val="tx1"/>
@@ -402,7 +183,7 @@
         <a:cs typeface="+mn-cs"/>
       </a:defRPr>
     </a:lvl4pPr>
-    <a:lvl5pPr marL="1828800" algn="l" defTabSz="914400" rtl="0" eaLnBrk="1" latinLnBrk="0" hangingPunct="1">
+    <a:lvl5pPr marL="1828800" algn="l" defTabSz="914400" rtl="0" eaLnBrk="1" latinLnBrk="1" hangingPunct="1">
       <a:defRPr sz="1200" kern="1200">
         <a:solidFill>
           <a:schemeClr val="tx1"/>
@@ -412,7 +193,7 @@
         <a:cs typeface="+mn-cs"/>
       </a:defRPr>
     </a:lvl5pPr>
-    <a:lvl6pPr marL="2286000" algn="l" defTabSz="914400" rtl="0" eaLnBrk="1" latinLnBrk="0" hangingPunct="1">
+    <a:lvl6pPr marL="2286000" algn="l" defTabSz="914400" rtl="0" eaLnBrk="1" latinLnBrk="1" hangingPunct="1">
       <a:defRPr sz="1200" kern="1200">
         <a:solidFill>
           <a:schemeClr val="tx1"/>
@@ -422,7 +203,7 @@
         <a:cs typeface="+mn-cs"/>
       </a:defRPr>
     </a:lvl6pPr>
-    <a:lvl7pPr marL="2743200" algn="l" defTabSz="914400" rtl="0" eaLnBrk="1" latinLnBrk="0" hangingPunct="1">
+    <a:lvl7pPr marL="2743200" algn="l" defTabSz="914400" rtl="0" eaLnBrk="1" latinLnBrk="1" hangingPunct="1">
       <a:defRPr sz="1200" kern="1200">
         <a:solidFill>
           <a:schemeClr val="tx1"/>
@@ -432,7 +213,7 @@
         <a:cs typeface="+mn-cs"/>
       </a:defRPr>
     </a:lvl7pPr>
-    <a:lvl8pPr marL="3200400" algn="l" defTabSz="914400" rtl="0" eaLnBrk="1" latinLnBrk="0" hangingPunct="1">
+    <a:lvl8pPr marL="3200400" algn="l" defTabSz="914400" rtl="0" eaLnBrk="1" latinLnBrk="1" hangingPunct="1">
       <a:defRPr sz="1200" kern="1200">
         <a:solidFill>
           <a:schemeClr val="tx1"/>
@@ -442,7 +223,7 @@
         <a:cs typeface="+mn-cs"/>
       </a:defRPr>
     </a:lvl8pPr>
-    <a:lvl9pPr marL="3657600" algn="l" defTabSz="914400" rtl="0" eaLnBrk="1" latinLnBrk="0" hangingPunct="1">
+    <a:lvl9pPr marL="3657600" algn="l" defTabSz="914400" rtl="0" eaLnBrk="1" latinLnBrk="1" hangingPunct="1">
       <a:defRPr sz="1200" kern="1200">
         <a:solidFill>
           <a:schemeClr val="tx1"/>
@@ -500,10 +281,6 @@
           <a:bodyPr/>
           <a:lstStyle/>
           <a:p>
-            <a:r>
-              <a:rPr lang="en-US" dirty="0"/>
-              <a:t/>
-            </a:r>
             <a:endParaRPr lang="en-US" dirty="0"/>
           </a:p>
         </p:txBody>
@@ -577,6 +354,11 @@
 <file path=ppt/slideMasters/slideMaster1.xml><?xml version="1.0" encoding="utf-8"?>
 <p:sldMaster xmlns:a="http://schemas.openxmlformats.org/drawingml/2006/main" xmlns:r="http://schemas.openxmlformats.org/officeDocument/2006/relationships" xmlns:p="http://schemas.openxmlformats.org/presentationml/2006/main">
   <p:cSld>
+    <p:bg>
+      <p:bgRef idx="1001">
+        <a:schemeClr val="bg1"/>
+      </p:bgRef>
+    </p:bg>
     <p:spTree>
       <p:nvGrpSpPr>
         <p:cNvPr id="1" name=""/>
@@ -859,6 +641,7 @@
         <a:solidFill>
           <a:srgbClr val="FFFFFF"/>
         </a:solidFill>
+        <a:effectLst/>
       </p:bgPr>
     </p:bg>
     <p:spTree>
@@ -901,6 +684,13 @@
             <a:prstDash val="solid"/>
           </a:ln>
         </p:spPr>
+        <p:txBody>
+          <a:bodyPr/>
+          <a:lstStyle/>
+          <a:p>
+            <a:endParaRPr lang="ko-KR" altLang="en-US"/>
+          </a:p>
+        </p:txBody>
       </p:sp>
       <p:sp>
         <p:nvSpPr>
@@ -930,6 +720,13 @@
             <a:prstDash val="solid"/>
           </a:ln>
         </p:spPr>
+        <p:txBody>
+          <a:bodyPr/>
+          <a:lstStyle/>
+          <a:p>
+            <a:endParaRPr lang="ko-KR" altLang="en-US"/>
+          </a:p>
+        </p:txBody>
       </p:sp>
       <p:sp>
         <p:nvSpPr>
@@ -957,6 +754,13 @@
             <a:prstDash val="solid"/>
           </a:ln>
         </p:spPr>
+        <p:txBody>
+          <a:bodyPr/>
+          <a:lstStyle/>
+          <a:p>
+            <a:endParaRPr lang="ko-KR" altLang="en-US"/>
+          </a:p>
+        </p:txBody>
       </p:sp>
       <p:sp>
         <p:nvSpPr>
@@ -982,6 +786,13 @@
             <a:tailEnd type="none"/>
           </a:ln>
         </p:spPr>
+        <p:txBody>
+          <a:bodyPr/>
+          <a:lstStyle/>
+          <a:p>
+            <a:endParaRPr lang="ko-KR" altLang="en-US"/>
+          </a:p>
+        </p:txBody>
       </p:sp>
       <p:sp>
         <p:nvSpPr>
@@ -1004,7 +815,7 @@
           <a:bodyPr wrap="none" lIns="0" tIns="0" rIns="0" bIns="0" rtlCol="0" anchor="ctr"/>
           <a:lstStyle/>
           <a:p>
-            <a:pPr algn="ctr" indent="0" marL="0">
+            <a:pPr marL="0" indent="0" algn="ctr">
               <a:buNone/>
             </a:pPr>
             <a:r>
@@ -1048,6 +859,13 @@
             <a:prstDash val="solid"/>
           </a:ln>
         </p:spPr>
+        <p:txBody>
+          <a:bodyPr/>
+          <a:lstStyle/>
+          <a:p>
+            <a:endParaRPr lang="ko-KR" altLang="en-US"/>
+          </a:p>
+        </p:txBody>
       </p:sp>
       <p:sp>
         <p:nvSpPr>
@@ -1077,6 +895,13 @@
             <a:prstDash val="solid"/>
           </a:ln>
         </p:spPr>
+        <p:txBody>
+          <a:bodyPr/>
+          <a:lstStyle/>
+          <a:p>
+            <a:endParaRPr lang="ko-KR" altLang="en-US"/>
+          </a:p>
+        </p:txBody>
       </p:sp>
       <p:sp>
         <p:nvSpPr>
@@ -1104,6 +929,13 @@
             <a:prstDash val="solid"/>
           </a:ln>
         </p:spPr>
+        <p:txBody>
+          <a:bodyPr/>
+          <a:lstStyle/>
+          <a:p>
+            <a:endParaRPr lang="ko-KR" altLang="en-US"/>
+          </a:p>
+        </p:txBody>
       </p:sp>
       <p:sp>
         <p:nvSpPr>
@@ -1129,6 +961,13 @@
             <a:tailEnd type="none"/>
           </a:ln>
         </p:spPr>
+        <p:txBody>
+          <a:bodyPr/>
+          <a:lstStyle/>
+          <a:p>
+            <a:endParaRPr lang="ko-KR" altLang="en-US"/>
+          </a:p>
+        </p:txBody>
       </p:sp>
       <p:sp>
         <p:nvSpPr>
@@ -1151,7 +990,7 @@
           <a:bodyPr wrap="none" lIns="0" tIns="0" rIns="0" bIns="0" rtlCol="0" anchor="ctr"/>
           <a:lstStyle/>
           <a:p>
-            <a:pPr algn="ctr" indent="0" marL="0">
+            <a:pPr marL="0" indent="0" algn="ctr">
               <a:buNone/>
             </a:pPr>
             <a:r>
@@ -1195,6 +1034,13 @@
             <a:prstDash val="solid"/>
           </a:ln>
         </p:spPr>
+        <p:txBody>
+          <a:bodyPr/>
+          <a:lstStyle/>
+          <a:p>
+            <a:endParaRPr lang="ko-KR" altLang="en-US"/>
+          </a:p>
+        </p:txBody>
       </p:sp>
       <p:sp>
         <p:nvSpPr>
@@ -1224,6 +1070,13 @@
             <a:prstDash val="solid"/>
           </a:ln>
         </p:spPr>
+        <p:txBody>
+          <a:bodyPr/>
+          <a:lstStyle/>
+          <a:p>
+            <a:endParaRPr lang="ko-KR" altLang="en-US"/>
+          </a:p>
+        </p:txBody>
       </p:sp>
       <p:sp>
         <p:nvSpPr>
@@ -1251,6 +1104,13 @@
             <a:prstDash val="solid"/>
           </a:ln>
         </p:spPr>
+        <p:txBody>
+          <a:bodyPr/>
+          <a:lstStyle/>
+          <a:p>
+            <a:endParaRPr lang="ko-KR" altLang="en-US"/>
+          </a:p>
+        </p:txBody>
       </p:sp>
       <p:sp>
         <p:nvSpPr>
@@ -1276,6 +1136,13 @@
             <a:tailEnd type="none"/>
           </a:ln>
         </p:spPr>
+        <p:txBody>
+          <a:bodyPr/>
+          <a:lstStyle/>
+          <a:p>
+            <a:endParaRPr lang="ko-KR" altLang="en-US"/>
+          </a:p>
+        </p:txBody>
       </p:sp>
       <p:sp>
         <p:nvSpPr>
@@ -1298,7 +1165,7 @@
           <a:bodyPr wrap="none" lIns="0" tIns="0" rIns="0" bIns="0" rtlCol="0" anchor="ctr"/>
           <a:lstStyle/>
           <a:p>
-            <a:pPr algn="ctr" indent="0" marL="0">
+            <a:pPr marL="0" indent="0" algn="ctr">
               <a:buNone/>
             </a:pPr>
             <a:r>
@@ -1342,6 +1209,13 @@
             <a:prstDash val="solid"/>
           </a:ln>
         </p:spPr>
+        <p:txBody>
+          <a:bodyPr/>
+          <a:lstStyle/>
+          <a:p>
+            <a:endParaRPr lang="ko-KR" altLang="en-US"/>
+          </a:p>
+        </p:txBody>
       </p:sp>
       <p:sp>
         <p:nvSpPr>
@@ -1371,6 +1245,13 @@
             <a:prstDash val="solid"/>
           </a:ln>
         </p:spPr>
+        <p:txBody>
+          <a:bodyPr/>
+          <a:lstStyle/>
+          <a:p>
+            <a:endParaRPr lang="ko-KR" altLang="en-US"/>
+          </a:p>
+        </p:txBody>
       </p:sp>
       <p:sp>
         <p:nvSpPr>
@@ -1398,6 +1279,13 @@
             <a:prstDash val="solid"/>
           </a:ln>
         </p:spPr>
+        <p:txBody>
+          <a:bodyPr/>
+          <a:lstStyle/>
+          <a:p>
+            <a:endParaRPr lang="ko-KR" altLang="en-US"/>
+          </a:p>
+        </p:txBody>
       </p:sp>
       <p:sp>
         <p:nvSpPr>
@@ -1423,6 +1311,13 @@
             <a:tailEnd type="none"/>
           </a:ln>
         </p:spPr>
+        <p:txBody>
+          <a:bodyPr/>
+          <a:lstStyle/>
+          <a:p>
+            <a:endParaRPr lang="ko-KR" altLang="en-US"/>
+          </a:p>
+        </p:txBody>
       </p:sp>
       <p:sp>
         <p:nvSpPr>
@@ -1445,7 +1340,7 @@
           <a:bodyPr wrap="none" lIns="0" tIns="0" rIns="0" bIns="0" rtlCol="0" anchor="ctr"/>
           <a:lstStyle/>
           <a:p>
-            <a:pPr algn="ctr" indent="0" marL="0">
+            <a:pPr marL="0" indent="0" algn="ctr">
               <a:buNone/>
             </a:pPr>
             <a:r>
@@ -1489,6 +1384,13 @@
             <a:prstDash val="solid"/>
           </a:ln>
         </p:spPr>
+        <p:txBody>
+          <a:bodyPr/>
+          <a:lstStyle/>
+          <a:p>
+            <a:endParaRPr lang="ko-KR" altLang="en-US"/>
+          </a:p>
+        </p:txBody>
       </p:sp>
       <p:sp>
         <p:nvSpPr>
@@ -1511,7 +1413,7 @@
           <a:bodyPr wrap="none" lIns="0" tIns="0" rIns="0" bIns="0" rtlCol="0" anchor="ctr"/>
           <a:lstStyle/>
           <a:p>
-            <a:pPr algn="ctr" indent="0" marL="0">
+            <a:pPr marL="0" indent="0" algn="ctr">
               <a:buNone/>
             </a:pPr>
             <a:r>
@@ -1525,9 +1427,6 @@
               </a:rPr>
               <a:t>Draft </a:t>
             </a:r>
-            <a:pPr algn="ctr" indent="0" marL="0">
-              <a:buNone/>
-            </a:pPr>
             <a:r>
               <a:rPr lang="en-US" sz="1050" b="1" i="1" dirty="0">
                 <a:solidFill>
@@ -1569,6 +1468,13 @@
             <a:prstDash val="solid"/>
           </a:ln>
         </p:spPr>
+        <p:txBody>
+          <a:bodyPr/>
+          <a:lstStyle/>
+          <a:p>
+            <a:endParaRPr lang="ko-KR" altLang="en-US"/>
+          </a:p>
+        </p:txBody>
       </p:sp>
       <p:sp>
         <p:nvSpPr>
@@ -1591,7 +1497,7 @@
           <a:bodyPr wrap="none" lIns="0" tIns="0" rIns="0" bIns="0" rtlCol="0" anchor="ctr"/>
           <a:lstStyle/>
           <a:p>
-            <a:pPr algn="ctr" indent="0" marL="0">
+            <a:pPr marL="0" indent="0" algn="ctr">
               <a:buNone/>
             </a:pPr>
             <a:r>
@@ -1605,9 +1511,6 @@
               </a:rPr>
               <a:t>Capture </a:t>
             </a:r>
-            <a:pPr algn="ctr" indent="0" marL="0">
-              <a:buNone/>
-            </a:pPr>
             <a:r>
               <a:rPr lang="en-US" sz="1250" i="1" dirty="0">
                 <a:solidFill>
@@ -1649,6 +1552,13 @@
             <a:prstDash val="solid"/>
           </a:ln>
         </p:spPr>
+        <p:txBody>
+          <a:bodyPr/>
+          <a:lstStyle/>
+          <a:p>
+            <a:endParaRPr lang="ko-KR" altLang="en-US"/>
+          </a:p>
+        </p:txBody>
       </p:sp>
       <p:sp>
         <p:nvSpPr>
@@ -1671,7 +1581,7 @@
           <a:bodyPr wrap="none" lIns="0" tIns="0" rIns="0" bIns="0" rtlCol="0" anchor="ctr"/>
           <a:lstStyle/>
           <a:p>
-            <a:pPr algn="ctr" indent="0" marL="0">
+            <a:pPr marL="0" indent="0" algn="ctr">
               <a:buNone/>
             </a:pPr>
             <a:r>
@@ -1685,9 +1595,6 @@
               </a:rPr>
               <a:t>Capture </a:t>
             </a:r>
-            <a:pPr algn="ctr" indent="0" marL="0">
-              <a:buNone/>
-            </a:pPr>
             <a:r>
               <a:rPr lang="en-US" sz="1250" i="1" dirty="0">
                 <a:solidFill>
@@ -1699,9 +1606,6 @@
               </a:rPr>
               <a:t>i</a:t>
             </a:r>
-            <a:pPr algn="ctr" indent="0" marL="0">
-              <a:buNone/>
-            </a:pPr>
             <a:r>
               <a:rPr lang="en-US" sz="1250" dirty="0">
                 <a:solidFill>
@@ -1743,6 +1647,13 @@
             <a:prstDash val="solid"/>
           </a:ln>
         </p:spPr>
+        <p:txBody>
+          <a:bodyPr/>
+          <a:lstStyle/>
+          <a:p>
+            <a:endParaRPr lang="ko-KR" altLang="en-US"/>
+          </a:p>
+        </p:txBody>
       </p:sp>
       <p:sp>
         <p:nvSpPr>
@@ -1765,7 +1676,7 @@
           <a:bodyPr wrap="none" lIns="0" tIns="0" rIns="0" bIns="0" rtlCol="0" anchor="ctr"/>
           <a:lstStyle/>
           <a:p>
-            <a:pPr algn="ctr" indent="0" marL="0">
+            <a:pPr marL="0" indent="0" algn="ctr">
               <a:buNone/>
             </a:pPr>
             <a:r>
@@ -1779,9 +1690,6 @@
               </a:rPr>
               <a:t>Capture </a:t>
             </a:r>
-            <a:pPr algn="ctr" indent="0" marL="0">
-              <a:buNone/>
-            </a:pPr>
             <a:r>
               <a:rPr lang="en-US" sz="1250" i="1" dirty="0">
                 <a:solidFill>
@@ -1793,9 +1701,6 @@
               </a:rPr>
               <a:t>i</a:t>
             </a:r>
-            <a:pPr algn="ctr" indent="0" marL="0">
-              <a:buNone/>
-            </a:pPr>
             <a:r>
               <a:rPr lang="en-US" sz="1250" dirty="0">
                 <a:solidFill>
@@ -1835,6 +1740,13 @@
             <a:tailEnd type="none"/>
           </a:ln>
         </p:spPr>
+        <p:txBody>
+          <a:bodyPr/>
+          <a:lstStyle/>
+          <a:p>
+            <a:endParaRPr lang="ko-KR" altLang="en-US"/>
+          </a:p>
+        </p:txBody>
       </p:sp>
       <p:sp>
         <p:nvSpPr>
@@ -1860,6 +1772,13 @@
             <a:tailEnd type="none"/>
           </a:ln>
         </p:spPr>
+        <p:txBody>
+          <a:bodyPr/>
+          <a:lstStyle/>
+          <a:p>
+            <a:endParaRPr lang="ko-KR" altLang="en-US"/>
+          </a:p>
+        </p:txBody>
       </p:sp>
       <p:sp>
         <p:nvSpPr>
@@ -1885,6 +1804,13 @@
             <a:tailEnd type="none"/>
           </a:ln>
         </p:spPr>
+        <p:txBody>
+          <a:bodyPr/>
+          <a:lstStyle/>
+          <a:p>
+            <a:endParaRPr lang="ko-KR" altLang="en-US"/>
+          </a:p>
+        </p:txBody>
       </p:sp>
       <p:sp>
         <p:nvSpPr>
@@ -1910,6 +1836,13 @@
             <a:tailEnd type="triangle"/>
           </a:ln>
         </p:spPr>
+        <p:txBody>
+          <a:bodyPr/>
+          <a:lstStyle/>
+          <a:p>
+            <a:endParaRPr lang="ko-KR" altLang="en-US"/>
+          </a:p>
+        </p:txBody>
       </p:sp>
       <p:sp>
         <p:nvSpPr>
@@ -1935,6 +1868,13 @@
             <a:prstDash val="solid"/>
           </a:ln>
         </p:spPr>
+        <p:txBody>
+          <a:bodyPr/>
+          <a:lstStyle/>
+          <a:p>
+            <a:endParaRPr lang="ko-KR" altLang="en-US"/>
+          </a:p>
+        </p:txBody>
       </p:sp>
       <p:sp>
         <p:nvSpPr>
@@ -1957,7 +1897,7 @@
           <a:bodyPr wrap="none" lIns="0" tIns="0" rIns="0" bIns="0" rtlCol="0" anchor="ctr"/>
           <a:lstStyle/>
           <a:p>
-            <a:pPr algn="ctr" indent="0" marL="0">
+            <a:pPr marL="0" indent="0" algn="ctr">
               <a:buNone/>
             </a:pPr>
             <a:r>
@@ -2001,6 +1941,13 @@
             <a:prstDash val="solid"/>
           </a:ln>
         </p:spPr>
+        <p:txBody>
+          <a:bodyPr/>
+          <a:lstStyle/>
+          <a:p>
+            <a:endParaRPr lang="ko-KR" altLang="en-US"/>
+          </a:p>
+        </p:txBody>
       </p:sp>
       <p:sp>
         <p:nvSpPr>
@@ -2028,6 +1975,13 @@
             <a:prstDash val="dash"/>
           </a:ln>
         </p:spPr>
+        <p:txBody>
+          <a:bodyPr/>
+          <a:lstStyle/>
+          <a:p>
+            <a:endParaRPr lang="ko-KR" altLang="en-US"/>
+          </a:p>
+        </p:txBody>
       </p:sp>
       <p:sp>
         <p:nvSpPr>
@@ -2055,6 +2009,13 @@
             <a:prstDash val="solid"/>
           </a:ln>
         </p:spPr>
+        <p:txBody>
+          <a:bodyPr/>
+          <a:lstStyle/>
+          <a:p>
+            <a:endParaRPr lang="ko-KR" altLang="en-US"/>
+          </a:p>
+        </p:txBody>
       </p:sp>
       <p:sp>
         <p:nvSpPr>
@@ -2077,7 +2038,7 @@
           <a:bodyPr wrap="none" lIns="0" tIns="0" rIns="0" bIns="0" rtlCol="0" anchor="ctr"/>
           <a:lstStyle/>
           <a:p>
-            <a:pPr algn="ctr" indent="0" marL="0">
+            <a:pPr marL="0" indent="0" algn="ctr">
               <a:buNone/>
             </a:pPr>
             <a:r>
@@ -2091,9 +2052,6 @@
               </a:rPr>
               <a:t>Draft </a:t>
             </a:r>
-            <a:pPr algn="ctr" indent="0" marL="0">
-              <a:buNone/>
-            </a:pPr>
             <a:r>
               <a:rPr lang="en-US" sz="1200" i="1" dirty="0">
                 <a:solidFill>
@@ -2105,9 +2063,6 @@
               </a:rPr>
               <a:t>i</a:t>
             </a:r>
-            <a:pPr algn="ctr" indent="0" marL="0">
-              <a:buNone/>
-            </a:pPr>
             <a:r>
               <a:rPr lang="en-US" sz="1200" dirty="0">
                 <a:solidFill>
@@ -2149,6 +2104,13 @@
             <a:prstDash val="solid"/>
           </a:ln>
         </p:spPr>
+        <p:txBody>
+          <a:bodyPr/>
+          <a:lstStyle/>
+          <a:p>
+            <a:endParaRPr lang="ko-KR" altLang="en-US"/>
+          </a:p>
+        </p:txBody>
       </p:sp>
       <p:sp>
         <p:nvSpPr>
@@ -2171,7 +2133,7 @@
           <a:bodyPr wrap="none" lIns="0" tIns="0" rIns="0" bIns="0" rtlCol="0" anchor="ctr"/>
           <a:lstStyle/>
           <a:p>
-            <a:pPr algn="ctr" indent="0" marL="0">
+            <a:pPr marL="0" indent="0" algn="ctr">
               <a:buNone/>
             </a:pPr>
             <a:r>
@@ -2185,9 +2147,6 @@
               </a:rPr>
               <a:t>Draft </a:t>
             </a:r>
-            <a:pPr algn="ctr" indent="0" marL="0">
-              <a:buNone/>
-            </a:pPr>
             <a:r>
               <a:rPr lang="en-US" sz="1200" i="1" dirty="0">
                 <a:solidFill>
@@ -2199,9 +2158,6 @@
               </a:rPr>
               <a:t>i</a:t>
             </a:r>
-            <a:pPr algn="ctr" indent="0" marL="0">
-              <a:buNone/>
-            </a:pPr>
             <a:r>
               <a:rPr lang="en-US" sz="1200" dirty="0">
                 <a:solidFill>
@@ -2241,6 +2197,13 @@
             <a:tailEnd type="triangle"/>
           </a:ln>
         </p:spPr>
+        <p:txBody>
+          <a:bodyPr/>
+          <a:lstStyle/>
+          <a:p>
+            <a:endParaRPr lang="ko-KR" altLang="en-US"/>
+          </a:p>
+        </p:txBody>
       </p:sp>
       <p:sp>
         <p:nvSpPr>
@@ -2263,7 +2226,7 @@
           <a:bodyPr wrap="none" lIns="0" tIns="0" rIns="0" bIns="0" rtlCol="0" anchor="ctr"/>
           <a:lstStyle/>
           <a:p>
-            <a:pPr algn="ctr" indent="0" marL="0">
+            <a:pPr marL="0" indent="0" algn="ctr">
               <a:buNone/>
             </a:pPr>
             <a:r>
@@ -2307,17 +2270,24 @@
             <a:prstDash val="dash"/>
           </a:ln>
         </p:spPr>
+        <p:txBody>
+          <a:bodyPr/>
+          <a:lstStyle/>
+          <a:p>
+            <a:endParaRPr lang="ko-KR" altLang="en-US"/>
+          </a:p>
+        </p:txBody>
       </p:sp>
       <p:pic>
         <p:nvPicPr>
-          <p:cNvPr id="45" name="Image 0" descr="optional multiframe icon">    </p:cNvPr>
+          <p:cNvPr id="45" name="Image 0" descr="optional multiframe icon"/>
           <p:cNvPicPr>
             <a:picLocks noChangeAspect="1"/>
           </p:cNvPicPr>
           <p:nvPr/>
         </p:nvPicPr>
         <p:blipFill>
-          <a:blip r:embed="rId1"/>
+          <a:blip r:embed="rId3"/>
           <a:stretch>
             <a:fillRect/>
           </a:stretch>
@@ -2356,6 +2326,13 @@
             <a:tailEnd type="triangle"/>
           </a:ln>
         </p:spPr>
+        <p:txBody>
+          <a:bodyPr/>
+          <a:lstStyle/>
+          <a:p>
+            <a:endParaRPr lang="ko-KR" altLang="en-US"/>
+          </a:p>
+        </p:txBody>
       </p:sp>
       <p:sp>
         <p:nvSpPr>
@@ -2383,6 +2360,13 @@
             <a:prstDash val="solid"/>
           </a:ln>
         </p:spPr>
+        <p:txBody>
+          <a:bodyPr/>
+          <a:lstStyle/>
+          <a:p>
+            <a:endParaRPr lang="ko-KR" altLang="en-US"/>
+          </a:p>
+        </p:txBody>
       </p:sp>
       <p:sp>
         <p:nvSpPr>
@@ -2410,6 +2394,13 @@
             <a:prstDash val="solid"/>
           </a:ln>
         </p:spPr>
+        <p:txBody>
+          <a:bodyPr/>
+          <a:lstStyle/>
+          <a:p>
+            <a:endParaRPr lang="ko-KR" altLang="en-US"/>
+          </a:p>
+        </p:txBody>
       </p:sp>
       <p:sp>
         <p:nvSpPr>
@@ -2437,6 +2428,13 @@
             <a:prstDash val="solid"/>
           </a:ln>
         </p:spPr>
+        <p:txBody>
+          <a:bodyPr/>
+          <a:lstStyle/>
+          <a:p>
+            <a:endParaRPr lang="ko-KR" altLang="en-US"/>
+          </a:p>
+        </p:txBody>
       </p:sp>
       <p:sp>
         <p:nvSpPr>
@@ -2462,6 +2460,13 @@
             <a:prstDash val="solid"/>
           </a:ln>
         </p:spPr>
+        <p:txBody>
+          <a:bodyPr/>
+          <a:lstStyle/>
+          <a:p>
+            <a:endParaRPr lang="ko-KR" altLang="en-US"/>
+          </a:p>
+        </p:txBody>
       </p:sp>
       <p:sp>
         <p:nvSpPr>
@@ -2487,6 +2492,13 @@
             <a:prstDash val="solid"/>
           </a:ln>
         </p:spPr>
+        <p:txBody>
+          <a:bodyPr/>
+          <a:lstStyle/>
+          <a:p>
+            <a:endParaRPr lang="ko-KR" altLang="en-US"/>
+          </a:p>
+        </p:txBody>
       </p:sp>
       <p:sp>
         <p:nvSpPr>
@@ -2512,6 +2524,13 @@
             <a:prstDash val="solid"/>
           </a:ln>
         </p:spPr>
+        <p:txBody>
+          <a:bodyPr/>
+          <a:lstStyle/>
+          <a:p>
+            <a:endParaRPr lang="ko-KR" altLang="en-US"/>
+          </a:p>
+        </p:txBody>
       </p:sp>
       <p:sp>
         <p:nvSpPr>
@@ -2537,6 +2556,13 @@
             <a:tailEnd type="none"/>
           </a:ln>
         </p:spPr>
+        <p:txBody>
+          <a:bodyPr/>
+          <a:lstStyle/>
+          <a:p>
+            <a:endParaRPr lang="ko-KR" altLang="en-US"/>
+          </a:p>
+        </p:txBody>
       </p:sp>
       <p:sp>
         <p:nvSpPr>
@@ -2566,6 +2592,13 @@
             <a:prstDash val="solid"/>
           </a:ln>
         </p:spPr>
+        <p:txBody>
+          <a:bodyPr/>
+          <a:lstStyle/>
+          <a:p>
+            <a:endParaRPr lang="ko-KR" altLang="en-US"/>
+          </a:p>
+        </p:txBody>
       </p:sp>
       <p:sp>
         <p:nvSpPr>
@@ -2591,6 +2624,13 @@
             <a:prstDash val="solid"/>
           </a:ln>
         </p:spPr>
+        <p:txBody>
+          <a:bodyPr/>
+          <a:lstStyle/>
+          <a:p>
+            <a:endParaRPr lang="ko-KR" altLang="en-US"/>
+          </a:p>
+        </p:txBody>
       </p:sp>
       <p:sp>
         <p:nvSpPr>
@@ -2616,6 +2656,13 @@
             <a:tailEnd type="triangle"/>
           </a:ln>
         </p:spPr>
+        <p:txBody>
+          <a:bodyPr/>
+          <a:lstStyle/>
+          <a:p>
+            <a:endParaRPr lang="ko-KR" altLang="en-US"/>
+          </a:p>
+        </p:txBody>
       </p:sp>
       <p:sp>
         <p:nvSpPr>
@@ -2643,6 +2690,13 @@
             <a:prstDash val="solid"/>
           </a:ln>
         </p:spPr>
+        <p:txBody>
+          <a:bodyPr/>
+          <a:lstStyle/>
+          <a:p>
+            <a:endParaRPr lang="ko-KR" altLang="en-US"/>
+          </a:p>
+        </p:txBody>
       </p:sp>
       <p:sp>
         <p:nvSpPr>
@@ -2668,6 +2722,13 @@
             <a:prstDash val="solid"/>
           </a:ln>
         </p:spPr>
+        <p:txBody>
+          <a:bodyPr/>
+          <a:lstStyle/>
+          <a:p>
+            <a:endParaRPr lang="ko-KR" altLang="en-US"/>
+          </a:p>
+        </p:txBody>
       </p:sp>
       <p:sp>
         <p:nvSpPr>
@@ -2695,6 +2756,13 @@
             <a:prstDash val="solid"/>
           </a:ln>
         </p:spPr>
+        <p:txBody>
+          <a:bodyPr/>
+          <a:lstStyle/>
+          <a:p>
+            <a:endParaRPr lang="ko-KR" altLang="en-US"/>
+          </a:p>
+        </p:txBody>
       </p:sp>
       <p:sp>
         <p:nvSpPr>
@@ -2722,6 +2790,13 @@
             <a:prstDash val="solid"/>
           </a:ln>
         </p:spPr>
+        <p:txBody>
+          <a:bodyPr/>
+          <a:lstStyle/>
+          <a:p>
+            <a:endParaRPr lang="ko-KR" altLang="en-US"/>
+          </a:p>
+        </p:txBody>
       </p:sp>
       <p:sp>
         <p:nvSpPr>
@@ -2749,6 +2824,13 @@
             <a:prstDash val="solid"/>
           </a:ln>
         </p:spPr>
+        <p:txBody>
+          <a:bodyPr/>
+          <a:lstStyle/>
+          <a:p>
+            <a:endParaRPr lang="ko-KR" altLang="en-US"/>
+          </a:p>
+        </p:txBody>
       </p:sp>
       <p:sp>
         <p:nvSpPr>
@@ -2771,7 +2853,7 @@
           <a:bodyPr wrap="none" lIns="0" tIns="0" rIns="0" bIns="0" rtlCol="0" anchor="ctr"/>
           <a:lstStyle/>
           <a:p>
-            <a:pPr algn="ctr" indent="0" marL="0">
+            <a:pPr marL="0" indent="0" algn="ctr">
               <a:buNone/>
             </a:pPr>
             <a:r>
@@ -2813,17 +2895,24 @@
             <a:tailEnd type="triangle"/>
           </a:ln>
         </p:spPr>
+        <p:txBody>
+          <a:bodyPr/>
+          <a:lstStyle/>
+          <a:p>
+            <a:endParaRPr lang="ko-KR" altLang="en-US"/>
+          </a:p>
+        </p:txBody>
       </p:sp>
       <p:pic>
         <p:nvPicPr>
-          <p:cNvPr id="64" name="Image 1" descr="draft image icon">    </p:cNvPr>
+          <p:cNvPr id="64" name="Image 1" descr="draft image icon"/>
           <p:cNvPicPr>
             <a:picLocks noChangeAspect="1"/>
           </p:cNvPicPr>
           <p:nvPr/>
         </p:nvPicPr>
         <p:blipFill>
-          <a:blip r:embed="rId2"/>
+          <a:blip r:embed="rId4"/>
           <a:stretch>
             <a:fillRect/>
           </a:stretch>
@@ -2859,7 +2948,7 @@
           <a:bodyPr wrap="none" lIns="0" tIns="0" rIns="0" bIns="0" rtlCol="0" anchor="ctr"/>
           <a:lstStyle/>
           <a:p>
-            <a:pPr algn="ctr" indent="0" marL="0">
+            <a:pPr marL="0" indent="0" algn="ctr">
               <a:buNone/>
             </a:pPr>
             <a:r>
@@ -2903,17 +2992,24 @@
             <a:prstDash val="solid"/>
           </a:ln>
         </p:spPr>
+        <p:txBody>
+          <a:bodyPr/>
+          <a:lstStyle/>
+          <a:p>
+            <a:endParaRPr lang="ko-KR" altLang="en-US"/>
+          </a:p>
+        </p:txBody>
       </p:sp>
       <p:pic>
         <p:nvPicPr>
-          <p:cNvPr id="67" name="Image 2" descr="pacing icon">    </p:cNvPr>
+          <p:cNvPr id="67" name="Image 2" descr="pacing icon"/>
           <p:cNvPicPr>
             <a:picLocks noChangeAspect="1"/>
           </p:cNvPicPr>
           <p:nvPr/>
         </p:nvPicPr>
         <p:blipFill>
-          <a:blip r:embed="rId3"/>
+          <a:blip r:embed="rId5"/>
           <a:stretch>
             <a:fillRect/>
           </a:stretch>
@@ -2949,7 +3045,7 @@
           <a:bodyPr wrap="none" lIns="0" tIns="0" rIns="0" bIns="0" rtlCol="0" anchor="ctr"/>
           <a:lstStyle/>
           <a:p>
-            <a:pPr algn="l" indent="0" marL="0">
+            <a:pPr marL="0" indent="0" algn="l">
               <a:buNone/>
             </a:pPr>
             <a:r>
@@ -2988,7 +3084,7 @@
           <a:bodyPr wrap="none" lIns="0" tIns="0" rIns="0" bIns="0" rtlCol="0" anchor="ctr"/>
           <a:lstStyle/>
           <a:p>
-            <a:pPr algn="l" indent="0" marL="0">
+            <a:pPr marL="0" indent="0" algn="l">
               <a:buNone/>
             </a:pPr>
             <a:r>
@@ -3032,17 +3128,24 @@
             <a:prstDash val="solid"/>
           </a:ln>
         </p:spPr>
+        <p:txBody>
+          <a:bodyPr/>
+          <a:lstStyle/>
+          <a:p>
+            <a:endParaRPr lang="ko-KR" altLang="en-US"/>
+          </a:p>
+        </p:txBody>
       </p:sp>
       <p:pic>
         <p:nvPicPr>
-          <p:cNvPr id="71" name="Image 3" descr="admission icon">    </p:cNvPr>
+          <p:cNvPr id="71" name="Image 3" descr="admission icon"/>
           <p:cNvPicPr>
             <a:picLocks noChangeAspect="1"/>
           </p:cNvPicPr>
           <p:nvPr/>
         </p:nvPicPr>
         <p:blipFill>
-          <a:blip r:embed="rId4"/>
+          <a:blip r:embed="rId6"/>
           <a:stretch>
             <a:fillRect/>
           </a:stretch>
@@ -3078,7 +3181,7 @@
           <a:bodyPr wrap="none" lIns="0" tIns="0" rIns="0" bIns="0" rtlCol="0" anchor="ctr"/>
           <a:lstStyle/>
           <a:p>
-            <a:pPr algn="l" indent="0" marL="0">
+            <a:pPr marL="0" indent="0" algn="l">
               <a:buNone/>
             </a:pPr>
             <a:r>
@@ -3117,7 +3220,7 @@
           <a:bodyPr wrap="none" lIns="0" tIns="0" rIns="0" bIns="0" rtlCol="0" anchor="ctr"/>
           <a:lstStyle/>
           <a:p>
-            <a:pPr algn="l" indent="0" marL="0">
+            <a:pPr marL="0" indent="0" algn="l">
               <a:buNone/>
             </a:pPr>
             <a:r>
@@ -3161,6 +3264,13 @@
             <a:prstDash val="solid"/>
           </a:ln>
         </p:spPr>
+        <p:txBody>
+          <a:bodyPr/>
+          <a:lstStyle/>
+          <a:p>
+            <a:endParaRPr lang="ko-KR" altLang="en-US"/>
+          </a:p>
+        </p:txBody>
       </p:sp>
       <p:sp>
         <p:nvSpPr>
@@ -3186,6 +3296,13 @@
             <a:prstDash val="solid"/>
           </a:ln>
         </p:spPr>
+        <p:txBody>
+          <a:bodyPr/>
+          <a:lstStyle/>
+          <a:p>
+            <a:endParaRPr lang="ko-KR" altLang="en-US"/>
+          </a:p>
+        </p:txBody>
       </p:sp>
       <p:sp>
         <p:nvSpPr>
@@ -3211,6 +3328,13 @@
             <a:tailEnd type="none"/>
           </a:ln>
         </p:spPr>
+        <p:txBody>
+          <a:bodyPr/>
+          <a:lstStyle/>
+          <a:p>
+            <a:endParaRPr lang="ko-KR" altLang="en-US"/>
+          </a:p>
+        </p:txBody>
       </p:sp>
       <p:sp>
         <p:nvSpPr>
@@ -3236,6 +3360,13 @@
             <a:tailEnd type="none"/>
           </a:ln>
         </p:spPr>
+        <p:txBody>
+          <a:bodyPr/>
+          <a:lstStyle/>
+          <a:p>
+            <a:endParaRPr lang="ko-KR" altLang="en-US"/>
+          </a:p>
+        </p:txBody>
       </p:sp>
       <p:sp>
         <p:nvSpPr>
@@ -3261,6 +3392,13 @@
             <a:tailEnd type="none"/>
           </a:ln>
         </p:spPr>
+        <p:txBody>
+          <a:bodyPr/>
+          <a:lstStyle/>
+          <a:p>
+            <a:endParaRPr lang="ko-KR" altLang="en-US"/>
+          </a:p>
+        </p:txBody>
       </p:sp>
       <p:sp>
         <p:nvSpPr>
@@ -3286,6 +3424,13 @@
             <a:tailEnd type="none"/>
           </a:ln>
         </p:spPr>
+        <p:txBody>
+          <a:bodyPr/>
+          <a:lstStyle/>
+          <a:p>
+            <a:endParaRPr lang="ko-KR" altLang="en-US"/>
+          </a:p>
+        </p:txBody>
       </p:sp>
       <p:sp>
         <p:nvSpPr>
@@ -3311,6 +3456,13 @@
             <a:prstDash val="solid"/>
           </a:ln>
         </p:spPr>
+        <p:txBody>
+          <a:bodyPr/>
+          <a:lstStyle/>
+          <a:p>
+            <a:endParaRPr lang="ko-KR" altLang="en-US"/>
+          </a:p>
+        </p:txBody>
       </p:sp>
       <p:sp>
         <p:nvSpPr>
@@ -3333,7 +3485,7 @@
           <a:bodyPr wrap="none" lIns="0" tIns="0" rIns="0" bIns="0" rtlCol="0" anchor="ctr"/>
           <a:lstStyle/>
           <a:p>
-            <a:pPr algn="l" indent="0" marL="0">
+            <a:pPr marL="0" indent="0" algn="l">
               <a:buNone/>
             </a:pPr>
             <a:r>
@@ -3375,6 +3527,13 @@
             <a:tailEnd type="triangle"/>
           </a:ln>
         </p:spPr>
+        <p:txBody>
+          <a:bodyPr/>
+          <a:lstStyle/>
+          <a:p>
+            <a:endParaRPr lang="ko-KR" altLang="en-US"/>
+          </a:p>
+        </p:txBody>
       </p:sp>
       <p:sp>
         <p:nvSpPr>
@@ -3400,6 +3559,13 @@
             <a:tailEnd type="triangle"/>
           </a:ln>
         </p:spPr>
+        <p:txBody>
+          <a:bodyPr/>
+          <a:lstStyle/>
+          <a:p>
+            <a:endParaRPr lang="ko-KR" altLang="en-US"/>
+          </a:p>
+        </p:txBody>
       </p:sp>
       <p:sp>
         <p:nvSpPr>
@@ -3425,6 +3591,13 @@
             <a:tailEnd type="triangle"/>
           </a:ln>
         </p:spPr>
+        <p:txBody>
+          <a:bodyPr/>
+          <a:lstStyle/>
+          <a:p>
+            <a:endParaRPr lang="ko-KR" altLang="en-US"/>
+          </a:p>
+        </p:txBody>
       </p:sp>
       <p:sp>
         <p:nvSpPr>
@@ -3447,7 +3620,7 @@
           <a:bodyPr wrap="none" lIns="0" tIns="0" rIns="0" bIns="0" rtlCol="0" anchor="ctr"/>
           <a:lstStyle/>
           <a:p>
-            <a:pPr algn="l" indent="0" marL="0">
+            <a:pPr marL="0" indent="0" algn="l">
               <a:buNone/>
             </a:pPr>
             <a:r>
@@ -3486,7 +3659,7 @@
           <a:bodyPr wrap="none" lIns="0" tIns="0" rIns="0" bIns="0" rtlCol="0" anchor="ctr"/>
           <a:lstStyle/>
           <a:p>
-            <a:pPr algn="l" indent="0" marL="0">
+            <a:pPr marL="0" indent="0" algn="l">
               <a:buNone/>
             </a:pPr>
             <a:r>
@@ -3528,6 +3701,13 @@
             <a:tailEnd type="triangle"/>
           </a:ln>
         </p:spPr>
+        <p:txBody>
+          <a:bodyPr/>
+          <a:lstStyle/>
+          <a:p>
+            <a:endParaRPr lang="ko-KR" altLang="en-US"/>
+          </a:p>
+        </p:txBody>
       </p:sp>
       <p:sp>
         <p:nvSpPr>
@@ -3550,7 +3730,7 @@
           <a:bodyPr wrap="none" lIns="0" tIns="0" rIns="0" bIns="0" rtlCol="0" anchor="ctr"/>
           <a:lstStyle/>
           <a:p>
-            <a:pPr algn="l" indent="0" marL="0">
+            <a:pPr marL="0" indent="0" algn="l">
               <a:buNone/>
             </a:pPr>
             <a:r>
@@ -3589,7 +3769,7 @@
           <a:bodyPr wrap="none" lIns="0" tIns="0" rIns="0" bIns="0" rtlCol="0" anchor="ctr"/>
           <a:lstStyle/>
           <a:p>
-            <a:pPr algn="l" indent="0" marL="0">
+            <a:pPr marL="0" indent="0" algn="l">
               <a:buNone/>
             </a:pPr>
             <a:r>
@@ -3631,6 +3811,13 @@
             <a:tailEnd type="triangle"/>
           </a:ln>
         </p:spPr>
+        <p:txBody>
+          <a:bodyPr/>
+          <a:lstStyle/>
+          <a:p>
+            <a:endParaRPr lang="ko-KR" altLang="en-US"/>
+          </a:p>
+        </p:txBody>
       </p:sp>
       <p:sp>
         <p:nvSpPr>
@@ -3653,7 +3840,7 @@
           <a:bodyPr wrap="none" lIns="0" tIns="0" rIns="0" bIns="0" rtlCol="0" anchor="ctr"/>
           <a:lstStyle/>
           <a:p>
-            <a:pPr algn="l" indent="0" marL="0">
+            <a:pPr marL="0" indent="0" algn="l">
               <a:buNone/>
             </a:pPr>
             <a:r>
@@ -3692,7 +3879,7 @@
           <a:bodyPr wrap="none" lIns="0" tIns="0" rIns="0" bIns="0" rtlCol="0" anchor="ctr"/>
           <a:lstStyle/>
           <a:p>
-            <a:pPr algn="l" indent="0" marL="0">
+            <a:pPr marL="0" indent="0" algn="l">
               <a:buNone/>
             </a:pPr>
             <a:r>
@@ -3734,6 +3921,13 @@
             <a:tailEnd type="none"/>
           </a:ln>
         </p:spPr>
+        <p:txBody>
+          <a:bodyPr/>
+          <a:lstStyle/>
+          <a:p>
+            <a:endParaRPr lang="ko-KR" altLang="en-US"/>
+          </a:p>
+        </p:txBody>
       </p:sp>
       <p:sp>
         <p:nvSpPr>
@@ -3759,6 +3953,13 @@
             <a:tailEnd type="none"/>
           </a:ln>
         </p:spPr>
+        <p:txBody>
+          <a:bodyPr/>
+          <a:lstStyle/>
+          <a:p>
+            <a:endParaRPr lang="ko-KR" altLang="en-US"/>
+          </a:p>
+        </p:txBody>
       </p:sp>
       <p:sp>
         <p:nvSpPr>
@@ -3784,6 +3985,13 @@
             <a:tailEnd type="triangle"/>
           </a:ln>
         </p:spPr>
+        <p:txBody>
+          <a:bodyPr/>
+          <a:lstStyle/>
+          <a:p>
+            <a:endParaRPr lang="ko-KR" altLang="en-US"/>
+          </a:p>
+        </p:txBody>
       </p:sp>
       <p:sp>
         <p:nvSpPr>
@@ -3806,7 +4014,7 @@
           <a:bodyPr wrap="none" lIns="0" tIns="0" rIns="0" bIns="0" rtlCol="0" anchor="ctr"/>
           <a:lstStyle/>
           <a:p>
-            <a:pPr algn="l" indent="0" marL="0">
+            <a:pPr marL="0" indent="0" algn="l">
               <a:buNone/>
             </a:pPr>
             <a:r>
@@ -3845,7 +4053,7 @@
           <a:bodyPr wrap="none" lIns="0" tIns="0" rIns="0" bIns="0" rtlCol="0" anchor="ctr"/>
           <a:lstStyle/>
           <a:p>
-            <a:pPr algn="l" indent="0" marL="0">
+            <a:pPr marL="0" indent="0" algn="l">
               <a:buNone/>
             </a:pPr>
             <a:r>
@@ -3887,6 +4095,13 @@
             <a:tailEnd type="none"/>
           </a:ln>
         </p:spPr>
+        <p:txBody>
+          <a:bodyPr/>
+          <a:lstStyle/>
+          <a:p>
+            <a:endParaRPr lang="ko-KR" altLang="en-US"/>
+          </a:p>
+        </p:txBody>
       </p:sp>
       <p:sp>
         <p:nvSpPr>
@@ -3912,6 +4127,13 @@
             <a:tailEnd type="none"/>
           </a:ln>
         </p:spPr>
+        <p:txBody>
+          <a:bodyPr/>
+          <a:lstStyle/>
+          <a:p>
+            <a:endParaRPr lang="ko-KR" altLang="en-US"/>
+          </a:p>
+        </p:txBody>
       </p:sp>
       <p:sp>
         <p:nvSpPr>
@@ -3937,6 +4159,13 @@
             <a:tailEnd type="triangle"/>
           </a:ln>
         </p:spPr>
+        <p:txBody>
+          <a:bodyPr/>
+          <a:lstStyle/>
+          <a:p>
+            <a:endParaRPr lang="ko-KR" altLang="en-US"/>
+          </a:p>
+        </p:txBody>
       </p:sp>
       <p:sp>
         <p:nvSpPr>
@@ -3959,7 +4188,7 @@
           <a:bodyPr wrap="none" lIns="0" tIns="0" rIns="0" bIns="0" rtlCol="0" anchor="ctr"/>
           <a:lstStyle/>
           <a:p>
-            <a:pPr algn="r" indent="0" marL="0">
+            <a:pPr marL="0" indent="0" algn="r">
               <a:buNone/>
             </a:pPr>
             <a:r>
@@ -3998,7 +4227,7 @@
           <a:bodyPr wrap="none" lIns="0" tIns="0" rIns="0" bIns="0" rtlCol="0" anchor="ctr"/>
           <a:lstStyle/>
           <a:p>
-            <a:pPr algn="r" indent="0" marL="0">
+            <a:pPr marL="0" indent="0" algn="r">
               <a:buNone/>
             </a:pPr>
             <a:r>
@@ -4317,4 +4546,319 @@
     </a:ext>
   </a:extLst>
 </a:theme>
+</file>
+
+<file path=ppt/theme/theme2.xml><?xml version="1.0" encoding="utf-8"?>
+<a:theme xmlns:a="http://schemas.openxmlformats.org/drawingml/2006/main" name="Office 테마">
+  <a:themeElements>
+    <a:clrScheme name="Office">
+      <a:dk1>
+        <a:sysClr val="windowText" lastClr="000000"/>
+      </a:dk1>
+      <a:lt1>
+        <a:sysClr val="window" lastClr="FFFFFF"/>
+      </a:lt1>
+      <a:dk2>
+        <a:srgbClr val="0E2841"/>
+      </a:dk2>
+      <a:lt2>
+        <a:srgbClr val="E8E8E8"/>
+      </a:lt2>
+      <a:accent1>
+        <a:srgbClr val="156082"/>
+      </a:accent1>
+      <a:accent2>
+        <a:srgbClr val="E97132"/>
+      </a:accent2>
+      <a:accent3>
+        <a:srgbClr val="196B24"/>
+      </a:accent3>
+      <a:accent4>
+        <a:srgbClr val="0F9ED5"/>
+      </a:accent4>
+      <a:accent5>
+        <a:srgbClr val="A02B93"/>
+      </a:accent5>
+      <a:accent6>
+        <a:srgbClr val="4EA72E"/>
+      </a:accent6>
+      <a:hlink>
+        <a:srgbClr val="467886"/>
+      </a:hlink>
+      <a:folHlink>
+        <a:srgbClr val="96607D"/>
+      </a:folHlink>
+    </a:clrScheme>
+    <a:fontScheme name="Office">
+      <a:majorFont>
+        <a:latin typeface="맑은 고딕" panose="02110004020202020204"/>
+        <a:ea typeface=""/>
+        <a:cs typeface=""/>
+        <a:font script="Jpan" typeface="游ゴシック Light"/>
+        <a:font script="Hang" typeface="맑은 고딕"/>
+        <a:font script="Hans" typeface="等线 Light"/>
+        <a:font script="Hant" typeface="新細明體"/>
+        <a:font script="Arab" typeface="Times New Roman"/>
+        <a:font script="Hebr" typeface="Times New Roman"/>
+        <a:font script="Thai" typeface="Angsana New"/>
+        <a:font script="Ethi" typeface="Nyala"/>
+        <a:font script="Beng" typeface="Vrinda"/>
+        <a:font script="Gujr" typeface="Shruti"/>
+        <a:font script="Khmr" typeface="MoolBoran"/>
+        <a:font script="Knda" typeface="Tunga"/>
+        <a:font script="Guru" typeface="Raavi"/>
+        <a:font script="Cans" typeface="Euphemia"/>
+        <a:font script="Cher" typeface="Plantagenet Cherokee"/>
+        <a:font script="Yiii" typeface="Microsoft Yi Baiti"/>
+        <a:font script="Tibt" typeface="Microsoft Himalaya"/>
+        <a:font script="Thaa" typeface="MV Boli"/>
+        <a:font script="Deva" typeface="Mangal"/>
+        <a:font script="Telu" typeface="Gautami"/>
+        <a:font script="Taml" typeface="Latha"/>
+        <a:font script="Syrc" typeface="Estrangelo Edessa"/>
+        <a:font script="Orya" typeface="Kalinga"/>
+        <a:font script="Mlym" typeface="Kartika"/>
+        <a:font script="Laoo" typeface="DokChampa"/>
+        <a:font script="Sinh" typeface="Iskoola Pota"/>
+        <a:font script="Mong" typeface="Mongolian Baiti"/>
+        <a:font script="Viet" typeface="Times New Roman"/>
+        <a:font script="Uigh" typeface="Microsoft Uighur"/>
+        <a:font script="Geor" typeface="Sylfaen"/>
+        <a:font script="Armn" typeface="Arial"/>
+        <a:font script="Bugi" typeface="Leelawadee UI"/>
+        <a:font script="Bopo" typeface="Microsoft JhengHei"/>
+        <a:font script="Java" typeface="Javanese Text"/>
+        <a:font script="Lisu" typeface="Segoe UI"/>
+        <a:font script="Mymr" typeface="Myanmar Text"/>
+        <a:font script="Nkoo" typeface="Ebrima"/>
+        <a:font script="Olck" typeface="Nirmala UI"/>
+        <a:font script="Osma" typeface="Ebrima"/>
+        <a:font script="Phag" typeface="Phagspa"/>
+        <a:font script="Syrn" typeface="Estrangelo Edessa"/>
+        <a:font script="Syrj" typeface="Estrangelo Edessa"/>
+        <a:font script="Syre" typeface="Estrangelo Edessa"/>
+        <a:font script="Sora" typeface="Nirmala UI"/>
+        <a:font script="Tale" typeface="Microsoft Tai Le"/>
+        <a:font script="Talu" typeface="Microsoft New Tai Lue"/>
+        <a:font script="Tfng" typeface="Ebrima"/>
+      </a:majorFont>
+      <a:minorFont>
+        <a:latin typeface="맑은 고딕" panose="02110004020202020204"/>
+        <a:ea typeface=""/>
+        <a:cs typeface=""/>
+        <a:font script="Jpan" typeface="游ゴシック"/>
+        <a:font script="Hang" typeface="맑은 고딕"/>
+        <a:font script="Hans" typeface="等线"/>
+        <a:font script="Hant" typeface="新細明體"/>
+        <a:font script="Arab" typeface="Arial"/>
+        <a:font script="Hebr" typeface="Arial"/>
+        <a:font script="Thai" typeface="Cordia New"/>
+        <a:font script="Ethi" typeface="Nyala"/>
+        <a:font script="Beng" typeface="Vrinda"/>
+        <a:font script="Gujr" typeface="Shruti"/>
+        <a:font script="Khmr" typeface="DaunPenh"/>
+        <a:font script="Knda" typeface="Tunga"/>
+        <a:font script="Guru" typeface="Raavi"/>
+        <a:font script="Cans" typeface="Euphemia"/>
+        <a:font script="Cher" typeface="Plantagenet Cherokee"/>
+        <a:font script="Yiii" typeface="Microsoft Yi Baiti"/>
+        <a:font script="Tibt" typeface="Microsoft Himalaya"/>
+        <a:font script="Thaa" typeface="MV Boli"/>
+        <a:font script="Deva" typeface="Mangal"/>
+        <a:font script="Telu" typeface="Gautami"/>
+        <a:font script="Taml" typeface="Latha"/>
+        <a:font script="Syrc" typeface="Estrangelo Edessa"/>
+        <a:font script="Orya" typeface="Kalinga"/>
+        <a:font script="Mlym" typeface="Kartika"/>
+        <a:font script="Laoo" typeface="DokChampa"/>
+        <a:font script="Sinh" typeface="Iskoola Pota"/>
+        <a:font script="Mong" typeface="Mongolian Baiti"/>
+        <a:font script="Viet" typeface="Arial"/>
+        <a:font script="Uigh" typeface="Microsoft Uighur"/>
+        <a:font script="Geor" typeface="Sylfaen"/>
+        <a:font script="Armn" typeface="Arial"/>
+        <a:font script="Bugi" typeface="Leelawadee UI"/>
+        <a:font script="Bopo" typeface="Microsoft JhengHei"/>
+        <a:font script="Java" typeface="Javanese Text"/>
+        <a:font script="Lisu" typeface="Segoe UI"/>
+        <a:font script="Mymr" typeface="Myanmar Text"/>
+        <a:font script="Nkoo" typeface="Ebrima"/>
+        <a:font script="Olck" typeface="Nirmala UI"/>
+        <a:font script="Osma" typeface="Ebrima"/>
+        <a:font script="Phag" typeface="Phagspa"/>
+        <a:font script="Syrn" typeface="Estrangelo Edessa"/>
+        <a:font script="Syrj" typeface="Estrangelo Edessa"/>
+        <a:font script="Syre" typeface="Estrangelo Edessa"/>
+        <a:font script="Sora" typeface="Nirmala UI"/>
+        <a:font script="Tale" typeface="Microsoft Tai Le"/>
+        <a:font script="Talu" typeface="Microsoft New Tai Lue"/>
+        <a:font script="Tfng" typeface="Ebrima"/>
+      </a:minorFont>
+    </a:fontScheme>
+    <a:fmtScheme name="Office">
+      <a:fillStyleLst>
+        <a:solidFill>
+          <a:schemeClr val="phClr"/>
+        </a:solidFill>
+        <a:gradFill rotWithShape="1">
+          <a:gsLst>
+            <a:gs pos="0">
+              <a:schemeClr val="phClr">
+                <a:lumMod val="110000"/>
+                <a:satMod val="105000"/>
+                <a:tint val="67000"/>
+              </a:schemeClr>
+            </a:gs>
+            <a:gs pos="50000">
+              <a:schemeClr val="phClr">
+                <a:lumMod val="105000"/>
+                <a:satMod val="103000"/>
+                <a:tint val="73000"/>
+              </a:schemeClr>
+            </a:gs>
+            <a:gs pos="100000">
+              <a:schemeClr val="phClr">
+                <a:lumMod val="105000"/>
+                <a:satMod val="109000"/>
+                <a:tint val="81000"/>
+              </a:schemeClr>
+            </a:gs>
+          </a:gsLst>
+          <a:lin ang="5400000" scaled="0"/>
+        </a:gradFill>
+        <a:gradFill rotWithShape="1">
+          <a:gsLst>
+            <a:gs pos="0">
+              <a:schemeClr val="phClr">
+                <a:satMod val="103000"/>
+                <a:lumMod val="102000"/>
+                <a:tint val="94000"/>
+              </a:schemeClr>
+            </a:gs>
+            <a:gs pos="50000">
+              <a:schemeClr val="phClr">
+                <a:satMod val="110000"/>
+                <a:lumMod val="100000"/>
+                <a:shade val="100000"/>
+              </a:schemeClr>
+            </a:gs>
+            <a:gs pos="100000">
+              <a:schemeClr val="phClr">
+                <a:lumMod val="99000"/>
+                <a:satMod val="120000"/>
+                <a:shade val="78000"/>
+              </a:schemeClr>
+            </a:gs>
+          </a:gsLst>
+          <a:lin ang="5400000" scaled="0"/>
+        </a:gradFill>
+      </a:fillStyleLst>
+      <a:lnStyleLst>
+        <a:ln w="12700" cap="flat" cmpd="sng" algn="ctr">
+          <a:solidFill>
+            <a:schemeClr val="phClr"/>
+          </a:solidFill>
+          <a:prstDash val="solid"/>
+          <a:miter lim="800000"/>
+        </a:ln>
+        <a:ln w="19050" cap="flat" cmpd="sng" algn="ctr">
+          <a:solidFill>
+            <a:schemeClr val="phClr"/>
+          </a:solidFill>
+          <a:prstDash val="solid"/>
+          <a:miter lim="800000"/>
+        </a:ln>
+        <a:ln w="25400" cap="flat" cmpd="sng" algn="ctr">
+          <a:solidFill>
+            <a:schemeClr val="phClr"/>
+          </a:solidFill>
+          <a:prstDash val="solid"/>
+          <a:miter lim="800000"/>
+        </a:ln>
+      </a:lnStyleLst>
+      <a:effectStyleLst>
+        <a:effectStyle>
+          <a:effectLst/>
+        </a:effectStyle>
+        <a:effectStyle>
+          <a:effectLst/>
+        </a:effectStyle>
+        <a:effectStyle>
+          <a:effectLst>
+            <a:outerShdw blurRad="57150" dist="19050" dir="5400000" algn="ctr" rotWithShape="0">
+              <a:srgbClr val="000000">
+                <a:alpha val="63000"/>
+              </a:srgbClr>
+            </a:outerShdw>
+          </a:effectLst>
+        </a:effectStyle>
+      </a:effectStyleLst>
+      <a:bgFillStyleLst>
+        <a:solidFill>
+          <a:schemeClr val="phClr"/>
+        </a:solidFill>
+        <a:solidFill>
+          <a:schemeClr val="phClr">
+            <a:tint val="95000"/>
+            <a:satMod val="170000"/>
+          </a:schemeClr>
+        </a:solidFill>
+        <a:gradFill rotWithShape="1">
+          <a:gsLst>
+            <a:gs pos="0">
+              <a:schemeClr val="phClr">
+                <a:tint val="93000"/>
+                <a:satMod val="150000"/>
+                <a:shade val="98000"/>
+                <a:lumMod val="102000"/>
+              </a:schemeClr>
+            </a:gs>
+            <a:gs pos="50000">
+              <a:schemeClr val="phClr">
+                <a:tint val="98000"/>
+                <a:satMod val="130000"/>
+                <a:shade val="90000"/>
+                <a:lumMod val="103000"/>
+              </a:schemeClr>
+            </a:gs>
+            <a:gs pos="100000">
+              <a:schemeClr val="phClr">
+                <a:shade val="63000"/>
+                <a:satMod val="120000"/>
+              </a:schemeClr>
+            </a:gs>
+          </a:gsLst>
+          <a:lin ang="5400000" scaled="0"/>
+        </a:gradFill>
+      </a:bgFillStyleLst>
+    </a:fmtScheme>
+  </a:themeElements>
+  <a:objectDefaults>
+    <a:lnDef>
+      <a:spPr/>
+      <a:bodyPr/>
+      <a:lstStyle/>
+      <a:style>
+        <a:lnRef idx="2">
+          <a:schemeClr val="accent1"/>
+        </a:lnRef>
+        <a:fillRef idx="0">
+          <a:schemeClr val="accent1"/>
+        </a:fillRef>
+        <a:effectRef idx="1">
+          <a:schemeClr val="accent1"/>
+        </a:effectRef>
+        <a:fontRef idx="minor">
+          <a:schemeClr val="tx1"/>
+        </a:fontRef>
+      </a:style>
+    </a:lnDef>
+  </a:objectDefaults>
+  <a:extraClrSchemeLst/>
+  <a:extLst>
+    <a:ext uri="{05A4C25C-085E-4340-85A3-A5531E510DB2}">
+      <thm15:themeFamily xmlns:thm15="http://schemas.microsoft.com/office/thememl/2012/main" name="Office Theme" id="{2E142A2C-CD16-42D6-873A-C26D2A0506FA}" vid="{1BDDFF52-6CD6-40A5-AB3C-68EB2F1E4D0A}"/>
+    </a:ext>
+  </a:extLst>
+</a:theme>
 </file>
--- a/figures/fig_controller_interaction.pptx
+++ b/figures/fig_controller_interaction.pptx
@@ -2075,9 +2075,9 @@
           <a:solidFill>
             <a:srgbClr val="FFFFFF"/>
           </a:solidFill>
-          <a:ln w="11430">
-            <a:solidFill>
-              <a:srgbClr val="526477"/>
+          <a:ln w="12700">
+            <a:solidFill>
+              <a:srgbClr val="2476D2"/>
             </a:solidFill>
             <a:prstDash val="dash"/>
           </a:ln>
@@ -2164,7 +2164,7 @@
               <a:buNone/>
             </a:pPr>
             <a:r>
-              <a:rPr sz="1200">
+              <a:rPr sz="1200" dirty="0">
                 <a:solidFill>
                   <a:srgbClr val="14233E"/>
                 </a:solidFill>
@@ -2175,7 +2175,7 @@
               <a:t>Draft </a:t>
             </a:r>
             <a:r>
-              <a:rPr sz="1200" i="1">
+              <a:rPr sz="1200" i="1" dirty="0">
                 <a:solidFill>
                   <a:srgbClr val="14233E"/>
                 </a:solidFill>
@@ -2186,7 +2186,7 @@
               <a:t>i</a:t>
             </a:r>
             <a:r>
-              <a:rPr sz="1200">
+              <a:rPr sz="1200" dirty="0">
                 <a:solidFill>
                   <a:srgbClr val="14233E"/>
                 </a:solidFill>
@@ -2194,9 +2194,20 @@
                 <a:ea typeface="Arial"/>
                 <a:cs typeface="Arial"/>
               </a:rPr>
-              <a:t>+2</a:t>
+              <a:t>+</a:t>
             </a:r>
-            <a:endParaRPr sz="1200"/>
+            <a:r>
+              <a:rPr lang="en-US" sz="1200" dirty="0">
+                <a:solidFill>
+                  <a:srgbClr val="14233E"/>
+                </a:solidFill>
+                <a:latin typeface="Arial"/>
+                <a:ea typeface="Arial"/>
+                <a:cs typeface="Arial"/>
+              </a:rPr>
+              <a:t>1</a:t>
+            </a:r>
+            <a:endParaRPr sz="1200" dirty="0"/>
           </a:p>
         </p:txBody>
       </p:sp>
@@ -2274,7 +2285,7 @@
               <a:buNone/>
             </a:pPr>
             <a:r>
-              <a:rPr sz="1200">
+              <a:rPr sz="1200" dirty="0">
                 <a:solidFill>
                   <a:srgbClr val="14233E"/>
                 </a:solidFill>
@@ -2285,7 +2296,7 @@
               <a:t>Draft </a:t>
             </a:r>
             <a:r>
-              <a:rPr sz="1200" i="1">
+              <a:rPr sz="1200" i="1" dirty="0">
                 <a:solidFill>
                   <a:srgbClr val="14233E"/>
                 </a:solidFill>
@@ -2296,7 +2307,7 @@
               <a:t>i</a:t>
             </a:r>
             <a:r>
-              <a:rPr sz="1200">
+              <a:rPr sz="1200" dirty="0">
                 <a:solidFill>
                   <a:srgbClr val="14233E"/>
                 </a:solidFill>
@@ -2304,9 +2315,20 @@
                 <a:ea typeface="Arial"/>
                 <a:cs typeface="Arial"/>
               </a:rPr>
-              <a:t>+1</a:t>
+              <a:t>+</a:t>
             </a:r>
-            <a:endParaRPr sz="1200"/>
+            <a:r>
+              <a:rPr lang="en-US" sz="1200" dirty="0">
+                <a:solidFill>
+                  <a:srgbClr val="14233E"/>
+                </a:solidFill>
+                <a:latin typeface="Arial"/>
+                <a:ea typeface="Arial"/>
+                <a:cs typeface="Arial"/>
+              </a:rPr>
+              <a:t>2</a:t>
+            </a:r>
+            <a:endParaRPr sz="1200" dirty="0"/>
           </a:p>
         </p:txBody>
       </p:sp>
@@ -4655,6 +4677,46 @@
           </a:prstGeom>
         </p:spPr>
       </p:pic>
+      <p:sp>
+        <p:nvSpPr>
+          <p:cNvPr id="19" name="TextBox 18">
+            <a:extLst>
+              <a:ext uri="{FF2B5EF4-FFF2-40B4-BE49-F238E27FC236}">
+                <a16:creationId xmlns:a16="http://schemas.microsoft.com/office/drawing/2014/main" id="{C87D5440-3246-10D5-F543-8195B4DF01C5}"/>
+              </a:ext>
+            </a:extLst>
+          </p:cNvPr>
+          <p:cNvSpPr txBox="1"/>
+          <p:nvPr/>
+        </p:nvSpPr>
+        <p:spPr>
+          <a:xfrm>
+            <a:off x="3024836" y="679734"/>
+            <a:ext cx="670376" cy="261610"/>
+          </a:xfrm>
+          <a:prstGeom prst="rect">
+            <a:avLst/>
+          </a:prstGeom>
+          <a:noFill/>
+        </p:spPr>
+        <p:txBody>
+          <a:bodyPr wrap="none" rtlCol="0">
+            <a:spAutoFit/>
+          </a:bodyPr>
+          <a:lstStyle/>
+          <a:p>
+            <a:r>
+              <a:rPr lang="en-US" altLang="ko-KR" sz="1100" dirty="0"/>
+              <a:t>i</a:t>
+            </a:r>
+            <a:r>
+              <a:rPr lang="en-US" altLang="ko-KR" sz="1100"/>
+              <a:t>n-order</a:t>
+            </a:r>
+            <a:endParaRPr lang="ko-KR" altLang="en-US" sz="1100" dirty="0"/>
+          </a:p>
+        </p:txBody>
+      </p:sp>
     </p:spTree>
     <p:extLst>
       <p:ext uri="{BB962C8B-B14F-4D97-AF65-F5344CB8AC3E}">

--- a/figures/fig_controller_interaction.pptx
+++ b/figures/fig_controller_interaction.pptx
@@ -3158,7 +3158,7 @@
         </p:nvSpPr>
         <p:spPr>
           <a:xfrm>
-            <a:off x="8203996" y="1679487"/>
+            <a:off x="8203996" y="1674750"/>
             <a:ext cx="1426464" cy="182880"/>
           </a:xfrm>
           <a:prstGeom prst="rect">
@@ -3182,7 +3182,29 @@
                 <a:ea typeface="Arial"/>
                 <a:cs typeface="Arial"/>
               </a:rPr>
-              <a:t>Encoding &amp; saving</a:t>
+              <a:t>Encoding &amp; </a:t>
+            </a:r>
+            <a:r>
+              <a:rPr lang="en-US" sz="1100" dirty="0">
+                <a:solidFill>
+                  <a:srgbClr val="14233E"/>
+                </a:solidFill>
+                <a:latin typeface="Arial"/>
+                <a:ea typeface="Arial"/>
+                <a:cs typeface="Arial"/>
+              </a:rPr>
+              <a:t>S</a:t>
+            </a:r>
+            <a:r>
+              <a:rPr sz="1100" dirty="0">
+                <a:solidFill>
+                  <a:srgbClr val="14233E"/>
+                </a:solidFill>
+                <a:latin typeface="Arial"/>
+                <a:ea typeface="Arial"/>
+                <a:cs typeface="Arial"/>
+              </a:rPr>
+              <a:t>aving</a:t>
             </a:r>
             <a:endParaRPr sz="1100" dirty="0"/>
           </a:p>
@@ -3404,7 +3426,7 @@
         </p:nvSpPr>
         <p:spPr>
           <a:xfrm>
-            <a:off x="9381744" y="2143646"/>
+            <a:off x="9373208" y="2143646"/>
             <a:ext cx="1389888" cy="370238"/>
           </a:xfrm>
           <a:prstGeom prst="rect">

--- a/figures/fig_controller_interaction.pptx
+++ b/figures/fig_controller_interaction.pptx
@@ -2404,7 +2404,7 @@
               <a:buNone/>
             </a:pPr>
             <a:r>
-              <a:rPr sz="1200" b="1">
+              <a:rPr sz="1200" b="1" dirty="0">
                 <a:solidFill>
                   <a:srgbClr val="2476D2"/>
                 </a:solidFill>
@@ -2412,9 +2412,20 @@
                 <a:ea typeface="Arial"/>
                 <a:cs typeface="Arial"/>
               </a:rPr>
-              <a:t>Optional image processing</a:t>
+              <a:t>Optional </a:t>
             </a:r>
-            <a:endParaRPr sz="1200"/>
+            <a:r>
+              <a:rPr lang="en-US" sz="1200" b="1" dirty="0">
+                <a:solidFill>
+                  <a:srgbClr val="2476D2"/>
+                </a:solidFill>
+                <a:latin typeface="Arial"/>
+                <a:ea typeface="Arial"/>
+                <a:cs typeface="Arial"/>
+              </a:rPr>
+              <a:t>stages</a:t>
+            </a:r>
+            <a:endParaRPr sz="1200" dirty="0"/>
           </a:p>
         </p:txBody>
       </p:sp>

--- a/figures/fig_controller_interaction.pptx
+++ b/figures/fig_controller_interaction.pptx
@@ -3331,7 +3331,7 @@
               </a:defRPr>
             </a:pPr>
             <a:r>
-              <a:rPr sz="1200" b="0" dirty="0" err="1">
+              <a:rPr sz="1200" b="1" dirty="0" err="1">
                 <a:solidFill>
                   <a:srgbClr val="2476D2"/>
                 </a:solidFill>
@@ -3341,7 +3341,7 @@
               </a:rPr>
               <a:t>decideAdmission</a:t>
             </a:r>
-            <a:endParaRPr sz="1200" dirty="0"/>
+            <a:endParaRPr sz="1200" b="1" dirty="0"/>
           </a:p>
         </p:txBody>
       </p:sp>
@@ -3361,7 +3361,7 @@
         </p:nvSpPr>
         <p:spPr>
           <a:xfrm>
-            <a:off x="6309360" y="1819025"/>
+            <a:off x="6238601" y="1819025"/>
             <a:ext cx="1005840" cy="182880"/>
           </a:xfrm>
           <a:prstGeom prst="rect">
@@ -3385,7 +3385,7 @@
               </a:defRPr>
             </a:pPr>
             <a:r>
-              <a:rPr sz="1200" b="0" dirty="0">
+              <a:rPr sz="1200" b="1" dirty="0">
                 <a:solidFill>
                   <a:srgbClr val="2476D2"/>
                 </a:solidFill>
@@ -3396,7 +3396,7 @@
               <a:t>admit </a:t>
             </a:r>
             <a:r>
-              <a:rPr lang="en-US" sz="1200" b="0" dirty="0">
+              <a:rPr lang="en-US" sz="1200" b="1" dirty="0">
                 <a:solidFill>
                   <a:srgbClr val="2476D2"/>
                 </a:solidFill>
@@ -3407,7 +3407,7 @@
               <a:t>/ </a:t>
             </a:r>
             <a:r>
-              <a:rPr sz="1200" b="0" dirty="0">
+              <a:rPr sz="1200" b="1" dirty="0">
                 <a:solidFill>
                   <a:srgbClr val="2476D2"/>
                 </a:solidFill>
@@ -3417,69 +3417,7 @@
               </a:rPr>
               <a:t>skip</a:t>
             </a:r>
-            <a:endParaRPr sz="1200" dirty="0"/>
-          </a:p>
-        </p:txBody>
-      </p:sp>
-      <p:sp>
-        <p:nvSpPr>
-          <p:cNvPr id="101" name="Text 95">
-            <a:extLst>
-              <a:ext uri="{FF2B5EF4-FFF2-40B4-BE49-F238E27FC236}">
-                <a16:creationId xmlns:a16="http://schemas.microsoft.com/office/drawing/2014/main" id="{5D664695-A050-4AC3-B595-6806176731DD}"/>
-              </a:ext>
-            </a:extLst>
-          </p:cNvPr>
-          <p:cNvSpPr>
-            <a:spLocks noGrp="1"/>
-          </p:cNvSpPr>
-          <p:nvPr/>
-        </p:nvSpPr>
-        <p:spPr>
-          <a:xfrm>
-            <a:off x="9373208" y="2143646"/>
-            <a:ext cx="1389888" cy="370238"/>
-          </a:xfrm>
-          <a:prstGeom prst="rect">
-            <a:avLst/>
-          </a:prstGeom>
-          <a:noFill/>
-        </p:spPr>
-        <p:txBody>
-          <a:bodyPr wrap="none" lIns="0" tIns="0" rIns="0" bIns="0" anchor="ctr"/>
-          <a:lstStyle/>
-          <a:p>
-            <a:pPr marL="0" indent="0" algn="r">
-              <a:buNone/>
-            </a:pPr>
-            <a:r>
-              <a:rPr lang="en-US" sz="1200" dirty="0">
-                <a:solidFill>
-                  <a:srgbClr val="526477"/>
-                </a:solidFill>
-                <a:latin typeface="Arial"/>
-                <a:ea typeface="Arial"/>
-                <a:cs typeface="Arial"/>
-              </a:rPr>
-              <a:t>measured</a:t>
-            </a:r>
-          </a:p>
-          <a:p>
-            <a:pPr marL="0" indent="0" algn="r">
-              <a:buNone/>
-            </a:pPr>
-            <a:r>
-              <a:rPr lang="en-US" sz="1200" dirty="0">
-                <a:solidFill>
-                  <a:srgbClr val="526477"/>
-                </a:solidFill>
-                <a:latin typeface="Arial"/>
-                <a:ea typeface="Arial"/>
-                <a:cs typeface="Arial"/>
-              </a:rPr>
-              <a:t>duration</a:t>
-            </a:r>
-            <a:endParaRPr sz="1200" dirty="0"/>
+            <a:endParaRPr sz="1200" b="1" dirty="0"/>
           </a:p>
         </p:txBody>
       </p:sp>
@@ -4337,7 +4275,7 @@
         </p:nvSpPr>
         <p:spPr>
           <a:xfrm>
-            <a:off x="1162204" y="2272073"/>
+            <a:off x="1162204" y="2277516"/>
             <a:ext cx="893368" cy="228183"/>
           </a:xfrm>
           <a:prstGeom prst="rect">
@@ -4360,7 +4298,7 @@
               </a:defRPr>
             </a:pPr>
             <a:r>
-              <a:rPr lang="en-US" altLang="ko-KR" sz="1200" dirty="0" err="1">
+              <a:rPr lang="en-US" altLang="ko-KR" sz="1200" b="1" dirty="0" err="1">
                 <a:solidFill>
                   <a:srgbClr val="E56E2E"/>
                 </a:solidFill>
@@ -4370,7 +4308,7 @@
               </a:rPr>
               <a:t>decideDelay</a:t>
             </a:r>
-            <a:endParaRPr sz="1200" dirty="0"/>
+            <a:endParaRPr sz="1200" b="1" dirty="0"/>
           </a:p>
         </p:txBody>
       </p:sp>
@@ -4398,7 +4336,7 @@
               <a:gd name="adj1" fmla="val 55774"/>
             </a:avLst>
           </a:prstGeom>
-          <a:ln w="19050">
+          <a:ln w="28575">
             <a:solidFill>
               <a:srgbClr val="2476D2"/>
             </a:solidFill>
@@ -4604,7 +4542,7 @@
               <a:gd name="adj1" fmla="val 70046"/>
             </a:avLst>
           </a:prstGeom>
-          <a:ln w="19050">
+          <a:ln w="28575">
             <a:solidFill>
               <a:srgbClr val="E56E2E"/>
             </a:solidFill>
@@ -4641,8 +4579,8 @@
         </p:nvSpPr>
         <p:spPr>
           <a:xfrm>
-            <a:off x="274320" y="1507420"/>
-            <a:ext cx="548640" cy="276999"/>
+            <a:off x="237744" y="1507420"/>
+            <a:ext cx="585216" cy="276999"/>
           </a:xfrm>
           <a:prstGeom prst="rect">
             <a:avLst/>
@@ -4666,7 +4604,7 @@
               </a:defRPr>
             </a:pPr>
             <a:r>
-              <a:rPr lang="en-US" altLang="ko-KR" sz="1200" dirty="0">
+              <a:rPr lang="en-US" altLang="ko-KR" sz="1200" b="1" dirty="0">
                 <a:solidFill>
                   <a:srgbClr val="E56E2E"/>
                 </a:solidFill>
@@ -4676,7 +4614,7 @@
               </a:rPr>
               <a:t>delay</a:t>
             </a:r>
-            <a:endParaRPr lang="en-US" altLang="ko-KR" sz="1200" dirty="0"/>
+            <a:endParaRPr lang="en-US" altLang="ko-KR" sz="1200" b="1" dirty="0"/>
           </a:p>
         </p:txBody>
       </p:sp>
@@ -4750,6 +4688,36 @@
           </a:p>
         </p:txBody>
       </p:sp>
+      <p:pic>
+        <p:nvPicPr>
+          <p:cNvPr id="71" name="그림 70">
+            <a:extLst>
+              <a:ext uri="{FF2B5EF4-FFF2-40B4-BE49-F238E27FC236}">
+                <a16:creationId xmlns:a16="http://schemas.microsoft.com/office/drawing/2014/main" id="{EDA7DBC2-B2B5-6BEB-170A-B38B35156113}"/>
+              </a:ext>
+            </a:extLst>
+          </p:cNvPr>
+          <p:cNvPicPr>
+            <a:picLocks noChangeAspect="1"/>
+          </p:cNvPicPr>
+          <p:nvPr/>
+        </p:nvPicPr>
+        <p:blipFill>
+          <a:blip r:embed="rId9"/>
+          <a:stretch>
+            <a:fillRect/>
+          </a:stretch>
+        </p:blipFill>
+        <p:spPr>
+          <a:xfrm>
+            <a:off x="9790104" y="1958143"/>
+            <a:ext cx="1099829" cy="733219"/>
+          </a:xfrm>
+          <a:prstGeom prst="rect">
+            <a:avLst/>
+          </a:prstGeom>
+        </p:spPr>
+      </p:pic>
     </p:spTree>
     <p:extLst>
       <p:ext uri="{BB962C8B-B14F-4D97-AF65-F5344CB8AC3E}">

--- a/figures/fig_controller_interaction.pptx
+++ b/figures/fig_controller_interaction.pptx
@@ -1170,7 +1170,7 @@
               <a:buNone/>
             </a:pPr>
             <a:r>
-              <a:rPr sz="1450" b="1">
+              <a:rPr sz="1450" b="1" dirty="0">
                 <a:solidFill>
                   <a:srgbClr val="14233E"/>
                 </a:solidFill>
@@ -1180,7 +1180,7 @@
               </a:rPr>
               <a:t>Pending Draft Sequences</a:t>
             </a:r>
-            <a:endParaRPr sz="1450"/>
+            <a:endParaRPr sz="1450" dirty="0"/>
           </a:p>
         </p:txBody>
       </p:sp>
@@ -1721,9 +1721,12 @@
             </a:avLst>
           </a:prstGeom>
           <a:solidFill>
-            <a:srgbClr val="FFFFFF"/>
-          </a:solidFill>
-          <a:ln w="13335">
+            <a:schemeClr val="accent6">
+              <a:lumMod val="20000"/>
+              <a:lumOff val="80000"/>
+            </a:schemeClr>
+          </a:solidFill>
+          <a:ln w="19050">
             <a:solidFill>
               <a:srgbClr val="14233E"/>
             </a:solidFill>
@@ -1770,7 +1773,7 @@
               <a:buNone/>
             </a:pPr>
             <a:r>
-              <a:rPr sz="1250">
+              <a:rPr sz="1250" dirty="0">
                 <a:solidFill>
                   <a:srgbClr val="14233E"/>
                 </a:solidFill>
@@ -1781,7 +1784,7 @@
               <a:t>Capture </a:t>
             </a:r>
             <a:r>
-              <a:rPr sz="1250" i="1">
+              <a:rPr sz="1250" i="1" dirty="0">
                 <a:solidFill>
                   <a:srgbClr val="14233E"/>
                 </a:solidFill>
@@ -1792,7 +1795,7 @@
               <a:t>i</a:t>
             </a:r>
             <a:r>
-              <a:rPr sz="1250">
+              <a:rPr sz="1250" dirty="0">
                 <a:solidFill>
                   <a:srgbClr val="14233E"/>
                 </a:solidFill>
@@ -1802,7 +1805,7 @@
               </a:rPr>
               <a:t>+2</a:t>
             </a:r>
-            <a:endParaRPr sz="1250"/>
+            <a:endParaRPr sz="1250" dirty="0"/>
           </a:p>
         </p:txBody>
       </p:sp>
@@ -2236,9 +2239,12 @@
             </a:avLst>
           </a:prstGeom>
           <a:solidFill>
-            <a:srgbClr val="FFFFFF"/>
-          </a:solidFill>
-          <a:ln w="12700">
+            <a:schemeClr val="accent6">
+              <a:lumMod val="20000"/>
+              <a:lumOff val="80000"/>
+            </a:schemeClr>
+          </a:solidFill>
+          <a:ln w="19050">
             <a:solidFill>
               <a:srgbClr val="14233E"/>
             </a:solidFill>

--- a/figures/fig_controller_interaction.pptx
+++ b/figures/fig_controller_interaction.pptx
@@ -3337,6 +3337,17 @@
               </a:defRPr>
             </a:pPr>
             <a:r>
+              <a:rPr lang="en-US" sz="1200" b="1">
+                <a:solidFill>
+                  <a:srgbClr val="2476D2"/>
+                </a:solidFill>
+                <a:latin typeface="Arial"/>
+                <a:ea typeface="Arial"/>
+                <a:cs typeface="Arial"/>
+              </a:rPr>
+              <a:t>(b) </a:t>
+            </a:r>
+            <a:r>
               <a:rPr sz="1200" b="1" dirty="0" err="1">
                 <a:solidFill>
                   <a:srgbClr val="2476D2"/>
@@ -3346,6 +3357,17 @@
                 <a:cs typeface="Arial"/>
               </a:rPr>
               <a:t>decideAdmission</a:t>
+            </a:r>
+            <a:r>
+              <a:rPr lang="en-US" sz="1200" b="1" dirty="0">
+                <a:solidFill>
+                  <a:srgbClr val="2476D2"/>
+                </a:solidFill>
+                <a:latin typeface="Arial"/>
+                <a:ea typeface="Arial"/>
+                <a:cs typeface="Arial"/>
+              </a:rPr>
+              <a:t>()</a:t>
             </a:r>
             <a:endParaRPr sz="1200" b="1" dirty="0"/>
           </a:p>
@@ -4281,7 +4303,7 @@
         </p:nvSpPr>
         <p:spPr>
           <a:xfrm>
-            <a:off x="1162204" y="2277516"/>
+            <a:off x="1128851" y="2282279"/>
             <a:ext cx="893368" cy="228183"/>
           </a:xfrm>
           <a:prstGeom prst="rect">
@@ -4293,7 +4315,7 @@
           <a:bodyPr wrap="none" lIns="0" tIns="0" rIns="0" bIns="0" anchor="ctr"/>
           <a:lstStyle/>
           <a:p>
-            <a:pPr>
+            <a:pPr algn="r">
               <a:defRPr sz="1200" b="0">
                 <a:solidFill>
                   <a:srgbClr val="E56E2E"/>
@@ -4304,6 +4326,17 @@
               </a:defRPr>
             </a:pPr>
             <a:r>
+              <a:rPr lang="en-US" altLang="ko-KR" sz="1200" b="1" dirty="0">
+                <a:solidFill>
+                  <a:srgbClr val="E56E2E"/>
+                </a:solidFill>
+                <a:latin typeface="Arial"/>
+                <a:ea typeface="Arial"/>
+                <a:cs typeface="Arial"/>
+              </a:rPr>
+              <a:t>(a) </a:t>
+            </a:r>
+            <a:r>
               <a:rPr lang="en-US" altLang="ko-KR" sz="1200" b="1" dirty="0" err="1">
                 <a:solidFill>
                   <a:srgbClr val="E56E2E"/>
@@ -4313,6 +4346,17 @@
                 <a:cs typeface="Arial"/>
               </a:rPr>
               <a:t>decideDelay</a:t>
+            </a:r>
+            <a:r>
+              <a:rPr lang="en-US" altLang="ko-KR" sz="1200" b="1" dirty="0">
+                <a:solidFill>
+                  <a:srgbClr val="E56E2E"/>
+                </a:solidFill>
+                <a:latin typeface="Arial"/>
+                <a:ea typeface="Arial"/>
+                <a:cs typeface="Arial"/>
+              </a:rPr>
+              <a:t>()</a:t>
             </a:r>
             <a:endParaRPr sz="1200" b="1" dirty="0"/>
           </a:p>

--- a/figures/fig_controller_interaction.pptx
+++ b/figures/fig_controller_interaction.pptx
@@ -3337,17 +3337,6 @@
               </a:defRPr>
             </a:pPr>
             <a:r>
-              <a:rPr lang="en-US" sz="1200" b="1">
-                <a:solidFill>
-                  <a:srgbClr val="2476D2"/>
-                </a:solidFill>
-                <a:latin typeface="Arial"/>
-                <a:ea typeface="Arial"/>
-                <a:cs typeface="Arial"/>
-              </a:rPr>
-              <a:t>(b) </a:t>
-            </a:r>
-            <a:r>
               <a:rPr sz="1200" b="1" dirty="0" err="1">
                 <a:solidFill>
                   <a:srgbClr val="2476D2"/>
@@ -4325,17 +4314,6 @@
                 <a:cs typeface="Arial"/>
               </a:defRPr>
             </a:pPr>
-            <a:r>
-              <a:rPr lang="en-US" altLang="ko-KR" sz="1200" b="1" dirty="0">
-                <a:solidFill>
-                  <a:srgbClr val="E56E2E"/>
-                </a:solidFill>
-                <a:latin typeface="Arial"/>
-                <a:ea typeface="Arial"/>
-                <a:cs typeface="Arial"/>
-              </a:rPr>
-              <a:t>(a) </a:t>
-            </a:r>
             <a:r>
               <a:rPr lang="en-US" altLang="ko-KR" sz="1200" b="1" dirty="0" err="1">
                 <a:solidFill>
